--- a/docs/presentacion/Longbox - Presentación y demostración.pptx
+++ b/docs/presentacion/Longbox - Presentación y demostración.pptx
@@ -4,22 +4,19 @@
   <p:sldMasterIdLst>
     <p:sldMasterId id="2147483648" r:id="rId1"/>
   </p:sldMasterIdLst>
-  <p:notesMasterIdLst>
-    <p:notesMasterId r:id="rId12"/>
-  </p:notesMasterIdLst>
   <p:sldIdLst>
-    <p:sldId id="256" r:id="rId2"/>
-    <p:sldId id="257" r:id="rId3"/>
-    <p:sldId id="258" r:id="rId4"/>
-    <p:sldId id="259" r:id="rId5"/>
-    <p:sldId id="260" r:id="rId6"/>
-    <p:sldId id="261" r:id="rId7"/>
-    <p:sldId id="262" r:id="rId8"/>
-    <p:sldId id="263" r:id="rId9"/>
-    <p:sldId id="264" r:id="rId10"/>
-    <p:sldId id="265" r:id="rId11"/>
+    <p:sldId id="256" r:id="rId7"/>
+    <p:sldId id="257" r:id="rId9"/>
+    <p:sldId id="258" r:id="rId10"/>
+    <p:sldId id="259" r:id="rId11"/>
+    <p:sldId id="260" r:id="rId12"/>
+    <p:sldId id="261" r:id="rId13"/>
+    <p:sldId id="262" r:id="rId14"/>
+    <p:sldId id="263" r:id="rId15"/>
+    <p:sldId id="264" r:id="rId16"/>
+    <p:sldId id="265" r:id="rId17"/>
   </p:sldIdLst>
-  <p:sldSz cx="12192000" cy="6858000"/>
+  <p:sldSz cx="12191695" cy="6858000" type="screen4x3"/>
   <p:notesSz cx="6858000" cy="9144000"/>
   <p:defaultTextStyle>
     <a:defPPr>
@@ -116,27 +113,11 @@
       </a:defRPr>
     </a:lvl9pPr>
   </p:defaultTextStyle>
-  <p:extLst>
-    <p:ext uri="{EFAFB233-063F-42B5-8137-9DF3F51BA10A}">
-      <p15:sldGuideLst xmlns:p15="http://schemas.microsoft.com/office/powerpoint/2012/main">
-        <p15:guide id="1" orient="horz" pos="2160">
-          <p15:clr>
-            <a:srgbClr val="A4A3A4"/>
-          </p15:clr>
-        </p15:guide>
-        <p15:guide id="2" pos="2880">
-          <p15:clr>
-            <a:srgbClr val="A4A3A4"/>
-          </p15:clr>
-        </p15:guide>
-      </p15:sldGuideLst>
-    </p:ext>
-  </p:extLst>
 </p:presentation>
 </file>
 
 <file path=ppt/notesMasters/notesMaster1.xml><?xml version="1.0" encoding="utf-8"?>
-<p:notesMaster xmlns:a="http://schemas.openxmlformats.org/drawingml/2006/main" xmlns:r="http://schemas.openxmlformats.org/officeDocument/2006/relationships" xmlns:p="http://schemas.openxmlformats.org/presentationml/2006/main">
+<p:notesMaster xmlns:a="http://schemas.openxmlformats.org/drawingml/2006/main" xmlns:p="http://schemas.openxmlformats.org/presentationml/2006/main" xmlns:r="http://schemas.openxmlformats.org/officeDocument/2006/relationships">
   <p:cSld>
     <p:bg>
       <p:bgRef idx="1001">
@@ -157,16 +138,241 @@
           <a:chExt cx="0" cy="0"/>
         </a:xfrm>
       </p:grpSpPr>
+      <p:sp>
+        <p:nvSpPr>
+          <p:cNvPr id="2" name="Header Placeholder 1"/>
+          <p:cNvSpPr>
+            <a:spLocks noGrp="1"/>
+          </p:cNvSpPr>
+          <p:nvPr>
+            <p:ph type="hdr" sz="quarter"/>
+          </p:nvPr>
+        </p:nvSpPr>
+        <p:spPr>
+          <a:xfrm>
+            <a:off x="0" y="0"/>
+            <a:ext cx="2971800" cy="457200"/>
+          </a:xfrm>
+          <a:prstGeom prst="rect">
+            <a:avLst/>
+          </a:prstGeom>
+        </p:spPr>
+        <p:txBody>
+          <a:bodyPr vert="horz" lIns="91440" tIns="45720" rIns="91440" bIns="45720" rtlCol="0"/>
+          <a:lstStyle>
+            <a:lvl1pPr algn="l">
+              <a:defRPr sz="1200"/>
+            </a:lvl1pPr>
+          </a:lstStyle>
+          <a:p>
+            <a:endParaRPr lang="en-US"/>
+          </a:p>
+        </p:txBody>
+      </p:sp>
+      <p:sp>
+        <p:nvSpPr>
+          <p:cNvPr id="3" name="Date Placeholder 2"/>
+          <p:cNvSpPr>
+            <a:spLocks noGrp="1"/>
+          </p:cNvSpPr>
+          <p:nvPr>
+            <p:ph type="dt" idx="1"/>
+          </p:nvPr>
+        </p:nvSpPr>
+        <p:spPr>
+          <a:xfrm>
+            <a:off x="3884613" y="0"/>
+            <a:ext cx="2971800" cy="457200"/>
+          </a:xfrm>
+          <a:prstGeom prst="rect">
+            <a:avLst/>
+          </a:prstGeom>
+        </p:spPr>
+        <p:txBody>
+          <a:bodyPr vert="horz" lIns="91440" tIns="45720" rIns="91440" bIns="45720" rtlCol="0"/>
+          <a:lstStyle>
+            <a:lvl1pPr algn="r">
+              <a:defRPr sz="1200"/>
+            </a:lvl1pPr>
+          </a:lstStyle>
+          <a:p>
+            <a:fld id="{0F89C1C7-3DCD-1040-A9CF-14679D8B5DDD}" type="datetimeFigureOut">
+              <a:rPr lang="en-US" smtClean="0"/>
+              <a:t>10/17/16</a:t>
+            </a:fld>
+            <a:endParaRPr lang="en-US"/>
+          </a:p>
+        </p:txBody>
+      </p:sp>
+      <p:sp>
+        <p:nvSpPr>
+          <p:cNvPr id="4" name="Slide Image Placeholder 3"/>
+          <p:cNvSpPr>
+            <a:spLocks noGrp="1" noRot="1" noChangeAspect="1"/>
+          </p:cNvSpPr>
+          <p:nvPr>
+            <p:ph type="sldImg" idx="2"/>
+          </p:nvPr>
+        </p:nvSpPr>
+        <p:spPr>
+          <a:xfrm>
+            <a:off x="1143000" y="685800"/>
+            <a:ext cx="4572000" cy="3429000"/>
+          </a:xfrm>
+          <a:prstGeom prst="rect">
+            <a:avLst/>
+          </a:prstGeom>
+          <a:noFill/>
+          <a:ln w="12700">
+            <a:solidFill>
+              <a:prstClr val="black"/>
+            </a:solidFill>
+          </a:ln>
+        </p:spPr>
+        <p:txBody>
+          <a:bodyPr vert="horz" lIns="91440" tIns="45720" rIns="91440" bIns="45720" rtlCol="0" anchor="ctr"/>
+          <a:lstStyle/>
+          <a:p>
+            <a:endParaRPr lang="en-US"/>
+          </a:p>
+        </p:txBody>
+      </p:sp>
+      <p:sp>
+        <p:nvSpPr>
+          <p:cNvPr id="5" name="Notes Placeholder 4"/>
+          <p:cNvSpPr>
+            <a:spLocks noGrp="1"/>
+          </p:cNvSpPr>
+          <p:nvPr>
+            <p:ph type="body" sz="quarter" idx="3"/>
+          </p:nvPr>
+        </p:nvSpPr>
+        <p:spPr>
+          <a:xfrm>
+            <a:off x="685800" y="4343400"/>
+            <a:ext cx="5486400" cy="4114800"/>
+          </a:xfrm>
+          <a:prstGeom prst="rect">
+            <a:avLst/>
+          </a:prstGeom>
+        </p:spPr>
+        <p:txBody>
+          <a:bodyPr vert="horz" lIns="91440" tIns="45720" rIns="91440" bIns="45720" rtlCol="0"/>
+          <a:lstStyle/>
+          <a:p>
+            <a:pPr lvl="0"/>
+            <a:r>
+              <a:rPr lang="en-US" smtClean="0"/>
+              <a:t>Click to edit Master text styles</a:t>
+            </a:r>
+          </a:p>
+          <a:p>
+            <a:pPr lvl="1"/>
+            <a:r>
+              <a:rPr lang="en-US" smtClean="0"/>
+              <a:t>Second level</a:t>
+            </a:r>
+          </a:p>
+          <a:p>
+            <a:pPr lvl="2"/>
+            <a:r>
+              <a:rPr lang="en-US" smtClean="0"/>
+              <a:t>Third level</a:t>
+            </a:r>
+          </a:p>
+          <a:p>
+            <a:pPr lvl="3"/>
+            <a:r>
+              <a:rPr lang="en-US" smtClean="0"/>
+              <a:t>Fourth level</a:t>
+            </a:r>
+          </a:p>
+          <a:p>
+            <a:pPr lvl="4"/>
+            <a:r>
+              <a:rPr lang="en-US" smtClean="0"/>
+              <a:t>Fifth level</a:t>
+            </a:r>
+            <a:endParaRPr lang="en-US"/>
+          </a:p>
+        </p:txBody>
+      </p:sp>
+      <p:sp>
+        <p:nvSpPr>
+          <p:cNvPr id="6" name="Footer Placeholder 5"/>
+          <p:cNvSpPr>
+            <a:spLocks noGrp="1"/>
+          </p:cNvSpPr>
+          <p:nvPr>
+            <p:ph type="ftr" sz="quarter" idx="4"/>
+          </p:nvPr>
+        </p:nvSpPr>
+        <p:spPr>
+          <a:xfrm>
+            <a:off x="0" y="8685213"/>
+            <a:ext cx="2971800" cy="457200"/>
+          </a:xfrm>
+          <a:prstGeom prst="rect">
+            <a:avLst/>
+          </a:prstGeom>
+        </p:spPr>
+        <p:txBody>
+          <a:bodyPr vert="horz" lIns="91440" tIns="45720" rIns="91440" bIns="45720" rtlCol="0" anchor="b"/>
+          <a:lstStyle>
+            <a:lvl1pPr algn="l">
+              <a:defRPr sz="1200"/>
+            </a:lvl1pPr>
+          </a:lstStyle>
+          <a:p>
+            <a:endParaRPr lang="en-US"/>
+          </a:p>
+        </p:txBody>
+      </p:sp>
+      <p:sp>
+        <p:nvSpPr>
+          <p:cNvPr id="7" name="Slide Number Placeholder 6"/>
+          <p:cNvSpPr>
+            <a:spLocks noGrp="1"/>
+          </p:cNvSpPr>
+          <p:nvPr>
+            <p:ph type="sldNum" sz="quarter" idx="5"/>
+          </p:nvPr>
+        </p:nvSpPr>
+        <p:spPr>
+          <a:xfrm>
+            <a:off x="3884613" y="8685213"/>
+            <a:ext cx="2971800" cy="457200"/>
+          </a:xfrm>
+          <a:prstGeom prst="rect">
+            <a:avLst/>
+          </a:prstGeom>
+        </p:spPr>
+        <p:txBody>
+          <a:bodyPr vert="horz" lIns="91440" tIns="45720" rIns="91440" bIns="45720" rtlCol="0" anchor="b"/>
+          <a:lstStyle>
+            <a:lvl1pPr algn="r">
+              <a:defRPr sz="1200"/>
+            </a:lvl1pPr>
+          </a:lstStyle>
+          <a:p>
+            <a:fld id="{BB5E49A5-4136-284D-997B-48E1D791AD67}" type="slidenum">
+              <a:rPr lang="en-US" smtClean="0"/>
+              <a:t>‹#›</a:t>
+            </a:fld>
+            <a:endParaRPr lang="en-US"/>
+          </a:p>
+        </p:txBody>
+      </p:sp>
     </p:spTree>
     <p:extLst>
       <p:ext uri="{BB962C8B-B14F-4D97-AF65-F5344CB8AC3E}">
-        <p14:creationId xmlns:p14="http://schemas.microsoft.com/office/powerpoint/2010/main" val="3621931368"/>
+        <p14:creationId xmlns:p14="http://schemas.microsoft.com/office/powerpoint/2010/main" val="2623252185"/>
       </p:ext>
     </p:extLst>
   </p:cSld>
   <p:clrMap bg1="lt1" tx1="dk1" bg2="lt2" tx2="dk2" accent1="accent1" accent2="accent2" accent3="accent3" accent4="accent4" accent5="accent5" accent6="accent6" hlink="hlink" folHlink="folHlink"/>
   <p:notesStyle>
-    <a:lvl1pPr marL="0" algn="l" defTabSz="914400" rtl="0" eaLnBrk="1" latinLnBrk="0" hangingPunct="1">
+    <a:lvl1pPr marL="0" algn="l" defTabSz="457200" rtl="0" eaLnBrk="1" latinLnBrk="0" hangingPunct="1">
       <a:defRPr sz="1200" kern="1200">
         <a:solidFill>
           <a:schemeClr val="tx1"/>
@@ -176,7 +382,7 @@
         <a:cs typeface="+mn-cs"/>
       </a:defRPr>
     </a:lvl1pPr>
-    <a:lvl2pPr marL="457200" algn="l" defTabSz="914400" rtl="0" eaLnBrk="1" latinLnBrk="0" hangingPunct="1">
+    <a:lvl2pPr marL="457200" algn="l" defTabSz="457200" rtl="0" eaLnBrk="1" latinLnBrk="0" hangingPunct="1">
       <a:defRPr sz="1200" kern="1200">
         <a:solidFill>
           <a:schemeClr val="tx1"/>
@@ -186,7 +392,7 @@
         <a:cs typeface="+mn-cs"/>
       </a:defRPr>
     </a:lvl2pPr>
-    <a:lvl3pPr marL="914400" algn="l" defTabSz="914400" rtl="0" eaLnBrk="1" latinLnBrk="0" hangingPunct="1">
+    <a:lvl3pPr marL="914400" algn="l" defTabSz="457200" rtl="0" eaLnBrk="1" latinLnBrk="0" hangingPunct="1">
       <a:defRPr sz="1200" kern="1200">
         <a:solidFill>
           <a:schemeClr val="tx1"/>
@@ -196,7 +402,7 @@
         <a:cs typeface="+mn-cs"/>
       </a:defRPr>
     </a:lvl3pPr>
-    <a:lvl4pPr marL="1371600" algn="l" defTabSz="914400" rtl="0" eaLnBrk="1" latinLnBrk="0" hangingPunct="1">
+    <a:lvl4pPr marL="1371600" algn="l" defTabSz="457200" rtl="0" eaLnBrk="1" latinLnBrk="0" hangingPunct="1">
       <a:defRPr sz="1200" kern="1200">
         <a:solidFill>
           <a:schemeClr val="tx1"/>
@@ -206,7 +412,7 @@
         <a:cs typeface="+mn-cs"/>
       </a:defRPr>
     </a:lvl4pPr>
-    <a:lvl5pPr marL="1828800" algn="l" defTabSz="914400" rtl="0" eaLnBrk="1" latinLnBrk="0" hangingPunct="1">
+    <a:lvl5pPr marL="1828800" algn="l" defTabSz="457200" rtl="0" eaLnBrk="1" latinLnBrk="0" hangingPunct="1">
       <a:defRPr sz="1200" kern="1200">
         <a:solidFill>
           <a:schemeClr val="tx1"/>
@@ -216,7 +422,7 @@
         <a:cs typeface="+mn-cs"/>
       </a:defRPr>
     </a:lvl5pPr>
-    <a:lvl6pPr marL="2286000" algn="l" defTabSz="914400" rtl="0" eaLnBrk="1" latinLnBrk="0" hangingPunct="1">
+    <a:lvl6pPr marL="2286000" algn="l" defTabSz="457200" rtl="0" eaLnBrk="1" latinLnBrk="0" hangingPunct="1">
       <a:defRPr sz="1200" kern="1200">
         <a:solidFill>
           <a:schemeClr val="tx1"/>
@@ -226,7 +432,7 @@
         <a:cs typeface="+mn-cs"/>
       </a:defRPr>
     </a:lvl6pPr>
-    <a:lvl7pPr marL="2743200" algn="l" defTabSz="914400" rtl="0" eaLnBrk="1" latinLnBrk="0" hangingPunct="1">
+    <a:lvl7pPr marL="2743200" algn="l" defTabSz="457200" rtl="0" eaLnBrk="1" latinLnBrk="0" hangingPunct="1">
       <a:defRPr sz="1200" kern="1200">
         <a:solidFill>
           <a:schemeClr val="tx1"/>
@@ -236,7 +442,7 @@
         <a:cs typeface="+mn-cs"/>
       </a:defRPr>
     </a:lvl7pPr>
-    <a:lvl8pPr marL="3200400" algn="l" defTabSz="914400" rtl="0" eaLnBrk="1" latinLnBrk="0" hangingPunct="1">
+    <a:lvl8pPr marL="3200400" algn="l" defTabSz="457200" rtl="0" eaLnBrk="1" latinLnBrk="0" hangingPunct="1">
       <a:defRPr sz="1200" kern="1200">
         <a:solidFill>
           <a:schemeClr val="tx1"/>
@@ -246,7 +452,7 @@
         <a:cs typeface="+mn-cs"/>
       </a:defRPr>
     </a:lvl8pPr>
-    <a:lvl9pPr marL="3657600" algn="l" defTabSz="914400" rtl="0" eaLnBrk="1" latinLnBrk="0" hangingPunct="1">
+    <a:lvl9pPr marL="3657600" algn="l" defTabSz="457200" rtl="0" eaLnBrk="1" latinLnBrk="0" hangingPunct="1">
       <a:defRPr sz="1200" kern="1200">
         <a:solidFill>
           <a:schemeClr val="tx1"/>
@@ -261,7 +467,7 @@
 </file>
 
 <file path=ppt/notesSlides/notesSlide1.xml><?xml version="1.0" encoding="utf-8"?>
-<p:notes xmlns:a="http://schemas.openxmlformats.org/drawingml/2006/main" xmlns:r="http://schemas.openxmlformats.org/officeDocument/2006/relationships" xmlns:p="http://schemas.openxmlformats.org/presentationml/2006/main">
+<p:notes xmlns:a="http://schemas.openxmlformats.org/drawingml/2006/main" xmlns:p="http://schemas.openxmlformats.org/presentationml/2006/main" xmlns:r="http://schemas.openxmlformats.org/officeDocument/2006/relationships">
   <p:cSld>
     <p:spTree>
       <p:nvGrpSpPr>
@@ -281,7 +487,7 @@
         <p:nvSpPr>
           <p:cNvPr id="2" name="Slide Image Placeholder 1"/>
           <p:cNvSpPr>
-            <a:spLocks noGrp="1" noRot="1" noChangeAspect="1"/>
+            <a:spLocks noGrp="1"/>
           </p:cNvSpPr>
           <p:nvPr>
             <p:ph type="sldImg" idx="2"/>
@@ -296,7 +502,7 @@
             <a:spLocks noGrp="1"/>
           </p:cNvSpPr>
           <p:nvPr>
-            <p:ph type="body" sz="quarter" idx="3"/>
+            <p:ph type="body" idx="3" sz="quarter"/>
           </p:nvPr>
         </p:nvSpPr>
         <p:spPr/>
@@ -308,9 +514,7 @@
               <a:t>Buenas tardes. Vamos a presentar Longbox, un sistema de gestión para una comiquería.</a:t>
             </a:r>
           </a:p>
-          <a:p>
-            <a:endParaRPr/>
-          </a:p>
+          <a:p/>
           <a:p>
             <a:r>
               <a:t>La presentación tiene dos partes de cinco minutos: primero qué es el sistema, qué está hecho y qué falta; después lo mostramos funcionando.</a:t>
@@ -325,7 +529,7 @@
             <a:spLocks noGrp="1"/>
           </p:cNvSpPr>
           <p:nvPr>
-            <p:ph type="sldNum" sz="quarter" idx="5"/>
+            <p:ph type="sldNum" idx="5" sz="quarter"/>
           </p:nvPr>
         </p:nvSpPr>
         <p:spPr/>
@@ -339,7 +543,7 @@
 </file>
 
 <file path=ppt/notesSlides/notesSlide10.xml><?xml version="1.0" encoding="utf-8"?>
-<p:notes xmlns:a="http://schemas.openxmlformats.org/drawingml/2006/main" xmlns:r="http://schemas.openxmlformats.org/officeDocument/2006/relationships" xmlns:p="http://schemas.openxmlformats.org/presentationml/2006/main">
+<p:notes xmlns:a="http://schemas.openxmlformats.org/drawingml/2006/main" xmlns:p="http://schemas.openxmlformats.org/presentationml/2006/main" xmlns:r="http://schemas.openxmlformats.org/officeDocument/2006/relationships">
   <p:cSld>
     <p:spTree>
       <p:nvGrpSpPr>
@@ -359,7 +563,7 @@
         <p:nvSpPr>
           <p:cNvPr id="2" name="Slide Image Placeholder 1"/>
           <p:cNvSpPr>
-            <a:spLocks noGrp="1" noRot="1" noChangeAspect="1"/>
+            <a:spLocks noGrp="1"/>
           </p:cNvSpPr>
           <p:nvPr>
             <p:ph type="sldImg" idx="2"/>
@@ -374,7 +578,7 @@
             <a:spLocks noGrp="1"/>
           </p:cNvSpPr>
           <p:nvPr>
-            <p:ph type="body" sz="quarter" idx="3"/>
+            <p:ph type="body" idx="3" sz="quarter"/>
           </p:nvPr>
         </p:nvSpPr>
         <p:spPr/>
@@ -386,9 +590,7 @@
               <a:t>Para cerrar: Longbox es un sistema para toda la comiquería, construido paso a paso y verificado contra su documento de análisis.</a:t>
             </a:r>
           </a:p>
-          <a:p>
-            <a:endParaRPr/>
-          </a:p>
+          <a:p/>
           <a:p>
             <a:r>
               <a:t>Gracias. Quedamos a disposición para preguntas.</a:t>
@@ -403,7 +605,7 @@
             <a:spLocks noGrp="1"/>
           </p:cNvSpPr>
           <p:nvPr>
-            <p:ph type="sldNum" sz="quarter" idx="5"/>
+            <p:ph type="sldNum" idx="5" sz="quarter"/>
           </p:nvPr>
         </p:nvSpPr>
         <p:spPr/>
@@ -417,7 +619,7 @@
 </file>
 
 <file path=ppt/notesSlides/notesSlide2.xml><?xml version="1.0" encoding="utf-8"?>
-<p:notes xmlns:a="http://schemas.openxmlformats.org/drawingml/2006/main" xmlns:r="http://schemas.openxmlformats.org/officeDocument/2006/relationships" xmlns:p="http://schemas.openxmlformats.org/presentationml/2006/main">
+<p:notes xmlns:a="http://schemas.openxmlformats.org/drawingml/2006/main" xmlns:p="http://schemas.openxmlformats.org/presentationml/2006/main" xmlns:r="http://schemas.openxmlformats.org/officeDocument/2006/relationships">
   <p:cSld>
     <p:spTree>
       <p:nvGrpSpPr>
@@ -437,7 +639,7 @@
         <p:nvSpPr>
           <p:cNvPr id="2" name="Slide Image Placeholder 1"/>
           <p:cNvSpPr>
-            <a:spLocks noGrp="1" noRot="1" noChangeAspect="1"/>
+            <a:spLocks noGrp="1"/>
           </p:cNvSpPr>
           <p:nvPr>
             <p:ph type="sldImg" idx="2"/>
@@ -452,7 +654,7 @@
             <a:spLocks noGrp="1"/>
           </p:cNvSpPr>
           <p:nvPr>
-            <p:ph type="body" sz="quarter" idx="3"/>
+            <p:ph type="body" idx="3" sz="quarter"/>
           </p:nvPr>
         </p:nvSpPr>
         <p:spPr/>
@@ -464,9 +666,7 @@
               <a:t>Una comiquería maneja dos tipos de material: editorial, como manga y cómics, y no editorial, como figuras. El precio de un tomo importado depende del costo, del envío y de la cotización. Los proveedores anuncian novedades por correo. Y hay ventas en el local y online. Hoy eso se lleva con planillas y correos.</a:t>
             </a:r>
           </a:p>
-          <a:p>
-            <a:endParaRPr/>
-          </a:p>
+          <a:p/>
           <a:p>
             <a:r>
               <a:t>Longbox lo reúne en un sistema web con tres roles: el Administrador gestiona, el Cajero vende en el local y el Cliente compra en la tienda.</a:t>
@@ -481,7 +681,7 @@
             <a:spLocks noGrp="1"/>
           </p:cNvSpPr>
           <p:nvPr>
-            <p:ph type="sldNum" sz="quarter" idx="5"/>
+            <p:ph type="sldNum" idx="5" sz="quarter"/>
           </p:nvPr>
         </p:nvSpPr>
         <p:spPr/>
@@ -495,7 +695,7 @@
 </file>
 
 <file path=ppt/notesSlides/notesSlide3.xml><?xml version="1.0" encoding="utf-8"?>
-<p:notes xmlns:a="http://schemas.openxmlformats.org/drawingml/2006/main" xmlns:r="http://schemas.openxmlformats.org/officeDocument/2006/relationships" xmlns:p="http://schemas.openxmlformats.org/presentationml/2006/main">
+<p:notes xmlns:a="http://schemas.openxmlformats.org/drawingml/2006/main" xmlns:p="http://schemas.openxmlformats.org/presentationml/2006/main" xmlns:r="http://schemas.openxmlformats.org/officeDocument/2006/relationships">
   <p:cSld>
     <p:spTree>
       <p:nvGrpSpPr>
@@ -515,7 +715,7 @@
         <p:nvSpPr>
           <p:cNvPr id="2" name="Slide Image Placeholder 1"/>
           <p:cNvSpPr>
-            <a:spLocks noGrp="1" noRot="1" noChangeAspect="1"/>
+            <a:spLocks noGrp="1"/>
           </p:cNvSpPr>
           <p:nvPr>
             <p:ph type="sldImg" idx="2"/>
@@ -530,7 +730,7 @@
             <a:spLocks noGrp="1"/>
           </p:cNvSpPr>
           <p:nvPr>
-            <p:ph type="body" sz="quarter" idx="3"/>
+            <p:ph type="body" idx="3" sz="quarter"/>
           </p:nvPr>
         </p:nvSpPr>
         <p:spPr/>
@@ -539,23 +739,19 @@
           <a:lstStyle/>
           <a:p>
             <a:r>
-              <a:t>Estas son las funciones. Las seis de arriba y a la izquierda están construidas: el catálogo, el alta de lotes con cálculo de precios, el procesamiento de novedades de proveedores, el padrón de proveedores, las cuentas con sus roles y la auditoría.</a:t>
-            </a:r>
-          </a:p>
-          <a:p>
-            <a:endParaRPr/>
-          </a:p>
+              <a:t>Estas son las funciones. Las seis naranjas están construidas: el catálogo, el alta de lotes con cálculo de precios, las novedades de proveedores, los precios con sus ofertas, la tienda online con su carrito, y las cuentas con sus roles y la auditoría.</a:t>
+            </a:r>
+          </a:p>
+          <a:p/>
           <a:p>
             <a:r>
               <a:t>Un punto importante: en las novedades, el modelo de lenguaje sólo propone borradores. Nada entra al catálogo sin que una persona lo confirme.</a:t>
             </a:r>
           </a:p>
-          <a:p>
-            <a:endParaRPr/>
-          </a:p>
-          <a:p>
-            <a:r>
-              <a:t>Las dos grises son la próxima etapa: la tienda con sus pedidos, y la caja, los puntos y las devoluciones.</a:t>
+          <a:p/>
+          <a:p>
+            <a:r>
+              <a:t>Las dos grises son la próxima etapa: la compra con sus pedidos, y la caja, los puntos y las devoluciones.</a:t>
             </a:r>
           </a:p>
         </p:txBody>
@@ -567,7 +763,7 @@
             <a:spLocks noGrp="1"/>
           </p:cNvSpPr>
           <p:nvPr>
-            <p:ph type="sldNum" sz="quarter" idx="5"/>
+            <p:ph type="sldNum" idx="5" sz="quarter"/>
           </p:nvPr>
         </p:nvSpPr>
         <p:spPr/>
@@ -581,7 +777,7 @@
 </file>
 
 <file path=ppt/notesSlides/notesSlide4.xml><?xml version="1.0" encoding="utf-8"?>
-<p:notes xmlns:a="http://schemas.openxmlformats.org/drawingml/2006/main" xmlns:r="http://schemas.openxmlformats.org/officeDocument/2006/relationships" xmlns:p="http://schemas.openxmlformats.org/presentationml/2006/main">
+<p:notes xmlns:a="http://schemas.openxmlformats.org/drawingml/2006/main" xmlns:p="http://schemas.openxmlformats.org/presentationml/2006/main" xmlns:r="http://schemas.openxmlformats.org/officeDocument/2006/relationships">
   <p:cSld>
     <p:spTree>
       <p:nvGrpSpPr>
@@ -601,7 +797,7 @@
         <p:nvSpPr>
           <p:cNvPr id="2" name="Slide Image Placeholder 1"/>
           <p:cNvSpPr>
-            <a:spLocks noGrp="1" noRot="1" noChangeAspect="1"/>
+            <a:spLocks noGrp="1"/>
           </p:cNvSpPr>
           <p:nvPr>
             <p:ph type="sldImg" idx="2"/>
@@ -616,7 +812,7 @@
             <a:spLocks noGrp="1"/>
           </p:cNvSpPr>
           <p:nvPr>
-            <p:ph type="body" sz="quarter" idx="3"/>
+            <p:ph type="body" idx="3" sz="quarter"/>
           </p:nvPr>
         </p:nvSpPr>
         <p:spPr/>
@@ -628,17 +824,13 @@
               <a:t>El trabajo tiene una regla central: el documento de análisis y el código tienen que decir lo mismo.</a:t>
             </a:r>
           </a:p>
-          <a:p>
-            <a:endParaRPr/>
-          </a:p>
+          <a:p/>
           <a:p>
             <a:r>
               <a:t>Cada caso de uso tiene contratos que declaran qué cambia en el sistema. Cada contrato tiene una prueba automática que lleva su código en el nombre. Así se puede comprobar, sin leer el código, qué parte del documento está cumplida.</a:t>
             </a:r>
           </a:p>
-          <a:p>
-            <a:endParaRPr/>
-          </a:p>
+          <a:p/>
           <a:p>
             <a:r>
               <a:t>Un caso de uso se da por terminado sólo cuando pasa estas siete verificaciones, incluidas la seguridad y la configuración de despliegue.</a:t>
@@ -653,7 +845,7 @@
             <a:spLocks noGrp="1"/>
           </p:cNvSpPr>
           <p:nvPr>
-            <p:ph type="sldNum" sz="quarter" idx="5"/>
+            <p:ph type="sldNum" idx="5" sz="quarter"/>
           </p:nvPr>
         </p:nvSpPr>
         <p:spPr/>
@@ -667,7 +859,7 @@
 </file>
 
 <file path=ppt/notesSlides/notesSlide5.xml><?xml version="1.0" encoding="utf-8"?>
-<p:notes xmlns:a="http://schemas.openxmlformats.org/drawingml/2006/main" xmlns:r="http://schemas.openxmlformats.org/officeDocument/2006/relationships" xmlns:p="http://schemas.openxmlformats.org/presentationml/2006/main">
+<p:notes xmlns:a="http://schemas.openxmlformats.org/drawingml/2006/main" xmlns:p="http://schemas.openxmlformats.org/presentationml/2006/main" xmlns:r="http://schemas.openxmlformats.org/officeDocument/2006/relationships">
   <p:cSld>
     <p:spTree>
       <p:nvGrpSpPr>
@@ -687,7 +879,7 @@
         <p:nvSpPr>
           <p:cNvPr id="2" name="Slide Image Placeholder 1"/>
           <p:cNvSpPr>
-            <a:spLocks noGrp="1" noRot="1" noChangeAspect="1"/>
+            <a:spLocks noGrp="1"/>
           </p:cNvSpPr>
           <p:nvPr>
             <p:ph type="sldImg" idx="2"/>
@@ -702,7 +894,7 @@
             <a:spLocks noGrp="1"/>
           </p:cNvSpPr>
           <p:nvPr>
-            <p:ph type="body" sz="quarter" idx="3"/>
+            <p:ph type="body" idx="3" sz="quarter"/>
           </p:nvPr>
         </p:nvSpPr>
         <p:spPr/>
@@ -714,17 +906,13 @@
               <a:t>Así trabajamos. El ciclo del analista tiene seis etapas: abstraer, razonar, diseñar, elaborar, evaluar y corregir. Al corregir se vuelve a empezar, y el ciclo no termina.</a:t>
             </a:r>
           </a:p>
-          <a:p>
-            <a:endParaRPr/>
-          </a:p>
+          <a:p/>
           <a:p>
             <a:r>
               <a:t>La inteligencia artificial colabora en todas las etapas, con distinto peso. Al abstraer aporta poco: entender el negocio es trabajo del analista. Al razonar y diseñar ayuda bastante: encuentra ambigüedades y contradicciones, y propone planes con una recomendación. Al elaborar y evaluar es donde más acelera: escribe el código y las pruebas, y corre las verificaciones. Al corregir, arregla el código y deja registrada cada decisión en una bitácora.</a:t>
             </a:r>
           </a:p>
-          <a:p>
-            <a:endParaRPr/>
-          </a:p>
+          <a:p/>
           <a:p>
             <a:r>
               <a:t>La regla es la misma que aplicamos dentro del sistema: la IA propone y el analista decide. Nada se da por aprobado sin una decisión humana.</a:t>
@@ -739,7 +927,7 @@
             <a:spLocks noGrp="1"/>
           </p:cNvSpPr>
           <p:nvPr>
-            <p:ph type="sldNum" sz="quarter" idx="5"/>
+            <p:ph type="sldNum" idx="5" sz="quarter"/>
           </p:nvPr>
         </p:nvSpPr>
         <p:spPr/>
@@ -753,7 +941,7 @@
 </file>
 
 <file path=ppt/notesSlides/notesSlide6.xml><?xml version="1.0" encoding="utf-8"?>
-<p:notes xmlns:a="http://schemas.openxmlformats.org/drawingml/2006/main" xmlns:r="http://schemas.openxmlformats.org/officeDocument/2006/relationships" xmlns:p="http://schemas.openxmlformats.org/presentationml/2006/main">
+<p:notes xmlns:a="http://schemas.openxmlformats.org/drawingml/2006/main" xmlns:p="http://schemas.openxmlformats.org/presentationml/2006/main" xmlns:r="http://schemas.openxmlformats.org/officeDocument/2006/relationships">
   <p:cSld>
     <p:spTree>
       <p:nvGrpSpPr>
@@ -773,7 +961,7 @@
         <p:nvSpPr>
           <p:cNvPr id="2" name="Slide Image Placeholder 1"/>
           <p:cNvSpPr>
-            <a:spLocks noGrp="1" noRot="1" noChangeAspect="1"/>
+            <a:spLocks noGrp="1"/>
           </p:cNvSpPr>
           <p:nvPr>
             <p:ph type="sldImg" idx="2"/>
@@ -788,7 +976,7 @@
             <a:spLocks noGrp="1"/>
           </p:cNvSpPr>
           <p:nvPr>
-            <p:ph type="body" sz="quarter" idx="3"/>
+            <p:ph type="body" idx="3" sz="quarter"/>
           </p:nvPr>
         </p:nvSpPr>
         <p:spPr/>
@@ -800,20 +988,22 @@
               <a:t>El avance se mide contra el documento, no se estima.</a:t>
             </a:r>
           </a:p>
-          <a:p>
-            <a:endParaRPr/>
-          </a:p>
-          <a:p>
-            <a:r>
-              <a:t>El documento especifica 103 casos de uso y 219 contratos. Hay 57 casos de uso con código construido. De ellos, 11 están verificados: cumplen todos sus contratos y pasan las siete verificaciones. Otros 37 están construidos en parte.</a:t>
-            </a:r>
-          </a:p>
-          <a:p>
-            <a:endParaRPr/>
-          </a:p>
-          <a:p>
-            <a:r>
-              <a:t>El sistema tiene más de 1.400 pruebas automáticas, con 97 % de cobertura, y hoy todas las verificaciones están en verde.</a:t>
+          <a:p/>
+          <a:p>
+            <a:r>
+              <a:t>El documento especifica 103 casos de uso y 219 contratos. Hay 72 casos de uso con código construido. De ellos, 48 están verificados: cumplen todos sus contratos y pasan las siete verificaciones. Otros 9 están construidos sin verificar todavía y 15 están construidos en parte, porque dependen de algo que todavía no existe. Faltan 31, casi todos de la compra y la operación del local.</a:t>
+            </a:r>
+          </a:p>
+          <a:p/>
+          <a:p>
+            <a:r>
+              <a:t>De los 219 contratos, 89 están verificados por una prueba que lleva su código.</a:t>
+            </a:r>
+          </a:p>
+          <a:p/>
+          <a:p>
+            <a:r>
+              <a:t>El sistema tiene 1.920 pruebas automáticas, con 97 % de cobertura, y hoy todas las verificaciones están en verde.</a:t>
             </a:r>
           </a:p>
         </p:txBody>
@@ -825,7 +1015,7 @@
             <a:spLocks noGrp="1"/>
           </p:cNvSpPr>
           <p:nvPr>
-            <p:ph type="sldNum" sz="quarter" idx="5"/>
+            <p:ph type="sldNum" idx="5" sz="quarter"/>
           </p:nvPr>
         </p:nvSpPr>
         <p:spPr/>
@@ -839,7 +1029,7 @@
 </file>
 
 <file path=ppt/notesSlides/notesSlide7.xml><?xml version="1.0" encoding="utf-8"?>
-<p:notes xmlns:a="http://schemas.openxmlformats.org/drawingml/2006/main" xmlns:r="http://schemas.openxmlformats.org/officeDocument/2006/relationships" xmlns:p="http://schemas.openxmlformats.org/presentationml/2006/main">
+<p:notes xmlns:a="http://schemas.openxmlformats.org/drawingml/2006/main" xmlns:p="http://schemas.openxmlformats.org/presentationml/2006/main" xmlns:r="http://schemas.openxmlformats.org/officeDocument/2006/relationships">
   <p:cSld>
     <p:spTree>
       <p:nvGrpSpPr>
@@ -859,7 +1049,7 @@
         <p:nvSpPr>
           <p:cNvPr id="2" name="Slide Image Placeholder 1"/>
           <p:cNvSpPr>
-            <a:spLocks noGrp="1" noRot="1" noChangeAspect="1"/>
+            <a:spLocks noGrp="1"/>
           </p:cNvSpPr>
           <p:nvPr>
             <p:ph type="sldImg" idx="2"/>
@@ -874,7 +1064,7 @@
             <a:spLocks noGrp="1"/>
           </p:cNvSpPr>
           <p:nvPr>
-            <p:ph type="body" sz="quarter" idx="3"/>
+            <p:ph type="body" idx="3" sz="quarter"/>
           </p:nvPr>
         </p:nvSpPr>
         <p:spPr/>
@@ -886,9 +1076,7 @@
               <a:t>Qué logramos.</a:t>
             </a:r>
           </a:p>
-          <a:p>
-            <a:endParaRPr/>
-          </a:p>
+          <a:p/>
           <a:p>
             <a:r>
               <a:t>Trazabilidad: se puede comprobar qué parte del documento está cumplida.</a:t>
@@ -901,22 +1089,32 @@
           </a:p>
           <a:p>
             <a:r>
-              <a:t>Un registro de auditoría que nadie puede modificar, ni siquiera el Administrador.</a:t>
-            </a:r>
-          </a:p>
-          <a:p>
-            <a:r>
-              <a:t>Control de acceso validado en el servidor para cada rol.</a:t>
-            </a:r>
-          </a:p>
-          <a:p>
-            <a:r>
-              <a:t>Precios de importados calculados sin errores de redondeo.</a:t>
-            </a:r>
-          </a:p>
-          <a:p>
-            <a:r>
-              <a:t>Y el sistema publicado en internet con HTTPS, que es lo que vamos a usar en la demostración.</a:t>
+              <a:t>Un registro de auditoría que nadie puede modificar: lo impide la base de datos.</a:t>
+            </a:r>
+          </a:p>
+          <a:p>
+            <a:r>
+              <a:t>Control de acceso validado en el servidor, probado entrando con el rol equivocado.</a:t>
+            </a:r>
+          </a:p>
+          <a:p>
+            <a:r>
+              <a:t>Precios sin errores de redondeo, y cada cambio de precio llega a los carritos.</a:t>
+            </a:r>
+          </a:p>
+          <a:p>
+            <a:r>
+              <a:t>Resistencia: lo probamos con 50 usuarios a la vez, con operaciones simultáneas y con ataques; así encontramos y corregimos varias fallas antes de hoy.</a:t>
+            </a:r>
+          </a:p>
+          <a:p>
+            <a:r>
+              <a:t>Una tienda que el Administrador arma sin programar.</a:t>
+            </a:r>
+          </a:p>
+          <a:p>
+            <a:r>
+              <a:t>Y el sistema publicado en internet con HTTPS, que es lo que vamos a usar ahora.</a:t>
             </a:r>
           </a:p>
         </p:txBody>
@@ -928,7 +1126,7 @@
             <a:spLocks noGrp="1"/>
           </p:cNvSpPr>
           <p:nvPr>
-            <p:ph type="sldNum" sz="quarter" idx="5"/>
+            <p:ph type="sldNum" idx="5" sz="quarter"/>
           </p:nvPr>
         </p:nvSpPr>
         <p:spPr/>
@@ -942,7 +1140,7 @@
 </file>
 
 <file path=ppt/notesSlides/notesSlide8.xml><?xml version="1.0" encoding="utf-8"?>
-<p:notes xmlns:a="http://schemas.openxmlformats.org/drawingml/2006/main" xmlns:r="http://schemas.openxmlformats.org/officeDocument/2006/relationships" xmlns:p="http://schemas.openxmlformats.org/presentationml/2006/main">
+<p:notes xmlns:a="http://schemas.openxmlformats.org/drawingml/2006/main" xmlns:p="http://schemas.openxmlformats.org/presentationml/2006/main" xmlns:r="http://schemas.openxmlformats.org/officeDocument/2006/relationships">
   <p:cSld>
     <p:spTree>
       <p:nvGrpSpPr>
@@ -962,7 +1160,7 @@
         <p:nvSpPr>
           <p:cNvPr id="2" name="Slide Image Placeholder 1"/>
           <p:cNvSpPr>
-            <a:spLocks noGrp="1" noRot="1" noChangeAspect="1"/>
+            <a:spLocks noGrp="1"/>
           </p:cNvSpPr>
           <p:nvPr>
             <p:ph type="sldImg" idx="2"/>
@@ -977,7 +1175,7 @@
             <a:spLocks noGrp="1"/>
           </p:cNvSpPr>
           <p:nvPr>
-            <p:ph type="body" sz="quarter" idx="3"/>
+            <p:ph type="body" idx="3" sz="quarter"/>
           </p:nvPr>
         </p:nvSpPr>
         <p:spPr/>
@@ -989,12 +1187,10 @@
               <a:t>Qué falta, en el orden en que lo vamos a construir.</a:t>
             </a:r>
           </a:p>
-          <a:p>
-            <a:endParaRPr/>
-          </a:p>
-          <a:p>
-            <a:r>
-              <a:t>Primero la cadena comercial: la tienda, el carrito, la compra y los pedidos. Todo lo que sigue depende del pedido.</a:t>
+          <a:p/>
+          <a:p>
+            <a:r>
+              <a:t>La tienda y el carrito ya están. Primero falta la compra: el pago y los pedidos. Todo lo que sigue depende del pedido.</a:t>
             </a:r>
           </a:p>
           <a:p>
@@ -1004,17 +1200,15 @@
           </a:p>
           <a:p>
             <a:r>
-              <a:t>Tercero, los procesos que el sistema ejecuta solo, como vencimientos y avisos.</a:t>
-            </a:r>
-          </a:p>
-          <a:p>
-            <a:r>
-              <a:t>Y en paralelo, completar las bajas de catálogo y la propagación de precios.</a:t>
-            </a:r>
-          </a:p>
-          <a:p>
-            <a:endParaRPr/>
-          </a:p>
+              <a:t>Tercero, los procesos automáticos: la puerta ya existe y corre las ofertas; falta sumar los de cada módulo.</a:t>
+            </a:r>
+          </a:p>
+          <a:p>
+            <a:r>
+              <a:t>Y la cuenta del cliente: su panel y los avisos de stock.</a:t>
+            </a:r>
+          </a:p>
+          <a:p/>
           <a:p>
             <a:r>
               <a:t>Ahora lo mostramos funcionando.</a:t>
@@ -1029,7 +1223,7 @@
             <a:spLocks noGrp="1"/>
           </p:cNvSpPr>
           <p:nvPr>
-            <p:ph type="sldNum" sz="quarter" idx="5"/>
+            <p:ph type="sldNum" idx="5" sz="quarter"/>
           </p:nvPr>
         </p:nvSpPr>
         <p:spPr/>
@@ -1043,7 +1237,7 @@
 </file>
 
 <file path=ppt/notesSlides/notesSlide9.xml><?xml version="1.0" encoding="utf-8"?>
-<p:notes xmlns:a="http://schemas.openxmlformats.org/drawingml/2006/main" xmlns:r="http://schemas.openxmlformats.org/officeDocument/2006/relationships" xmlns:p="http://schemas.openxmlformats.org/presentationml/2006/main">
+<p:notes xmlns:a="http://schemas.openxmlformats.org/drawingml/2006/main" xmlns:p="http://schemas.openxmlformats.org/presentationml/2006/main" xmlns:r="http://schemas.openxmlformats.org/officeDocument/2006/relationships">
   <p:cSld>
     <p:spTree>
       <p:nvGrpSpPr>
@@ -1063,7 +1257,7 @@
         <p:nvSpPr>
           <p:cNvPr id="2" name="Slide Image Placeholder 1"/>
           <p:cNvSpPr>
-            <a:spLocks noGrp="1" noRot="1" noChangeAspect="1"/>
+            <a:spLocks noGrp="1"/>
           </p:cNvSpPr>
           <p:nvPr>
             <p:ph type="sldImg" idx="2"/>
@@ -1078,7 +1272,7 @@
             <a:spLocks noGrp="1"/>
           </p:cNvSpPr>
           <p:nvPr>
-            <p:ph type="body" sz="quarter" idx="3"/>
+            <p:ph type="body" idx="3" sz="quarter"/>
           </p:nvPr>
         </p:nvSpPr>
         <p:spPr/>
@@ -1090,87 +1284,73 @@
               <a:t>GUION DE LA DEMOSTRACIÓN (5 minutos)</a:t>
             </a:r>
           </a:p>
-          <a:p>
-            <a:endParaRPr/>
-          </a:p>
-          <a:p>
-            <a:r>
-              <a:t>0:00 · Abrir la dirección pública e iniciar sesión como Administrador.</a:t>
-            </a:r>
-          </a:p>
-          <a:p>
-            <a:r>
-              <a:t>Decir: «Este es el panel del Administrador: cuentas activas, clientes y la actividad reciente, que sale del registro de auditoría».</a:t>
-            </a:r>
-          </a:p>
-          <a:p>
-            <a:endParaRPr/>
-          </a:p>
-          <a:p>
-            <a:r>
-              <a:t>0:40 · Menú → Catálogo → Inventario. Abrir la ficha de un producto.</a:t>
-            </a:r>
-          </a:p>
-          <a:p>
-            <a:r>
-              <a:t>Decir: «El inventario se filtra por tipo, estado y stock. La ficha muestra precio, stock y el historial de cambios. Lo que el sistema calculó aparece marcado».</a:t>
-            </a:r>
-          </a:p>
-          <a:p>
-            <a:endParaRPr/>
-          </a:p>
-          <a:p>
-            <a:r>
-              <a:t>1:30 · Menú → Nuevo lote nacional. Elegir editorial, tipo y formato, y cargar un ítem.</a:t>
-            </a:r>
-          </a:p>
-          <a:p>
-            <a:r>
-              <a:t>Decir: «El precio no se escribe: sale de la tabla de referencia de esa combinación. Si se cambia a mano, el sistema pide confirmación, porque ese producto deja de actualizarse solo». No hace falta guardar.</a:t>
-            </a:r>
-          </a:p>
-          <a:p>
-            <a:endParaRPr/>
-          </a:p>
-          <a:p>
-            <a:r>
-              <a:t>2:30 · Menú → Proveedores → Correos recibidos. Abrir un correo procesado.</a:t>
-            </a:r>
-          </a:p>
-          <a:p>
-            <a:r>
-              <a:t>Decir: «Los proveedores anuncian novedades por correo. El correo espera en una cola hasta que alguien lo aprueba. El modelo de lenguaje extrae los productos y propone borradores».</a:t>
-            </a:r>
-          </a:p>
-          <a:p>
-            <a:endParaRPr/>
-          </a:p>
-          <a:p>
-            <a:r>
-              <a:t>3:30 · Menú → Catálogo → Revisar borradores. Abrir uno.</a:t>
-            </a:r>
-          </a:p>
-          <a:p>
-            <a:r>
-              <a:t>Decir: «El borrador marca los datos dudosos. Nada entra al catálogo hasta que una persona lo confirma. Esa es la regla: la IA propone, una persona decide».</a:t>
-            </a:r>
-          </a:p>
-          <a:p>
-            <a:endParaRPr/>
-          </a:p>
-          <a:p>
-            <a:r>
-              <a:t>4:15 · Cerrar sesión e iniciar como Cajero.</a:t>
-            </a:r>
-          </a:p>
-          <a:p>
-            <a:r>
-              <a:t>Decir: «El Cajero ve el mostrador y el inventario, nada más. El acceso se controla en el servidor». Si hay tiempo, mostrar la tienda como Cliente.</a:t>
-            </a:r>
-          </a:p>
-          <a:p>
-            <a:endParaRPr/>
-          </a:p>
+          <a:p/>
+          <a:p>
+            <a:r>
+              <a:t>0:00 · Abrir la dirección pública, sin iniciar sesión.</a:t>
+            </a:r>
+          </a:p>
+          <a:p>
+            <a:r>
+              <a:t>Decir: «Esta es la tienda. La portada, las filas por demografía y ‘Lo que se viene’ las arma el Administrador». Entrar al catálogo, prender un interruptor (Shonen) y escribir en la búsqueda: «Los filtros se aplican mientras se cambian».</a:t>
+            </a:r>
+          </a:p>
+          <a:p/>
+          <a:p>
+            <a:r>
+              <a:t>1:00 · Agregar dos tomos desde las tarjetas y abrir el carrito. Subir una cantidad.</a:t>
+            </a:r>
+          </a:p>
+          <a:p>
+            <a:r>
+              <a:t>Decir: «El precio y el stock se recalculan solos. Si pido más de lo que hay, el sistema me avisa y lo ajusta».</a:t>
+            </a:r>
+          </a:p>
+          <a:p/>
+          <a:p>
+            <a:r>
+              <a:t>1:45 · Iniciar sesión como Administrador (en otra pestaña). Precios → Ofertas → crear una para ese tomo. Volver al carrito.</a:t>
+            </a:r>
+          </a:p>
+          <a:p>
+            <a:r>
+              <a:t>Decir: «El cambio de precio llega al carrito y avisa cuál era el anterior».</a:t>
+            </a:r>
+          </a:p>
+          <a:p/>
+          <a:p>
+            <a:r>
+              <a:t>2:30 · Proveedores → Correos → abrir uno de Ivrea → Aprobar y procesar → Ir a la revisión.</a:t>
+            </a:r>
+          </a:p>
+          <a:p>
+            <a:r>
+              <a:t>Decir: «El modelo de lenguaje lee el correo y propone borradores. Nada entra al catálogo hasta que una persona lo confirma».</a:t>
+            </a:r>
+          </a:p>
+          <a:p/>
+          <a:p>
+            <a:r>
+              <a:t>3:30 · Tienda → Filas de la portada: arrastrar una fila y guardar. Identidad visual: cargar la imagen del ingreso.</a:t>
+            </a:r>
+          </a:p>
+          <a:p>
+            <a:r>
+              <a:t>Decir: «La tienda se configura sin programar, y cada cambio queda en la auditoría».</a:t>
+            </a:r>
+          </a:p>
+          <a:p/>
+          <a:p>
+            <a:r>
+              <a:t>4:15 · Iniciar sesión como Cajero y escribir a mano la dirección de la configuración.</a:t>
+            </a:r>
+          </a:p>
+          <a:p>
+            <a:r>
+              <a:t>Decir: «El servidor lo rechaza: la restricción no está en el menú, está en el servidor». Si hay tiempo, por escritorio remoto: pytest -k CO083 -v.</a:t>
+            </a:r>
+          </a:p>
+          <a:p/>
           <a:p>
             <a:r>
               <a:t>Si el modelo de lenguaje no está disponible, mostrar un correo ya procesado en lugar de aprobar uno nuevo.</a:t>
@@ -1185,7 +1365,7 @@
             <a:spLocks noGrp="1"/>
           </p:cNvSpPr>
           <p:nvPr>
-            <p:ph type="sldNum" sz="quarter" idx="5"/>
+            <p:ph type="sldNum" idx="5" sz="quarter"/>
           </p:nvPr>
         </p:nvSpPr>
         <p:spPr/>
@@ -1236,9 +1416,10 @@
           <a:lstStyle/>
           <a:p>
             <a:r>
-              <a:rPr lang="en-US"/>
+              <a:rPr lang="en-US" smtClean="0"/>
               <a:t>Click to edit Master title style</a:t>
             </a:r>
+            <a:endParaRPr lang="en-US"/>
           </a:p>
         </p:txBody>
       </p:sp>
@@ -1354,9 +1535,10 @@
           </a:lstStyle>
           <a:p>
             <a:r>
-              <a:rPr lang="en-US"/>
+              <a:rPr lang="en-US" smtClean="0"/>
               <a:t>Click to edit Master subtitle style</a:t>
             </a:r>
+            <a:endParaRPr lang="en-US"/>
           </a:p>
         </p:txBody>
       </p:sp>
@@ -1377,7 +1559,7 @@
           <a:p>
             <a:fld id="{5BCAD085-E8A6-8845-BD4E-CB4CCA059FC4}" type="datetimeFigureOut">
               <a:rPr lang="en-US" smtClean="0"/>
-              <a:t>9/30/2026</a:t>
+              <a:t>1/27/13</a:t>
             </a:fld>
             <a:endParaRPr lang="en-US"/>
           </a:p>
@@ -1419,7 +1601,7 @@
           <a:p>
             <a:fld id="{C1FF6DA9-008F-8B48-92A6-B652298478BF}" type="slidenum">
               <a:rPr lang="en-US" smtClean="0"/>
-              <a:t>‹Nº›</a:t>
+              <a:t>‹#›</a:t>
             </a:fld>
             <a:endParaRPr lang="en-US"/>
           </a:p>
@@ -1471,9 +1653,10 @@
           <a:lstStyle/>
           <a:p>
             <a:r>
-              <a:rPr lang="en-US"/>
+              <a:rPr lang="en-US" smtClean="0"/>
               <a:t>Click to edit Master title style</a:t>
             </a:r>
+            <a:endParaRPr lang="en-US"/>
           </a:p>
         </p:txBody>
       </p:sp>
@@ -1494,37 +1677,38 @@
           <a:p>
             <a:pPr lvl="0"/>
             <a:r>
-              <a:rPr lang="en-US"/>
+              <a:rPr lang="en-US" smtClean="0"/>
               <a:t>Click to edit Master text styles</a:t>
             </a:r>
           </a:p>
           <a:p>
             <a:pPr lvl="1"/>
             <a:r>
-              <a:rPr lang="en-US"/>
+              <a:rPr lang="en-US" smtClean="0"/>
               <a:t>Second level</a:t>
             </a:r>
           </a:p>
           <a:p>
             <a:pPr lvl="2"/>
             <a:r>
-              <a:rPr lang="en-US"/>
+              <a:rPr lang="en-US" smtClean="0"/>
               <a:t>Third level</a:t>
             </a:r>
           </a:p>
           <a:p>
             <a:pPr lvl="3"/>
             <a:r>
-              <a:rPr lang="en-US"/>
+              <a:rPr lang="en-US" smtClean="0"/>
               <a:t>Fourth level</a:t>
             </a:r>
           </a:p>
           <a:p>
             <a:pPr lvl="4"/>
             <a:r>
-              <a:rPr lang="en-US"/>
+              <a:rPr lang="en-US" smtClean="0"/>
               <a:t>Fifth level</a:t>
             </a:r>
+            <a:endParaRPr lang="en-US"/>
           </a:p>
         </p:txBody>
       </p:sp>
@@ -1545,7 +1729,7 @@
           <a:p>
             <a:fld id="{5BCAD085-E8A6-8845-BD4E-CB4CCA059FC4}" type="datetimeFigureOut">
               <a:rPr lang="en-US" smtClean="0"/>
-              <a:t>9/30/2026</a:t>
+              <a:t>1/27/13</a:t>
             </a:fld>
             <a:endParaRPr lang="en-US"/>
           </a:p>
@@ -1587,7 +1771,7 @@
           <a:p>
             <a:fld id="{C1FF6DA9-008F-8B48-92A6-B652298478BF}" type="slidenum">
               <a:rPr lang="en-US" smtClean="0"/>
-              <a:t>‹Nº›</a:t>
+              <a:t>‹#›</a:t>
             </a:fld>
             <a:endParaRPr lang="en-US"/>
           </a:p>
@@ -1644,9 +1828,10 @@
           <a:lstStyle/>
           <a:p>
             <a:r>
-              <a:rPr lang="en-US"/>
+              <a:rPr lang="en-US" smtClean="0"/>
               <a:t>Click to edit Master title style</a:t>
             </a:r>
+            <a:endParaRPr lang="en-US"/>
           </a:p>
         </p:txBody>
       </p:sp>
@@ -1672,37 +1857,38 @@
           <a:p>
             <a:pPr lvl="0"/>
             <a:r>
-              <a:rPr lang="en-US"/>
+              <a:rPr lang="en-US" smtClean="0"/>
               <a:t>Click to edit Master text styles</a:t>
             </a:r>
           </a:p>
           <a:p>
             <a:pPr lvl="1"/>
             <a:r>
-              <a:rPr lang="en-US"/>
+              <a:rPr lang="en-US" smtClean="0"/>
               <a:t>Second level</a:t>
             </a:r>
           </a:p>
           <a:p>
             <a:pPr lvl="2"/>
             <a:r>
-              <a:rPr lang="en-US"/>
+              <a:rPr lang="en-US" smtClean="0"/>
               <a:t>Third level</a:t>
             </a:r>
           </a:p>
           <a:p>
             <a:pPr lvl="3"/>
             <a:r>
-              <a:rPr lang="en-US"/>
+              <a:rPr lang="en-US" smtClean="0"/>
               <a:t>Fourth level</a:t>
             </a:r>
           </a:p>
           <a:p>
             <a:pPr lvl="4"/>
             <a:r>
-              <a:rPr lang="en-US"/>
+              <a:rPr lang="en-US" smtClean="0"/>
               <a:t>Fifth level</a:t>
             </a:r>
+            <a:endParaRPr lang="en-US"/>
           </a:p>
         </p:txBody>
       </p:sp>
@@ -1723,7 +1909,7 @@
           <a:p>
             <a:fld id="{5BCAD085-E8A6-8845-BD4E-CB4CCA059FC4}" type="datetimeFigureOut">
               <a:rPr lang="en-US" smtClean="0"/>
-              <a:t>9/30/2026</a:t>
+              <a:t>1/27/13</a:t>
             </a:fld>
             <a:endParaRPr lang="en-US"/>
           </a:p>
@@ -1765,7 +1951,7 @@
           <a:p>
             <a:fld id="{C1FF6DA9-008F-8B48-92A6-B652298478BF}" type="slidenum">
               <a:rPr lang="en-US" smtClean="0"/>
-              <a:t>‹Nº›</a:t>
+              <a:t>‹#›</a:t>
             </a:fld>
             <a:endParaRPr lang="en-US"/>
           </a:p>
@@ -1817,9 +2003,10 @@
           <a:lstStyle/>
           <a:p>
             <a:r>
-              <a:rPr lang="en-US"/>
+              <a:rPr lang="en-US" smtClean="0"/>
               <a:t>Click to edit Master title style</a:t>
             </a:r>
+            <a:endParaRPr lang="en-US"/>
           </a:p>
         </p:txBody>
       </p:sp>
@@ -1840,37 +2027,38 @@
           <a:p>
             <a:pPr lvl="0"/>
             <a:r>
-              <a:rPr lang="en-US"/>
+              <a:rPr lang="en-US" smtClean="0"/>
               <a:t>Click to edit Master text styles</a:t>
             </a:r>
           </a:p>
           <a:p>
             <a:pPr lvl="1"/>
             <a:r>
-              <a:rPr lang="en-US"/>
+              <a:rPr lang="en-US" smtClean="0"/>
               <a:t>Second level</a:t>
             </a:r>
           </a:p>
           <a:p>
             <a:pPr lvl="2"/>
             <a:r>
-              <a:rPr lang="en-US"/>
+              <a:rPr lang="en-US" smtClean="0"/>
               <a:t>Third level</a:t>
             </a:r>
           </a:p>
           <a:p>
             <a:pPr lvl="3"/>
             <a:r>
-              <a:rPr lang="en-US"/>
+              <a:rPr lang="en-US" smtClean="0"/>
               <a:t>Fourth level</a:t>
             </a:r>
           </a:p>
           <a:p>
             <a:pPr lvl="4"/>
             <a:r>
-              <a:rPr lang="en-US"/>
+              <a:rPr lang="en-US" smtClean="0"/>
               <a:t>Fifth level</a:t>
             </a:r>
+            <a:endParaRPr lang="en-US"/>
           </a:p>
         </p:txBody>
       </p:sp>
@@ -1891,7 +2079,7 @@
           <a:p>
             <a:fld id="{5BCAD085-E8A6-8845-BD4E-CB4CCA059FC4}" type="datetimeFigureOut">
               <a:rPr lang="en-US" smtClean="0"/>
-              <a:t>9/30/2026</a:t>
+              <a:t>1/27/13</a:t>
             </a:fld>
             <a:endParaRPr lang="en-US"/>
           </a:p>
@@ -1933,7 +2121,7 @@
           <a:p>
             <a:fld id="{C1FF6DA9-008F-8B48-92A6-B652298478BF}" type="slidenum">
               <a:rPr lang="en-US" smtClean="0"/>
-              <a:t>‹Nº›</a:t>
+              <a:t>‹#›</a:t>
             </a:fld>
             <a:endParaRPr lang="en-US"/>
           </a:p>
@@ -1994,9 +2182,10 @@
           </a:lstStyle>
           <a:p>
             <a:r>
-              <a:rPr lang="en-US"/>
+              <a:rPr lang="en-US" smtClean="0"/>
               <a:t>Click to edit Master title style</a:t>
             </a:r>
+            <a:endParaRPr lang="en-US"/>
           </a:p>
         </p:txBody>
       </p:sp>
@@ -2113,7 +2302,7 @@
           <a:p>
             <a:pPr lvl="0"/>
             <a:r>
-              <a:rPr lang="en-US"/>
+              <a:rPr lang="en-US" smtClean="0"/>
               <a:t>Click to edit Master text styles</a:t>
             </a:r>
           </a:p>
@@ -2136,7 +2325,7 @@
           <a:p>
             <a:fld id="{5BCAD085-E8A6-8845-BD4E-CB4CCA059FC4}" type="datetimeFigureOut">
               <a:rPr lang="en-US" smtClean="0"/>
-              <a:t>9/30/2026</a:t>
+              <a:t>1/27/13</a:t>
             </a:fld>
             <a:endParaRPr lang="en-US"/>
           </a:p>
@@ -2178,7 +2367,7 @@
           <a:p>
             <a:fld id="{C1FF6DA9-008F-8B48-92A6-B652298478BF}" type="slidenum">
               <a:rPr lang="en-US" smtClean="0"/>
-              <a:t>‹Nº›</a:t>
+              <a:t>‹#›</a:t>
             </a:fld>
             <a:endParaRPr lang="en-US"/>
           </a:p>
@@ -2230,9 +2419,10 @@
           <a:lstStyle/>
           <a:p>
             <a:r>
-              <a:rPr lang="en-US"/>
+              <a:rPr lang="en-US" smtClean="0"/>
               <a:t>Click to edit Master title style</a:t>
             </a:r>
+            <a:endParaRPr lang="en-US"/>
           </a:p>
         </p:txBody>
       </p:sp>
@@ -2286,37 +2476,38 @@
           <a:p>
             <a:pPr lvl="0"/>
             <a:r>
-              <a:rPr lang="en-US"/>
+              <a:rPr lang="en-US" smtClean="0"/>
               <a:t>Click to edit Master text styles</a:t>
             </a:r>
           </a:p>
           <a:p>
             <a:pPr lvl="1"/>
             <a:r>
-              <a:rPr lang="en-US"/>
+              <a:rPr lang="en-US" smtClean="0"/>
               <a:t>Second level</a:t>
             </a:r>
           </a:p>
           <a:p>
             <a:pPr lvl="2"/>
             <a:r>
-              <a:rPr lang="en-US"/>
+              <a:rPr lang="en-US" smtClean="0"/>
               <a:t>Third level</a:t>
             </a:r>
           </a:p>
           <a:p>
             <a:pPr lvl="3"/>
             <a:r>
-              <a:rPr lang="en-US"/>
+              <a:rPr lang="en-US" smtClean="0"/>
               <a:t>Fourth level</a:t>
             </a:r>
           </a:p>
           <a:p>
             <a:pPr lvl="4"/>
             <a:r>
-              <a:rPr lang="en-US"/>
+              <a:rPr lang="en-US" smtClean="0"/>
               <a:t>Fifth level</a:t>
             </a:r>
+            <a:endParaRPr lang="en-US"/>
           </a:p>
         </p:txBody>
       </p:sp>
@@ -2370,37 +2561,38 @@
           <a:p>
             <a:pPr lvl="0"/>
             <a:r>
-              <a:rPr lang="en-US"/>
+              <a:rPr lang="en-US" smtClean="0"/>
               <a:t>Click to edit Master text styles</a:t>
             </a:r>
           </a:p>
           <a:p>
             <a:pPr lvl="1"/>
             <a:r>
-              <a:rPr lang="en-US"/>
+              <a:rPr lang="en-US" smtClean="0"/>
               <a:t>Second level</a:t>
             </a:r>
           </a:p>
           <a:p>
             <a:pPr lvl="2"/>
             <a:r>
-              <a:rPr lang="en-US"/>
+              <a:rPr lang="en-US" smtClean="0"/>
               <a:t>Third level</a:t>
             </a:r>
           </a:p>
           <a:p>
             <a:pPr lvl="3"/>
             <a:r>
-              <a:rPr lang="en-US"/>
+              <a:rPr lang="en-US" smtClean="0"/>
               <a:t>Fourth level</a:t>
             </a:r>
           </a:p>
           <a:p>
             <a:pPr lvl="4"/>
             <a:r>
-              <a:rPr lang="en-US"/>
+              <a:rPr lang="en-US" smtClean="0"/>
               <a:t>Fifth level</a:t>
             </a:r>
+            <a:endParaRPr lang="en-US"/>
           </a:p>
         </p:txBody>
       </p:sp>
@@ -2421,7 +2613,7 @@
           <a:p>
             <a:fld id="{5BCAD085-E8A6-8845-BD4E-CB4CCA059FC4}" type="datetimeFigureOut">
               <a:rPr lang="en-US" smtClean="0"/>
-              <a:t>9/30/2026</a:t>
+              <a:t>1/27/13</a:t>
             </a:fld>
             <a:endParaRPr lang="en-US"/>
           </a:p>
@@ -2463,7 +2655,7 @@
           <a:p>
             <a:fld id="{C1FF6DA9-008F-8B48-92A6-B652298478BF}" type="slidenum">
               <a:rPr lang="en-US" smtClean="0"/>
-              <a:t>‹Nº›</a:t>
+              <a:t>‹#›</a:t>
             </a:fld>
             <a:endParaRPr lang="en-US"/>
           </a:p>
@@ -2519,9 +2711,10 @@
           </a:lstStyle>
           <a:p>
             <a:r>
-              <a:rPr lang="en-US"/>
+              <a:rPr lang="en-US" smtClean="0"/>
               <a:t>Click to edit Master title style</a:t>
             </a:r>
+            <a:endParaRPr lang="en-US"/>
           </a:p>
         </p:txBody>
       </p:sp>
@@ -2584,7 +2777,7 @@
           <a:p>
             <a:pPr lvl="0"/>
             <a:r>
-              <a:rPr lang="en-US"/>
+              <a:rPr lang="en-US" smtClean="0"/>
               <a:t>Click to edit Master text styles</a:t>
             </a:r>
           </a:p>
@@ -2640,37 +2833,38 @@
           <a:p>
             <a:pPr lvl="0"/>
             <a:r>
-              <a:rPr lang="en-US"/>
+              <a:rPr lang="en-US" smtClean="0"/>
               <a:t>Click to edit Master text styles</a:t>
             </a:r>
           </a:p>
           <a:p>
             <a:pPr lvl="1"/>
             <a:r>
-              <a:rPr lang="en-US"/>
+              <a:rPr lang="en-US" smtClean="0"/>
               <a:t>Second level</a:t>
             </a:r>
           </a:p>
           <a:p>
             <a:pPr lvl="2"/>
             <a:r>
-              <a:rPr lang="en-US"/>
+              <a:rPr lang="en-US" smtClean="0"/>
               <a:t>Third level</a:t>
             </a:r>
           </a:p>
           <a:p>
             <a:pPr lvl="3"/>
             <a:r>
-              <a:rPr lang="en-US"/>
+              <a:rPr lang="en-US" smtClean="0"/>
               <a:t>Fourth level</a:t>
             </a:r>
           </a:p>
           <a:p>
             <a:pPr lvl="4"/>
             <a:r>
-              <a:rPr lang="en-US"/>
+              <a:rPr lang="en-US" smtClean="0"/>
               <a:t>Fifth level</a:t>
             </a:r>
+            <a:endParaRPr lang="en-US"/>
           </a:p>
         </p:txBody>
       </p:sp>
@@ -2733,7 +2927,7 @@
           <a:p>
             <a:pPr lvl="0"/>
             <a:r>
-              <a:rPr lang="en-US"/>
+              <a:rPr lang="en-US" smtClean="0"/>
               <a:t>Click to edit Master text styles</a:t>
             </a:r>
           </a:p>
@@ -2789,37 +2983,38 @@
           <a:p>
             <a:pPr lvl="0"/>
             <a:r>
-              <a:rPr lang="en-US"/>
+              <a:rPr lang="en-US" smtClean="0"/>
               <a:t>Click to edit Master text styles</a:t>
             </a:r>
           </a:p>
           <a:p>
             <a:pPr lvl="1"/>
             <a:r>
-              <a:rPr lang="en-US"/>
+              <a:rPr lang="en-US" smtClean="0"/>
               <a:t>Second level</a:t>
             </a:r>
           </a:p>
           <a:p>
             <a:pPr lvl="2"/>
             <a:r>
-              <a:rPr lang="en-US"/>
+              <a:rPr lang="en-US" smtClean="0"/>
               <a:t>Third level</a:t>
             </a:r>
           </a:p>
           <a:p>
             <a:pPr lvl="3"/>
             <a:r>
-              <a:rPr lang="en-US"/>
+              <a:rPr lang="en-US" smtClean="0"/>
               <a:t>Fourth level</a:t>
             </a:r>
           </a:p>
           <a:p>
             <a:pPr lvl="4"/>
             <a:r>
-              <a:rPr lang="en-US"/>
+              <a:rPr lang="en-US" smtClean="0"/>
               <a:t>Fifth level</a:t>
             </a:r>
+            <a:endParaRPr lang="en-US"/>
           </a:p>
         </p:txBody>
       </p:sp>
@@ -2840,7 +3035,7 @@
           <a:p>
             <a:fld id="{5BCAD085-E8A6-8845-BD4E-CB4CCA059FC4}" type="datetimeFigureOut">
               <a:rPr lang="en-US" smtClean="0"/>
-              <a:t>9/30/2026</a:t>
+              <a:t>1/27/13</a:t>
             </a:fld>
             <a:endParaRPr lang="en-US"/>
           </a:p>
@@ -2882,7 +3077,7 @@
           <a:p>
             <a:fld id="{C1FF6DA9-008F-8B48-92A6-B652298478BF}" type="slidenum">
               <a:rPr lang="en-US" smtClean="0"/>
-              <a:t>‹Nº›</a:t>
+              <a:t>‹#›</a:t>
             </a:fld>
             <a:endParaRPr lang="en-US"/>
           </a:p>
@@ -2934,9 +3129,10 @@
           <a:lstStyle/>
           <a:p>
             <a:r>
-              <a:rPr lang="en-US"/>
+              <a:rPr lang="en-US" smtClean="0"/>
               <a:t>Click to edit Master title style</a:t>
             </a:r>
+            <a:endParaRPr lang="en-US"/>
           </a:p>
         </p:txBody>
       </p:sp>
@@ -2957,7 +3153,7 @@
           <a:p>
             <a:fld id="{5BCAD085-E8A6-8845-BD4E-CB4CCA059FC4}" type="datetimeFigureOut">
               <a:rPr lang="en-US" smtClean="0"/>
-              <a:t>9/30/2026</a:t>
+              <a:t>1/27/13</a:t>
             </a:fld>
             <a:endParaRPr lang="en-US"/>
           </a:p>
@@ -2999,7 +3195,7 @@
           <a:p>
             <a:fld id="{C1FF6DA9-008F-8B48-92A6-B652298478BF}" type="slidenum">
               <a:rPr lang="en-US" smtClean="0"/>
-              <a:t>‹Nº›</a:t>
+              <a:t>‹#›</a:t>
             </a:fld>
             <a:endParaRPr lang="en-US"/>
           </a:p>
@@ -3052,7 +3248,7 @@
           <a:p>
             <a:fld id="{5BCAD085-E8A6-8845-BD4E-CB4CCA059FC4}" type="datetimeFigureOut">
               <a:rPr lang="en-US" smtClean="0"/>
-              <a:t>9/30/2026</a:t>
+              <a:t>1/27/13</a:t>
             </a:fld>
             <a:endParaRPr lang="en-US"/>
           </a:p>
@@ -3094,7 +3290,7 @@
           <a:p>
             <a:fld id="{C1FF6DA9-008F-8B48-92A6-B652298478BF}" type="slidenum">
               <a:rPr lang="en-US" smtClean="0"/>
-              <a:t>‹Nº›</a:t>
+              <a:t>‹#›</a:t>
             </a:fld>
             <a:endParaRPr lang="en-US"/>
           </a:p>
@@ -3155,9 +3351,10 @@
           </a:lstStyle>
           <a:p>
             <a:r>
-              <a:rPr lang="en-US"/>
+              <a:rPr lang="en-US" smtClean="0"/>
               <a:t>Click to edit Master title style</a:t>
             </a:r>
+            <a:endParaRPr lang="en-US"/>
           </a:p>
         </p:txBody>
       </p:sp>
@@ -3211,37 +3408,38 @@
           <a:p>
             <a:pPr lvl="0"/>
             <a:r>
-              <a:rPr lang="en-US"/>
+              <a:rPr lang="en-US" smtClean="0"/>
               <a:t>Click to edit Master text styles</a:t>
             </a:r>
           </a:p>
           <a:p>
             <a:pPr lvl="1"/>
             <a:r>
-              <a:rPr lang="en-US"/>
+              <a:rPr lang="en-US" smtClean="0"/>
               <a:t>Second level</a:t>
             </a:r>
           </a:p>
           <a:p>
             <a:pPr lvl="2"/>
             <a:r>
-              <a:rPr lang="en-US"/>
+              <a:rPr lang="en-US" smtClean="0"/>
               <a:t>Third level</a:t>
             </a:r>
           </a:p>
           <a:p>
             <a:pPr lvl="3"/>
             <a:r>
-              <a:rPr lang="en-US"/>
+              <a:rPr lang="en-US" smtClean="0"/>
               <a:t>Fourth level</a:t>
             </a:r>
           </a:p>
           <a:p>
             <a:pPr lvl="4"/>
             <a:r>
-              <a:rPr lang="en-US"/>
+              <a:rPr lang="en-US" smtClean="0"/>
               <a:t>Fifth level</a:t>
             </a:r>
+            <a:endParaRPr lang="en-US"/>
           </a:p>
         </p:txBody>
       </p:sp>
@@ -3304,7 +3502,7 @@
           <a:p>
             <a:pPr lvl="0"/>
             <a:r>
-              <a:rPr lang="en-US"/>
+              <a:rPr lang="en-US" smtClean="0"/>
               <a:t>Click to edit Master text styles</a:t>
             </a:r>
           </a:p>
@@ -3327,7 +3525,7 @@
           <a:p>
             <a:fld id="{5BCAD085-E8A6-8845-BD4E-CB4CCA059FC4}" type="datetimeFigureOut">
               <a:rPr lang="en-US" smtClean="0"/>
-              <a:t>9/30/2026</a:t>
+              <a:t>1/27/13</a:t>
             </a:fld>
             <a:endParaRPr lang="en-US"/>
           </a:p>
@@ -3369,7 +3567,7 @@
           <a:p>
             <a:fld id="{C1FF6DA9-008F-8B48-92A6-B652298478BF}" type="slidenum">
               <a:rPr lang="en-US" smtClean="0"/>
-              <a:t>‹Nº›</a:t>
+              <a:t>‹#›</a:t>
             </a:fld>
             <a:endParaRPr lang="en-US"/>
           </a:p>
@@ -3430,9 +3628,10 @@
           </a:lstStyle>
           <a:p>
             <a:r>
-              <a:rPr lang="en-US"/>
+              <a:rPr lang="en-US" smtClean="0"/>
               <a:t>Click to edit Master title style</a:t>
             </a:r>
+            <a:endParaRPr lang="en-US"/>
           </a:p>
         </p:txBody>
       </p:sp>
@@ -3556,7 +3755,7 @@
           <a:p>
             <a:pPr lvl="0"/>
             <a:r>
-              <a:rPr lang="en-US"/>
+              <a:rPr lang="en-US" smtClean="0"/>
               <a:t>Click to edit Master text styles</a:t>
             </a:r>
           </a:p>
@@ -3579,7 +3778,7 @@
           <a:p>
             <a:fld id="{5BCAD085-E8A6-8845-BD4E-CB4CCA059FC4}" type="datetimeFigureOut">
               <a:rPr lang="en-US" smtClean="0"/>
-              <a:t>9/30/2026</a:t>
+              <a:t>1/27/13</a:t>
             </a:fld>
             <a:endParaRPr lang="en-US"/>
           </a:p>
@@ -3621,7 +3820,7 @@
           <a:p>
             <a:fld id="{C1FF6DA9-008F-8B48-92A6-B652298478BF}" type="slidenum">
               <a:rPr lang="en-US" smtClean="0"/>
-              <a:t>‹Nº›</a:t>
+              <a:t>‹#›</a:t>
             </a:fld>
             <a:endParaRPr lang="en-US"/>
           </a:p>
@@ -3688,9 +3887,10 @@
           <a:lstStyle/>
           <a:p>
             <a:r>
-              <a:rPr lang="en-US"/>
+              <a:rPr lang="en-US" smtClean="0"/>
               <a:t>Click to edit Master title style</a:t>
             </a:r>
+            <a:endParaRPr lang="en-US"/>
           </a:p>
         </p:txBody>
       </p:sp>
@@ -3721,37 +3921,38 @@
           <a:p>
             <a:pPr lvl="0"/>
             <a:r>
-              <a:rPr lang="en-US"/>
+              <a:rPr lang="en-US" smtClean="0"/>
               <a:t>Click to edit Master text styles</a:t>
             </a:r>
           </a:p>
           <a:p>
             <a:pPr lvl="1"/>
             <a:r>
-              <a:rPr lang="en-US"/>
+              <a:rPr lang="en-US" smtClean="0"/>
               <a:t>Second level</a:t>
             </a:r>
           </a:p>
           <a:p>
             <a:pPr lvl="2"/>
             <a:r>
-              <a:rPr lang="en-US"/>
+              <a:rPr lang="en-US" smtClean="0"/>
               <a:t>Third level</a:t>
             </a:r>
           </a:p>
           <a:p>
             <a:pPr lvl="3"/>
             <a:r>
-              <a:rPr lang="en-US"/>
+              <a:rPr lang="en-US" smtClean="0"/>
               <a:t>Fourth level</a:t>
             </a:r>
           </a:p>
           <a:p>
             <a:pPr lvl="4"/>
             <a:r>
-              <a:rPr lang="en-US"/>
+              <a:rPr lang="en-US" smtClean="0"/>
               <a:t>Fifth level</a:t>
             </a:r>
+            <a:endParaRPr lang="en-US"/>
           </a:p>
         </p:txBody>
       </p:sp>
@@ -3790,7 +3991,7 @@
           <a:p>
             <a:fld id="{5BCAD085-E8A6-8845-BD4E-CB4CCA059FC4}" type="datetimeFigureOut">
               <a:rPr lang="en-US" smtClean="0"/>
-              <a:t>9/30/2026</a:t>
+              <a:t>1/27/13</a:t>
             </a:fld>
             <a:endParaRPr lang="en-US"/>
           </a:p>
@@ -3868,7 +4069,7 @@
           <a:p>
             <a:fld id="{C1FF6DA9-008F-8B48-92A6-B652298478BF}" type="slidenum">
               <a:rPr lang="en-US" smtClean="0"/>
-              <a:t>‹Nº›</a:t>
+              <a:t>‹#›</a:t>
             </a:fld>
             <a:endParaRPr lang="en-US"/>
           </a:p>
@@ -4149,7 +4350,7 @@
 </file>
 
 <file path=ppt/slides/slide1.xml><?xml version="1.0" encoding="utf-8"?>
-<p:sld xmlns:a="http://schemas.openxmlformats.org/drawingml/2006/main" xmlns:r="http://schemas.openxmlformats.org/officeDocument/2006/relationships" xmlns:p="http://schemas.openxmlformats.org/presentationml/2006/main">
+<p:sld xmlns:a="http://schemas.openxmlformats.org/drawingml/2006/main" xmlns:p="http://schemas.openxmlformats.org/presentationml/2006/main" xmlns:r="http://schemas.openxmlformats.org/officeDocument/2006/relationships">
   <p:cSld>
     <p:bg>
       <p:bgPr>
@@ -4165,14 +4366,7 @@
         <p:cNvGrpSpPr/>
         <p:nvPr/>
       </p:nvGrpSpPr>
-      <p:grpSpPr>
-        <a:xfrm>
-          <a:off x="0" y="0"/>
-          <a:ext cx="0" cy="0"/>
-          <a:chOff x="0" y="0"/>
-          <a:chExt cx="0" cy="0"/>
-        </a:xfrm>
-      </p:grpSpPr>
+      <p:grpSpPr/>
       <p:sp>
         <p:nvSpPr>
           <p:cNvPr id="2" name="Rectangle 1"/>
@@ -4214,7 +4408,6 @@
           <a:lstStyle/>
           <a:p>
             <a:pPr algn="ctr"/>
-            <a:endParaRPr/>
           </a:p>
         </p:txBody>
       </p:sp>
@@ -4235,7 +4428,7 @@
           <a:noFill/>
         </p:spPr>
         <p:txBody>
-          <a:bodyPr wrap="square" lIns="45720" tIns="18288" rIns="45720" bIns="18288" anchor="t">
+          <a:bodyPr wrap="square" anchor="t" lIns="45720" rIns="45720" tIns="18288" bIns="18288">
             <a:spAutoFit/>
           </a:bodyPr>
           <a:lstStyle/>
@@ -4277,7 +4470,7 @@
           <a:noFill/>
         </p:spPr>
         <p:txBody>
-          <a:bodyPr wrap="square" lIns="45720" tIns="18288" rIns="45720" bIns="18288" anchor="t">
+          <a:bodyPr wrap="square" anchor="t" lIns="45720" rIns="45720" tIns="18288" bIns="18288">
             <a:spAutoFit/>
           </a:bodyPr>
           <a:lstStyle/>
@@ -4319,7 +4512,7 @@
           <a:noFill/>
         </p:spPr>
         <p:txBody>
-          <a:bodyPr wrap="square" lIns="45720" tIns="18288" rIns="45720" bIns="18288" anchor="t">
+          <a:bodyPr wrap="square" anchor="t" lIns="45720" rIns="45720" tIns="18288" bIns="18288">
             <a:spAutoFit/>
           </a:bodyPr>
           <a:lstStyle/>
@@ -4372,7 +4565,7 @@
 </file>
 
 <file path=ppt/slides/slide10.xml><?xml version="1.0" encoding="utf-8"?>
-<p:sld xmlns:a="http://schemas.openxmlformats.org/drawingml/2006/main" xmlns:r="http://schemas.openxmlformats.org/officeDocument/2006/relationships" xmlns:p="http://schemas.openxmlformats.org/presentationml/2006/main">
+<p:sld xmlns:a="http://schemas.openxmlformats.org/drawingml/2006/main" xmlns:p="http://schemas.openxmlformats.org/presentationml/2006/main" xmlns:r="http://schemas.openxmlformats.org/officeDocument/2006/relationships">
   <p:cSld>
     <p:bg>
       <p:bgPr>
@@ -4388,14 +4581,7 @@
         <p:cNvGrpSpPr/>
         <p:nvPr/>
       </p:nvGrpSpPr>
-      <p:grpSpPr>
-        <a:xfrm>
-          <a:off x="0" y="0"/>
-          <a:ext cx="0" cy="0"/>
-          <a:chOff x="0" y="0"/>
-          <a:chExt cx="0" cy="0"/>
-        </a:xfrm>
-      </p:grpSpPr>
+      <p:grpSpPr/>
       <p:sp>
         <p:nvSpPr>
           <p:cNvPr id="2" name="Rectangle 1"/>
@@ -4437,7 +4623,6 @@
           <a:lstStyle/>
           <a:p>
             <a:pPr algn="ctr"/>
-            <a:endParaRPr/>
           </a:p>
         </p:txBody>
       </p:sp>
@@ -4458,7 +4643,7 @@
           <a:noFill/>
         </p:spPr>
         <p:txBody>
-          <a:bodyPr wrap="square" lIns="45720" tIns="18288" rIns="45720" bIns="18288" anchor="t">
+          <a:bodyPr wrap="square" anchor="t" lIns="45720" rIns="45720" tIns="18288" bIns="18288">
             <a:spAutoFit/>
           </a:bodyPr>
           <a:lstStyle/>
@@ -4500,7 +4685,7 @@
           <a:noFill/>
         </p:spPr>
         <p:txBody>
-          <a:bodyPr wrap="square" lIns="45720" tIns="18288" rIns="45720" bIns="18288" anchor="t">
+          <a:bodyPr wrap="square" anchor="t" lIns="45720" rIns="45720" tIns="18288" bIns="18288">
             <a:spAutoFit/>
           </a:bodyPr>
           <a:lstStyle/>
@@ -4542,7 +4727,7 @@
           <a:noFill/>
         </p:spPr>
         <p:txBody>
-          <a:bodyPr wrap="square" lIns="45720" tIns="18288" rIns="45720" bIns="18288" anchor="t">
+          <a:bodyPr wrap="square" anchor="t" lIns="45720" rIns="45720" tIns="18288" bIns="18288">
             <a:spAutoFit/>
           </a:bodyPr>
           <a:lstStyle/>
@@ -4576,7 +4761,7 @@
 </file>
 
 <file path=ppt/slides/slide2.xml><?xml version="1.0" encoding="utf-8"?>
-<p:sld xmlns:a="http://schemas.openxmlformats.org/drawingml/2006/main" xmlns:r="http://schemas.openxmlformats.org/officeDocument/2006/relationships" xmlns:p="http://schemas.openxmlformats.org/presentationml/2006/main">
+<p:sld xmlns:a="http://schemas.openxmlformats.org/drawingml/2006/main" xmlns:p="http://schemas.openxmlformats.org/presentationml/2006/main" xmlns:r="http://schemas.openxmlformats.org/officeDocument/2006/relationships">
   <p:cSld>
     <p:bg>
       <p:bgPr>
@@ -4592,14 +4777,7 @@
         <p:cNvGrpSpPr/>
         <p:nvPr/>
       </p:nvGrpSpPr>
-      <p:grpSpPr>
-        <a:xfrm>
-          <a:off x="0" y="0"/>
-          <a:ext cx="0" cy="0"/>
-          <a:chOff x="0" y="0"/>
-          <a:chExt cx="0" cy="0"/>
-        </a:xfrm>
-      </p:grpSpPr>
+      <p:grpSpPr/>
       <p:sp>
         <p:nvSpPr>
           <p:cNvPr id="2" name="Rectangle 1"/>
@@ -4641,7 +4819,6 @@
           <a:lstStyle/>
           <a:p>
             <a:pPr algn="ctr"/>
-            <a:endParaRPr/>
           </a:p>
         </p:txBody>
       </p:sp>
@@ -4662,7 +4839,7 @@
           <a:noFill/>
         </p:spPr>
         <p:txBody>
-          <a:bodyPr wrap="square" lIns="45720" tIns="18288" rIns="45720" bIns="18288" anchor="t">
+          <a:bodyPr wrap="square" anchor="t" lIns="45720" rIns="45720" tIns="18288" bIns="18288">
             <a:spAutoFit/>
           </a:bodyPr>
           <a:lstStyle/>
@@ -4704,7 +4881,7 @@
           <a:noFill/>
         </p:spPr>
         <p:txBody>
-          <a:bodyPr wrap="square" lIns="45720" tIns="18288" rIns="45720" bIns="18288" anchor="t">
+          <a:bodyPr wrap="square" anchor="t" lIns="45720" rIns="45720" tIns="18288" bIns="18288">
             <a:spAutoFit/>
           </a:bodyPr>
           <a:lstStyle/>
@@ -4770,7 +4947,6 @@
           <a:lstStyle/>
           <a:p>
             <a:pPr algn="ctr"/>
-            <a:endParaRPr/>
           </a:p>
         </p:txBody>
       </p:sp>
@@ -4815,7 +4991,6 @@
           <a:lstStyle/>
           <a:p>
             <a:pPr algn="ctr"/>
-            <a:endParaRPr/>
           </a:p>
         </p:txBody>
       </p:sp>
@@ -4836,7 +5011,7 @@
           <a:noFill/>
         </p:spPr>
         <p:txBody>
-          <a:bodyPr wrap="square" lIns="45720" tIns="18288" rIns="45720" bIns="18288" anchor="t">
+          <a:bodyPr wrap="square" anchor="t" lIns="45720" rIns="45720" tIns="18288" bIns="18288">
             <a:spAutoFit/>
           </a:bodyPr>
           <a:lstStyle/>
@@ -4878,7 +5053,7 @@
           <a:noFill/>
         </p:spPr>
         <p:txBody>
-          <a:bodyPr wrap="square" lIns="45720" tIns="18288" rIns="45720" bIns="18288" anchor="t">
+          <a:bodyPr wrap="square" anchor="t" lIns="45720" rIns="45720" tIns="18288" bIns="18288">
             <a:spAutoFit/>
           </a:bodyPr>
           <a:lstStyle/>
@@ -4920,7 +5095,7 @@
           <a:noFill/>
         </p:spPr>
         <p:txBody>
-          <a:bodyPr wrap="square" lIns="45720" tIns="18288" rIns="45720" bIns="18288" anchor="t">
+          <a:bodyPr wrap="square" anchor="t" lIns="45720" rIns="45720" tIns="18288" bIns="18288">
             <a:spAutoFit/>
           </a:bodyPr>
           <a:lstStyle/>
@@ -4962,7 +5137,7 @@
           <a:noFill/>
         </p:spPr>
         <p:txBody>
-          <a:bodyPr wrap="square" lIns="45720" tIns="18288" rIns="45720" bIns="18288" anchor="t">
+          <a:bodyPr wrap="square" anchor="t" lIns="45720" rIns="45720" tIns="18288" bIns="18288">
             <a:spAutoFit/>
           </a:bodyPr>
           <a:lstStyle/>
@@ -5085,7 +5260,6 @@
           <a:lstStyle/>
           <a:p>
             <a:pPr algn="ctr"/>
-            <a:endParaRPr/>
           </a:p>
         </p:txBody>
       </p:sp>
@@ -5130,7 +5304,6 @@
           <a:lstStyle/>
           <a:p>
             <a:pPr algn="ctr"/>
-            <a:endParaRPr/>
           </a:p>
         </p:txBody>
       </p:sp>
@@ -5151,7 +5324,7 @@
           <a:noFill/>
         </p:spPr>
         <p:txBody>
-          <a:bodyPr wrap="square" lIns="45720" tIns="18288" rIns="45720" bIns="18288" anchor="t">
+          <a:bodyPr wrap="square" anchor="t" lIns="45720" rIns="45720" tIns="18288" bIns="18288">
             <a:spAutoFit/>
           </a:bodyPr>
           <a:lstStyle/>
@@ -5193,7 +5366,7 @@
           <a:noFill/>
         </p:spPr>
         <p:txBody>
-          <a:bodyPr wrap="square" lIns="45720" tIns="18288" rIns="45720" bIns="18288" anchor="t">
+          <a:bodyPr wrap="square" anchor="t" lIns="45720" rIns="45720" tIns="18288" bIns="18288">
             <a:spAutoFit/>
           </a:bodyPr>
           <a:lstStyle/>
@@ -5235,7 +5408,7 @@
           <a:noFill/>
         </p:spPr>
         <p:txBody>
-          <a:bodyPr wrap="square" lIns="45720" tIns="18288" rIns="45720" bIns="18288" anchor="t">
+          <a:bodyPr wrap="square" anchor="t" lIns="45720" rIns="45720" tIns="18288" bIns="18288">
             <a:spAutoFit/>
           </a:bodyPr>
           <a:lstStyle/>
@@ -5277,7 +5450,7 @@
           <a:noFill/>
         </p:spPr>
         <p:txBody>
-          <a:bodyPr wrap="square" lIns="45720" tIns="18288" rIns="45720" bIns="18288" anchor="t">
+          <a:bodyPr wrap="square" anchor="t" lIns="45720" rIns="45720" tIns="18288" bIns="18288">
             <a:spAutoFit/>
           </a:bodyPr>
           <a:lstStyle/>
@@ -5319,7 +5492,7 @@
           <a:noFill/>
         </p:spPr>
         <p:txBody>
-          <a:bodyPr wrap="square" lIns="45720" tIns="18288" rIns="45720" bIns="18288" anchor="t">
+          <a:bodyPr wrap="square" anchor="t" lIns="45720" rIns="45720" tIns="18288" bIns="18288">
             <a:spAutoFit/>
           </a:bodyPr>
           <a:lstStyle/>
@@ -5361,7 +5534,7 @@
           <a:noFill/>
         </p:spPr>
         <p:txBody>
-          <a:bodyPr wrap="square" lIns="45720" tIns="18288" rIns="45720" bIns="18288" anchor="t">
+          <a:bodyPr wrap="square" anchor="t" lIns="45720" rIns="45720" tIns="18288" bIns="18288">
             <a:spAutoFit/>
           </a:bodyPr>
           <a:lstStyle/>
@@ -5403,7 +5576,7 @@
           <a:noFill/>
         </p:spPr>
         <p:txBody>
-          <a:bodyPr wrap="square" lIns="45720" tIns="18288" rIns="45720" bIns="18288" anchor="t">
+          <a:bodyPr wrap="square" anchor="t" lIns="45720" rIns="45720" tIns="18288" bIns="18288">
             <a:spAutoFit/>
           </a:bodyPr>
           <a:lstStyle/>
@@ -5445,7 +5618,7 @@
           <a:noFill/>
         </p:spPr>
         <p:txBody>
-          <a:bodyPr wrap="square" lIns="45720" tIns="18288" rIns="45720" bIns="18288" anchor="t">
+          <a:bodyPr wrap="square" anchor="t" lIns="45720" rIns="45720" tIns="18288" bIns="18288">
             <a:spAutoFit/>
           </a:bodyPr>
           <a:lstStyle/>
@@ -5479,7 +5652,7 @@
 </file>
 
 <file path=ppt/slides/slide3.xml><?xml version="1.0" encoding="utf-8"?>
-<p:sld xmlns:a="http://schemas.openxmlformats.org/drawingml/2006/main" xmlns:r="http://schemas.openxmlformats.org/officeDocument/2006/relationships" xmlns:p="http://schemas.openxmlformats.org/presentationml/2006/main">
+<p:sld xmlns:a="http://schemas.openxmlformats.org/drawingml/2006/main" xmlns:p="http://schemas.openxmlformats.org/presentationml/2006/main" xmlns:r="http://schemas.openxmlformats.org/officeDocument/2006/relationships">
   <p:cSld>
     <p:bg>
       <p:bgPr>
@@ -5495,14 +5668,7 @@
         <p:cNvGrpSpPr/>
         <p:nvPr/>
       </p:nvGrpSpPr>
-      <p:grpSpPr>
-        <a:xfrm>
-          <a:off x="0" y="0"/>
-          <a:ext cx="0" cy="0"/>
-          <a:chOff x="0" y="0"/>
-          <a:chExt cx="0" cy="0"/>
-        </a:xfrm>
-      </p:grpSpPr>
+      <p:grpSpPr/>
       <p:sp>
         <p:nvSpPr>
           <p:cNvPr id="2" name="Rectangle 1"/>
@@ -5544,7 +5710,6 @@
           <a:lstStyle/>
           <a:p>
             <a:pPr algn="ctr"/>
-            <a:endParaRPr/>
           </a:p>
         </p:txBody>
       </p:sp>
@@ -5565,7 +5730,7 @@
           <a:noFill/>
         </p:spPr>
         <p:txBody>
-          <a:bodyPr wrap="square" lIns="45720" tIns="18288" rIns="45720" bIns="18288" anchor="t">
+          <a:bodyPr wrap="square" anchor="t" lIns="45720" rIns="45720" tIns="18288" bIns="18288">
             <a:spAutoFit/>
           </a:bodyPr>
           <a:lstStyle/>
@@ -5607,7 +5772,7 @@
           <a:noFill/>
         </p:spPr>
         <p:txBody>
-          <a:bodyPr wrap="square" lIns="45720" tIns="18288" rIns="45720" bIns="18288" anchor="t">
+          <a:bodyPr wrap="square" anchor="t" lIns="45720" rIns="45720" tIns="18288" bIns="18288">
             <a:spAutoFit/>
           </a:bodyPr>
           <a:lstStyle/>
@@ -5673,7 +5838,6 @@
           <a:lstStyle/>
           <a:p>
             <a:pPr algn="ctr"/>
-            <a:endParaRPr/>
           </a:p>
         </p:txBody>
       </p:sp>
@@ -5718,7 +5882,6 @@
           <a:lstStyle/>
           <a:p>
             <a:pPr algn="ctr"/>
-            <a:endParaRPr/>
           </a:p>
         </p:txBody>
       </p:sp>
@@ -5739,7 +5902,7 @@
           <a:noFill/>
         </p:spPr>
         <p:txBody>
-          <a:bodyPr wrap="square" lIns="45720" tIns="18288" rIns="45720" bIns="18288" anchor="t">
+          <a:bodyPr wrap="square" anchor="t" lIns="45720" rIns="45720" tIns="18288" bIns="18288">
             <a:spAutoFit/>
           </a:bodyPr>
           <a:lstStyle/>
@@ -5781,7 +5944,7 @@
           <a:noFill/>
         </p:spPr>
         <p:txBody>
-          <a:bodyPr wrap="square" lIns="45720" tIns="18288" rIns="45720" bIns="18288" anchor="t">
+          <a:bodyPr wrap="square" anchor="t" lIns="45720" rIns="45720" tIns="18288" bIns="18288">
             <a:spAutoFit/>
           </a:bodyPr>
           <a:lstStyle/>
@@ -5849,7 +6012,6 @@
           <a:lstStyle/>
           <a:p>
             <a:pPr algn="ctr"/>
-            <a:endParaRPr/>
           </a:p>
         </p:txBody>
       </p:sp>
@@ -5894,7 +6056,6 @@
           <a:lstStyle/>
           <a:p>
             <a:pPr algn="ctr"/>
-            <a:endParaRPr/>
           </a:p>
         </p:txBody>
       </p:sp>
@@ -5915,7 +6076,7 @@
           <a:noFill/>
         </p:spPr>
         <p:txBody>
-          <a:bodyPr wrap="square" lIns="45720" tIns="18288" rIns="45720" bIns="18288" anchor="t">
+          <a:bodyPr wrap="square" anchor="t" lIns="45720" rIns="45720" tIns="18288" bIns="18288">
             <a:spAutoFit/>
           </a:bodyPr>
           <a:lstStyle/>
@@ -5957,7 +6118,7 @@
           <a:noFill/>
         </p:spPr>
         <p:txBody>
-          <a:bodyPr wrap="square" lIns="45720" tIns="18288" rIns="45720" bIns="18288" anchor="t">
+          <a:bodyPr wrap="square" anchor="t" lIns="45720" rIns="45720" tIns="18288" bIns="18288">
             <a:spAutoFit/>
           </a:bodyPr>
           <a:lstStyle/>
@@ -5999,7 +6160,7 @@
           <a:noFill/>
         </p:spPr>
         <p:txBody>
-          <a:bodyPr wrap="square" lIns="45720" tIns="18288" rIns="45720" bIns="18288" anchor="t">
+          <a:bodyPr wrap="square" anchor="t" lIns="45720" rIns="45720" tIns="18288" bIns="18288">
             <a:spAutoFit/>
           </a:bodyPr>
           <a:lstStyle/>
@@ -6067,7 +6228,6 @@
           <a:lstStyle/>
           <a:p>
             <a:pPr algn="ctr"/>
-            <a:endParaRPr/>
           </a:p>
         </p:txBody>
       </p:sp>
@@ -6112,7 +6272,6 @@
           <a:lstStyle/>
           <a:p>
             <a:pPr algn="ctr"/>
-            <a:endParaRPr/>
           </a:p>
         </p:txBody>
       </p:sp>
@@ -6133,7 +6292,7 @@
           <a:noFill/>
         </p:spPr>
         <p:txBody>
-          <a:bodyPr wrap="square" lIns="45720" tIns="18288" rIns="45720" bIns="18288" anchor="t">
+          <a:bodyPr wrap="square" anchor="t" lIns="45720" rIns="45720" tIns="18288" bIns="18288">
             <a:spAutoFit/>
           </a:bodyPr>
           <a:lstStyle/>
@@ -6175,7 +6334,7 @@
           <a:noFill/>
         </p:spPr>
         <p:txBody>
-          <a:bodyPr wrap="square" lIns="45720" tIns="18288" rIns="45720" bIns="18288" anchor="t">
+          <a:bodyPr wrap="square" anchor="t" lIns="45720" rIns="45720" tIns="18288" bIns="18288">
             <a:spAutoFit/>
           </a:bodyPr>
           <a:lstStyle/>
@@ -6217,7 +6376,7 @@
           <a:noFill/>
         </p:spPr>
         <p:txBody>
-          <a:bodyPr wrap="square" lIns="45720" tIns="18288" rIns="45720" bIns="18288" anchor="t">
+          <a:bodyPr wrap="square" anchor="t" lIns="45720" rIns="45720" tIns="18288" bIns="18288">
             <a:spAutoFit/>
           </a:bodyPr>
           <a:lstStyle/>
@@ -6285,7 +6444,6 @@
           <a:lstStyle/>
           <a:p>
             <a:pPr algn="ctr"/>
-            <a:endParaRPr/>
           </a:p>
         </p:txBody>
       </p:sp>
@@ -6330,7 +6488,6 @@
           <a:lstStyle/>
           <a:p>
             <a:pPr algn="ctr"/>
-            <a:endParaRPr/>
           </a:p>
         </p:txBody>
       </p:sp>
@@ -6351,7 +6508,7 @@
           <a:noFill/>
         </p:spPr>
         <p:txBody>
-          <a:bodyPr wrap="square" lIns="45720" tIns="18288" rIns="45720" bIns="18288" anchor="t">
+          <a:bodyPr wrap="square" anchor="t" lIns="45720" rIns="45720" tIns="18288" bIns="18288">
             <a:spAutoFit/>
           </a:bodyPr>
           <a:lstStyle/>
@@ -6393,7 +6550,7 @@
           <a:noFill/>
         </p:spPr>
         <p:txBody>
-          <a:bodyPr wrap="square" lIns="45720" tIns="18288" rIns="45720" bIns="18288" anchor="t">
+          <a:bodyPr wrap="square" anchor="t" lIns="45720" rIns="45720" tIns="18288" bIns="18288">
             <a:spAutoFit/>
           </a:bodyPr>
           <a:lstStyle/>
@@ -6435,7 +6592,7 @@
           <a:noFill/>
         </p:spPr>
         <p:txBody>
-          <a:bodyPr wrap="square" lIns="45720" tIns="18288" rIns="45720" bIns="18288" anchor="t">
+          <a:bodyPr wrap="square" anchor="t" lIns="45720" rIns="45720" tIns="18288" bIns="18288">
             <a:spAutoFit/>
           </a:bodyPr>
           <a:lstStyle/>
@@ -6503,7 +6660,6 @@
           <a:lstStyle/>
           <a:p>
             <a:pPr algn="ctr"/>
-            <a:endParaRPr/>
           </a:p>
         </p:txBody>
       </p:sp>
@@ -6548,7 +6704,6 @@
           <a:lstStyle/>
           <a:p>
             <a:pPr algn="ctr"/>
-            <a:endParaRPr/>
           </a:p>
         </p:txBody>
       </p:sp>
@@ -6569,7 +6724,7 @@
           <a:noFill/>
         </p:spPr>
         <p:txBody>
-          <a:bodyPr wrap="square" lIns="45720" tIns="18288" rIns="45720" bIns="18288" anchor="t">
+          <a:bodyPr wrap="square" anchor="t" lIns="45720" rIns="45720" tIns="18288" bIns="18288">
             <a:spAutoFit/>
           </a:bodyPr>
           <a:lstStyle/>
@@ -6589,7 +6744,7 @@
                 </a:solidFill>
                 <a:latin typeface="Segoe UI"/>
               </a:rPr>
-              <a:t>Proveedores</a:t>
+              <a:t>Precios y ofertas</a:t>
             </a:r>
           </a:p>
         </p:txBody>
@@ -6611,7 +6766,7 @@
           <a:noFill/>
         </p:spPr>
         <p:txBody>
-          <a:bodyPr wrap="square" lIns="45720" tIns="18288" rIns="45720" bIns="18288" anchor="t">
+          <a:bodyPr wrap="square" anchor="t" lIns="45720" rIns="45720" tIns="18288" bIns="18288">
             <a:spAutoFit/>
           </a:bodyPr>
           <a:lstStyle/>
@@ -6631,7 +6786,7 @@
                 </a:solidFill>
                 <a:latin typeface="Segoe UI"/>
               </a:rPr>
-              <a:t>Padrón, cola de correos, altas, bajas y reactivaciones.</a:t>
+              <a:t>Tabla de precios, margen y ofertas. Un cambio llega hasta los carritos.</a:t>
             </a:r>
           </a:p>
         </p:txBody>
@@ -6653,7 +6808,7 @@
           <a:noFill/>
         </p:spPr>
         <p:txBody>
-          <a:bodyPr wrap="square" lIns="45720" tIns="18288" rIns="45720" bIns="18288" anchor="t">
+          <a:bodyPr wrap="square" anchor="t" lIns="45720" rIns="45720" tIns="18288" bIns="18288">
             <a:spAutoFit/>
           </a:bodyPr>
           <a:lstStyle/>
@@ -6721,7 +6876,6 @@
           <a:lstStyle/>
           <a:p>
             <a:pPr algn="ctr"/>
-            <a:endParaRPr/>
           </a:p>
         </p:txBody>
       </p:sp>
@@ -6766,7 +6920,6 @@
           <a:lstStyle/>
           <a:p>
             <a:pPr algn="ctr"/>
-            <a:endParaRPr/>
           </a:p>
         </p:txBody>
       </p:sp>
@@ -6787,7 +6940,7 @@
           <a:noFill/>
         </p:spPr>
         <p:txBody>
-          <a:bodyPr wrap="square" lIns="45720" tIns="18288" rIns="45720" bIns="18288" anchor="t">
+          <a:bodyPr wrap="square" anchor="t" lIns="45720" rIns="45720" tIns="18288" bIns="18288">
             <a:spAutoFit/>
           </a:bodyPr>
           <a:lstStyle/>
@@ -6807,7 +6960,7 @@
                 </a:solidFill>
                 <a:latin typeface="Segoe UI"/>
               </a:rPr>
-              <a:t>Cuentas y roles</a:t>
+              <a:t>Tienda online</a:t>
             </a:r>
           </a:p>
         </p:txBody>
@@ -6829,7 +6982,7 @@
           <a:noFill/>
         </p:spPr>
         <p:txBody>
-          <a:bodyPr wrap="square" lIns="45720" tIns="18288" rIns="45720" bIns="18288" anchor="t">
+          <a:bodyPr wrap="square" anchor="t" lIns="45720" rIns="45720" tIns="18288" bIns="18288">
             <a:spAutoFit/>
           </a:bodyPr>
           <a:lstStyle/>
@@ -6849,7 +7002,7 @@
                 </a:solidFill>
                 <a:latin typeface="Segoe UI"/>
               </a:rPr>
-              <a:t>Usuarios del personal y clientes. Acceso controlado en el servidor.</a:t>
+              <a:t>Portada configurable, catálogo con filtros, ficha y carrito.</a:t>
             </a:r>
           </a:p>
         </p:txBody>
@@ -6871,7 +7024,7 @@
           <a:noFill/>
         </p:spPr>
         <p:txBody>
-          <a:bodyPr wrap="square" lIns="45720" tIns="18288" rIns="45720" bIns="18288" anchor="t">
+          <a:bodyPr wrap="square" anchor="t" lIns="45720" rIns="45720" tIns="18288" bIns="18288">
             <a:spAutoFit/>
           </a:bodyPr>
           <a:lstStyle/>
@@ -6939,7 +7092,6 @@
           <a:lstStyle/>
           <a:p>
             <a:pPr algn="ctr"/>
-            <a:endParaRPr/>
           </a:p>
         </p:txBody>
       </p:sp>
@@ -6984,7 +7136,6 @@
           <a:lstStyle/>
           <a:p>
             <a:pPr algn="ctr"/>
-            <a:endParaRPr/>
           </a:p>
         </p:txBody>
       </p:sp>
@@ -7005,7 +7156,7 @@
           <a:noFill/>
         </p:spPr>
         <p:txBody>
-          <a:bodyPr wrap="square" lIns="45720" tIns="18288" rIns="45720" bIns="18288" anchor="t">
+          <a:bodyPr wrap="square" anchor="t" lIns="45720" rIns="45720" tIns="18288" bIns="18288">
             <a:spAutoFit/>
           </a:bodyPr>
           <a:lstStyle/>
@@ -7025,7 +7176,7 @@
                 </a:solidFill>
                 <a:latin typeface="Segoe UI"/>
               </a:rPr>
-              <a:t>Auditoría</a:t>
+              <a:t>Cuentas, roles y auditoría</a:t>
             </a:r>
           </a:p>
         </p:txBody>
@@ -7047,7 +7198,7 @@
           <a:noFill/>
         </p:spPr>
         <p:txBody>
-          <a:bodyPr wrap="square" lIns="45720" tIns="18288" rIns="45720" bIns="18288" anchor="t">
+          <a:bodyPr wrap="square" anchor="t" lIns="45720" rIns="45720" tIns="18288" bIns="18288">
             <a:spAutoFit/>
           </a:bodyPr>
           <a:lstStyle/>
@@ -7067,7 +7218,7 @@
                 </a:solidFill>
                 <a:latin typeface="Segoe UI"/>
               </a:rPr>
-              <a:t>Registro de cada operación, que no se puede modificar ni borrar.</a:t>
+              <a:t>Acceso controlado en el servidor. Registro que no se puede alterar.</a:t>
             </a:r>
           </a:p>
         </p:txBody>
@@ -7089,7 +7240,7 @@
           <a:noFill/>
         </p:spPr>
         <p:txBody>
-          <a:bodyPr wrap="square" lIns="45720" tIns="18288" rIns="45720" bIns="18288" anchor="t">
+          <a:bodyPr wrap="square" anchor="t" lIns="45720" rIns="45720" tIns="18288" bIns="18288">
             <a:spAutoFit/>
           </a:bodyPr>
           <a:lstStyle/>
@@ -7157,7 +7308,6 @@
           <a:lstStyle/>
           <a:p>
             <a:pPr algn="ctr"/>
-            <a:endParaRPr/>
           </a:p>
         </p:txBody>
       </p:sp>
@@ -7202,7 +7352,6 @@
           <a:lstStyle/>
           <a:p>
             <a:pPr algn="ctr"/>
-            <a:endParaRPr/>
           </a:p>
         </p:txBody>
       </p:sp>
@@ -7223,7 +7372,7 @@
           <a:noFill/>
         </p:spPr>
         <p:txBody>
-          <a:bodyPr wrap="square" lIns="45720" tIns="18288" rIns="45720" bIns="18288" anchor="t">
+          <a:bodyPr wrap="square" anchor="t" lIns="45720" rIns="45720" tIns="18288" bIns="18288">
             <a:spAutoFit/>
           </a:bodyPr>
           <a:lstStyle/>
@@ -7243,7 +7392,7 @@
                 </a:solidFill>
                 <a:latin typeface="Segoe UI"/>
               </a:rPr>
-              <a:t>Tienda y pedidos</a:t>
+              <a:t>Compra y pedidos</a:t>
             </a:r>
           </a:p>
         </p:txBody>
@@ -7265,7 +7414,7 @@
           <a:noFill/>
         </p:spPr>
         <p:txBody>
-          <a:bodyPr wrap="square" lIns="45720" tIns="18288" rIns="45720" bIns="18288" anchor="t">
+          <a:bodyPr wrap="square" anchor="t" lIns="45720" rIns="45720" tIns="18288" bIns="18288">
             <a:spAutoFit/>
           </a:bodyPr>
           <a:lstStyle/>
@@ -7285,7 +7434,7 @@
                 </a:solidFill>
                 <a:latin typeface="Segoe UI"/>
               </a:rPr>
-              <a:t>Catálogo público, carrito, compra y seguimiento.</a:t>
+              <a:t>Pago, seguimiento y reservas de pre-venta.</a:t>
             </a:r>
           </a:p>
         </p:txBody>
@@ -7307,7 +7456,7 @@
           <a:noFill/>
         </p:spPr>
         <p:txBody>
-          <a:bodyPr wrap="square" lIns="45720" tIns="18288" rIns="45720" bIns="18288" anchor="t">
+          <a:bodyPr wrap="square" anchor="t" lIns="45720" rIns="45720" tIns="18288" bIns="18288">
             <a:spAutoFit/>
           </a:bodyPr>
           <a:lstStyle/>
@@ -7375,7 +7524,6 @@
           <a:lstStyle/>
           <a:p>
             <a:pPr algn="ctr"/>
-            <a:endParaRPr/>
           </a:p>
         </p:txBody>
       </p:sp>
@@ -7420,7 +7568,6 @@
           <a:lstStyle/>
           <a:p>
             <a:pPr algn="ctr"/>
-            <a:endParaRPr/>
           </a:p>
         </p:txBody>
       </p:sp>
@@ -7441,7 +7588,7 @@
           <a:noFill/>
         </p:spPr>
         <p:txBody>
-          <a:bodyPr wrap="square" lIns="45720" tIns="18288" rIns="45720" bIns="18288" anchor="t">
+          <a:bodyPr wrap="square" anchor="t" lIns="45720" rIns="45720" tIns="18288" bIns="18288">
             <a:spAutoFit/>
           </a:bodyPr>
           <a:lstStyle/>
@@ -7483,7 +7630,7 @@
           <a:noFill/>
         </p:spPr>
         <p:txBody>
-          <a:bodyPr wrap="square" lIns="45720" tIns="18288" rIns="45720" bIns="18288" anchor="t">
+          <a:bodyPr wrap="square" anchor="t" lIns="45720" rIns="45720" tIns="18288" bIns="18288">
             <a:spAutoFit/>
           </a:bodyPr>
           <a:lstStyle/>
@@ -7525,7 +7672,7 @@
           <a:noFill/>
         </p:spPr>
         <p:txBody>
-          <a:bodyPr wrap="square" lIns="45720" tIns="18288" rIns="45720" bIns="18288" anchor="t">
+          <a:bodyPr wrap="square" anchor="t" lIns="45720" rIns="45720" tIns="18288" bIns="18288">
             <a:spAutoFit/>
           </a:bodyPr>
           <a:lstStyle/>
@@ -7559,7 +7706,7 @@
 </file>
 
 <file path=ppt/slides/slide4.xml><?xml version="1.0" encoding="utf-8"?>
-<p:sld xmlns:a="http://schemas.openxmlformats.org/drawingml/2006/main" xmlns:r="http://schemas.openxmlformats.org/officeDocument/2006/relationships" xmlns:p="http://schemas.openxmlformats.org/presentationml/2006/main">
+<p:sld xmlns:a="http://schemas.openxmlformats.org/drawingml/2006/main" xmlns:p="http://schemas.openxmlformats.org/presentationml/2006/main" xmlns:r="http://schemas.openxmlformats.org/officeDocument/2006/relationships">
   <p:cSld>
     <p:bg>
       <p:bgPr>
@@ -7575,14 +7722,7 @@
         <p:cNvGrpSpPr/>
         <p:nvPr/>
       </p:nvGrpSpPr>
-      <p:grpSpPr>
-        <a:xfrm>
-          <a:off x="0" y="0"/>
-          <a:ext cx="0" cy="0"/>
-          <a:chOff x="0" y="0"/>
-          <a:chExt cx="0" cy="0"/>
-        </a:xfrm>
-      </p:grpSpPr>
+      <p:grpSpPr/>
       <p:sp>
         <p:nvSpPr>
           <p:cNvPr id="2" name="Rectangle 1"/>
@@ -7624,7 +7764,6 @@
           <a:lstStyle/>
           <a:p>
             <a:pPr algn="ctr"/>
-            <a:endParaRPr/>
           </a:p>
         </p:txBody>
       </p:sp>
@@ -7645,7 +7784,7 @@
           <a:noFill/>
         </p:spPr>
         <p:txBody>
-          <a:bodyPr wrap="square" lIns="45720" tIns="18288" rIns="45720" bIns="18288" anchor="t">
+          <a:bodyPr wrap="square" anchor="t" lIns="45720" rIns="45720" tIns="18288" bIns="18288">
             <a:spAutoFit/>
           </a:bodyPr>
           <a:lstStyle/>
@@ -7687,7 +7826,7 @@
           <a:noFill/>
         </p:spPr>
         <p:txBody>
-          <a:bodyPr wrap="square" lIns="45720" tIns="18288" rIns="45720" bIns="18288" anchor="t">
+          <a:bodyPr wrap="square" anchor="t" lIns="45720" rIns="45720" tIns="18288" bIns="18288">
             <a:spAutoFit/>
           </a:bodyPr>
           <a:lstStyle/>
@@ -7753,7 +7892,6 @@
           <a:lstStyle/>
           <a:p>
             <a:pPr algn="ctr"/>
-            <a:endParaRPr/>
           </a:p>
         </p:txBody>
       </p:sp>
@@ -7798,7 +7936,6 @@
           <a:lstStyle/>
           <a:p>
             <a:pPr algn="ctr"/>
-            <a:endParaRPr/>
           </a:p>
         </p:txBody>
       </p:sp>
@@ -7819,7 +7956,7 @@
           <a:noFill/>
         </p:spPr>
         <p:txBody>
-          <a:bodyPr wrap="square" lIns="45720" tIns="18288" rIns="45720" bIns="18288" anchor="t">
+          <a:bodyPr wrap="square" anchor="t" lIns="45720" rIns="45720" tIns="18288" bIns="18288">
             <a:spAutoFit/>
           </a:bodyPr>
           <a:lstStyle/>
@@ -7861,7 +7998,7 @@
           <a:noFill/>
         </p:spPr>
         <p:txBody>
-          <a:bodyPr wrap="square" lIns="45720" tIns="18288" rIns="45720" bIns="18288" anchor="t">
+          <a:bodyPr wrap="square" anchor="t" lIns="45720" rIns="45720" tIns="18288" bIns="18288">
             <a:spAutoFit/>
           </a:bodyPr>
           <a:lstStyle/>
@@ -7927,7 +8064,6 @@
           <a:lstStyle/>
           <a:p>
             <a:pPr algn="ctr"/>
-            <a:endParaRPr/>
           </a:p>
         </p:txBody>
       </p:sp>
@@ -7948,7 +8084,7 @@
           <a:noFill/>
         </p:spPr>
         <p:txBody>
-          <a:bodyPr wrap="square" lIns="45720" tIns="18288" rIns="45720" bIns="18288" anchor="t">
+          <a:bodyPr wrap="square" anchor="t" lIns="45720" rIns="45720" tIns="18288" bIns="18288">
             <a:spAutoFit/>
           </a:bodyPr>
           <a:lstStyle/>
@@ -7990,7 +8126,7 @@
           <a:noFill/>
         </p:spPr>
         <p:txBody>
-          <a:bodyPr wrap="square" lIns="45720" tIns="18288" rIns="45720" bIns="18288" anchor="t">
+          <a:bodyPr wrap="square" anchor="t" lIns="45720" rIns="45720" tIns="18288" bIns="18288">
             <a:spAutoFit/>
           </a:bodyPr>
           <a:lstStyle/>
@@ -8092,7 +8228,6 @@
           <a:lstStyle/>
           <a:p>
             <a:pPr algn="ctr"/>
-            <a:endParaRPr/>
           </a:p>
         </p:txBody>
       </p:sp>
@@ -8113,7 +8248,7 @@
           <a:noFill/>
         </p:spPr>
         <p:txBody>
-          <a:bodyPr wrap="square" lIns="45720" tIns="18288" rIns="45720" bIns="18288" anchor="t">
+          <a:bodyPr wrap="square" anchor="t" lIns="45720" rIns="45720" tIns="18288" bIns="18288">
             <a:spAutoFit/>
           </a:bodyPr>
           <a:lstStyle/>
@@ -8155,7 +8290,7 @@
           <a:noFill/>
         </p:spPr>
         <p:txBody>
-          <a:bodyPr wrap="square" lIns="45720" tIns="18288" rIns="45720" bIns="18288" anchor="t">
+          <a:bodyPr wrap="square" anchor="t" lIns="45720" rIns="45720" tIns="18288" bIns="18288">
             <a:spAutoFit/>
           </a:bodyPr>
           <a:lstStyle/>
@@ -8257,7 +8392,6 @@
           <a:lstStyle/>
           <a:p>
             <a:pPr algn="ctr"/>
-            <a:endParaRPr/>
           </a:p>
         </p:txBody>
       </p:sp>
@@ -8278,7 +8412,7 @@
           <a:noFill/>
         </p:spPr>
         <p:txBody>
-          <a:bodyPr wrap="square" lIns="45720" tIns="18288" rIns="45720" bIns="18288" anchor="t">
+          <a:bodyPr wrap="square" anchor="t" lIns="45720" rIns="45720" tIns="18288" bIns="18288">
             <a:spAutoFit/>
           </a:bodyPr>
           <a:lstStyle/>
@@ -8320,7 +8454,7 @@
           <a:noFill/>
         </p:spPr>
         <p:txBody>
-          <a:bodyPr wrap="square" lIns="45720" tIns="18288" rIns="45720" bIns="18288" anchor="t">
+          <a:bodyPr wrap="square" anchor="t" lIns="45720" rIns="45720" tIns="18288" bIns="18288">
             <a:spAutoFit/>
           </a:bodyPr>
           <a:lstStyle/>
@@ -8422,7 +8556,6 @@
           <a:lstStyle/>
           <a:p>
             <a:pPr algn="ctr"/>
-            <a:endParaRPr/>
           </a:p>
         </p:txBody>
       </p:sp>
@@ -8443,7 +8576,7 @@
           <a:noFill/>
         </p:spPr>
         <p:txBody>
-          <a:bodyPr wrap="square" lIns="45720" tIns="18288" rIns="45720" bIns="18288" anchor="t">
+          <a:bodyPr wrap="square" anchor="t" lIns="45720" rIns="45720" tIns="18288" bIns="18288">
             <a:spAutoFit/>
           </a:bodyPr>
           <a:lstStyle/>
@@ -8485,7 +8618,7 @@
           <a:noFill/>
         </p:spPr>
         <p:txBody>
-          <a:bodyPr wrap="square" lIns="45720" tIns="18288" rIns="45720" bIns="18288" anchor="t">
+          <a:bodyPr wrap="square" anchor="t" lIns="45720" rIns="45720" tIns="18288" bIns="18288">
             <a:spAutoFit/>
           </a:bodyPr>
           <a:lstStyle/>
@@ -8527,7 +8660,7 @@
           <a:noFill/>
         </p:spPr>
         <p:txBody>
-          <a:bodyPr wrap="square" lIns="45720" tIns="18288" rIns="45720" bIns="18288" anchor="t">
+          <a:bodyPr wrap="square" anchor="t" lIns="45720" rIns="45720" tIns="18288" bIns="18288">
             <a:spAutoFit/>
           </a:bodyPr>
           <a:lstStyle/>
@@ -8593,7 +8726,6 @@
           <a:lstStyle/>
           <a:p>
             <a:pPr algn="ctr"/>
-            <a:endParaRPr/>
           </a:p>
         </p:txBody>
       </p:sp>
@@ -8614,7 +8746,7 @@
           <a:noFill/>
         </p:spPr>
         <p:txBody>
-          <a:bodyPr wrap="square" lIns="45720" tIns="18288" rIns="45720" bIns="18288" anchor="t">
+          <a:bodyPr wrap="square" anchor="t" lIns="45720" rIns="45720" tIns="18288" bIns="18288">
             <a:spAutoFit/>
           </a:bodyPr>
           <a:lstStyle/>
@@ -8680,7 +8812,6 @@
           <a:lstStyle/>
           <a:p>
             <a:pPr algn="ctr"/>
-            <a:endParaRPr/>
           </a:p>
         </p:txBody>
       </p:sp>
@@ -8701,7 +8832,7 @@
           <a:noFill/>
         </p:spPr>
         <p:txBody>
-          <a:bodyPr wrap="square" lIns="45720" tIns="18288" rIns="45720" bIns="18288" anchor="t">
+          <a:bodyPr wrap="square" anchor="t" lIns="45720" rIns="45720" tIns="18288" bIns="18288">
             <a:spAutoFit/>
           </a:bodyPr>
           <a:lstStyle/>
@@ -8767,7 +8898,6 @@
           <a:lstStyle/>
           <a:p>
             <a:pPr algn="ctr"/>
-            <a:endParaRPr/>
           </a:p>
         </p:txBody>
       </p:sp>
@@ -8788,7 +8918,7 @@
           <a:noFill/>
         </p:spPr>
         <p:txBody>
-          <a:bodyPr wrap="square" lIns="45720" tIns="18288" rIns="45720" bIns="18288" anchor="t">
+          <a:bodyPr wrap="square" anchor="t" lIns="45720" rIns="45720" tIns="18288" bIns="18288">
             <a:spAutoFit/>
           </a:bodyPr>
           <a:lstStyle/>
@@ -8854,7 +8984,6 @@
           <a:lstStyle/>
           <a:p>
             <a:pPr algn="ctr"/>
-            <a:endParaRPr/>
           </a:p>
         </p:txBody>
       </p:sp>
@@ -8875,7 +9004,7 @@
           <a:noFill/>
         </p:spPr>
         <p:txBody>
-          <a:bodyPr wrap="square" lIns="45720" tIns="18288" rIns="45720" bIns="18288" anchor="t">
+          <a:bodyPr wrap="square" anchor="t" lIns="45720" rIns="45720" tIns="18288" bIns="18288">
             <a:spAutoFit/>
           </a:bodyPr>
           <a:lstStyle/>
@@ -8941,7 +9070,6 @@
           <a:lstStyle/>
           <a:p>
             <a:pPr algn="ctr"/>
-            <a:endParaRPr/>
           </a:p>
         </p:txBody>
       </p:sp>
@@ -8962,7 +9090,7 @@
           <a:noFill/>
         </p:spPr>
         <p:txBody>
-          <a:bodyPr wrap="square" lIns="45720" tIns="18288" rIns="45720" bIns="18288" anchor="t">
+          <a:bodyPr wrap="square" anchor="t" lIns="45720" rIns="45720" tIns="18288" bIns="18288">
             <a:spAutoFit/>
           </a:bodyPr>
           <a:lstStyle/>
@@ -9028,7 +9156,6 @@
           <a:lstStyle/>
           <a:p>
             <a:pPr algn="ctr"/>
-            <a:endParaRPr/>
           </a:p>
         </p:txBody>
       </p:sp>
@@ -9049,7 +9176,7 @@
           <a:noFill/>
         </p:spPr>
         <p:txBody>
-          <a:bodyPr wrap="square" lIns="45720" tIns="18288" rIns="45720" bIns="18288" anchor="t">
+          <a:bodyPr wrap="square" anchor="t" lIns="45720" rIns="45720" tIns="18288" bIns="18288">
             <a:spAutoFit/>
           </a:bodyPr>
           <a:lstStyle/>
@@ -9115,7 +9242,6 @@
           <a:lstStyle/>
           <a:p>
             <a:pPr algn="ctr"/>
-            <a:endParaRPr/>
           </a:p>
         </p:txBody>
       </p:sp>
@@ -9136,7 +9262,7 @@
           <a:noFill/>
         </p:spPr>
         <p:txBody>
-          <a:bodyPr wrap="square" lIns="45720" tIns="18288" rIns="45720" bIns="18288" anchor="t">
+          <a:bodyPr wrap="square" anchor="t" lIns="45720" rIns="45720" tIns="18288" bIns="18288">
             <a:spAutoFit/>
           </a:bodyPr>
           <a:lstStyle/>
@@ -9170,7 +9296,7 @@
 </file>
 
 <file path=ppt/slides/slide5.xml><?xml version="1.0" encoding="utf-8"?>
-<p:sld xmlns:a="http://schemas.openxmlformats.org/drawingml/2006/main" xmlns:r="http://schemas.openxmlformats.org/officeDocument/2006/relationships" xmlns:p="http://schemas.openxmlformats.org/presentationml/2006/main">
+<p:sld xmlns:a="http://schemas.openxmlformats.org/drawingml/2006/main" xmlns:p="http://schemas.openxmlformats.org/presentationml/2006/main" xmlns:r="http://schemas.openxmlformats.org/officeDocument/2006/relationships">
   <p:cSld>
     <p:bg>
       <p:bgPr>
@@ -9186,14 +9312,7 @@
         <p:cNvGrpSpPr/>
         <p:nvPr/>
       </p:nvGrpSpPr>
-      <p:grpSpPr>
-        <a:xfrm>
-          <a:off x="0" y="0"/>
-          <a:ext cx="0" cy="0"/>
-          <a:chOff x="0" y="0"/>
-          <a:chExt cx="0" cy="0"/>
-        </a:xfrm>
-      </p:grpSpPr>
+      <p:grpSpPr/>
       <p:sp>
         <p:nvSpPr>
           <p:cNvPr id="2" name="Rectangle 1"/>
@@ -9235,7 +9354,6 @@
           <a:lstStyle/>
           <a:p>
             <a:pPr algn="ctr"/>
-            <a:endParaRPr/>
           </a:p>
         </p:txBody>
       </p:sp>
@@ -9256,7 +9374,7 @@
           <a:noFill/>
         </p:spPr>
         <p:txBody>
-          <a:bodyPr wrap="square" lIns="45720" tIns="18288" rIns="45720" bIns="18288" anchor="t">
+          <a:bodyPr wrap="square" anchor="t" lIns="45720" rIns="45720" tIns="18288" bIns="18288">
             <a:spAutoFit/>
           </a:bodyPr>
           <a:lstStyle/>
@@ -9298,7 +9416,7 @@
           <a:noFill/>
         </p:spPr>
         <p:txBody>
-          <a:bodyPr wrap="square" lIns="45720" tIns="18288" rIns="45720" bIns="18288" anchor="t">
+          <a:bodyPr wrap="square" anchor="t" lIns="45720" rIns="45720" tIns="18288" bIns="18288">
             <a:spAutoFit/>
           </a:bodyPr>
           <a:lstStyle/>
@@ -9364,7 +9482,6 @@
           <a:lstStyle/>
           <a:p>
             <a:pPr algn="ctr"/>
-            <a:endParaRPr/>
           </a:p>
         </p:txBody>
       </p:sp>
@@ -9409,7 +9526,6 @@
           <a:lstStyle/>
           <a:p>
             <a:pPr algn="ctr"/>
-            <a:endParaRPr/>
           </a:p>
         </p:txBody>
       </p:sp>
@@ -9430,7 +9546,7 @@
           <a:noFill/>
         </p:spPr>
         <p:txBody>
-          <a:bodyPr wrap="square" lIns="45720" tIns="18288" rIns="45720" bIns="18288" anchor="t">
+          <a:bodyPr wrap="square" anchor="t" lIns="45720" rIns="45720" tIns="18288" bIns="18288">
             <a:spAutoFit/>
           </a:bodyPr>
           <a:lstStyle/>
@@ -9472,7 +9588,7 @@
           <a:noFill/>
         </p:spPr>
         <p:txBody>
-          <a:bodyPr wrap="square" lIns="45720" tIns="18288" rIns="45720" bIns="18288" anchor="t">
+          <a:bodyPr wrap="square" anchor="t" lIns="45720" rIns="45720" tIns="18288" bIns="18288">
             <a:spAutoFit/>
           </a:bodyPr>
           <a:lstStyle/>
@@ -9754,7 +9870,6 @@
           <a:lstStyle/>
           <a:p>
             <a:pPr algn="ctr"/>
-            <a:endParaRPr/>
           </a:p>
         </p:txBody>
       </p:sp>
@@ -9775,7 +9890,7 @@
           <a:noFill/>
         </p:spPr>
         <p:txBody>
-          <a:bodyPr wrap="square" lIns="45720" tIns="18288" rIns="45720" bIns="18288" anchor="ctr">
+          <a:bodyPr wrap="square" anchor="ctr" lIns="45720" rIns="45720" tIns="18288" bIns="18288">
             <a:spAutoFit/>
           </a:bodyPr>
           <a:lstStyle/>
@@ -9841,7 +9956,6 @@
           <a:lstStyle/>
           <a:p>
             <a:pPr algn="ctr"/>
-            <a:endParaRPr/>
           </a:p>
         </p:txBody>
       </p:sp>
@@ -9862,7 +9976,7 @@
           <a:noFill/>
         </p:spPr>
         <p:txBody>
-          <a:bodyPr wrap="square" lIns="45720" tIns="18288" rIns="45720" bIns="18288" anchor="ctr">
+          <a:bodyPr wrap="square" anchor="ctr" lIns="45720" rIns="45720" tIns="18288" bIns="18288">
             <a:spAutoFit/>
           </a:bodyPr>
           <a:lstStyle/>
@@ -9928,7 +10042,6 @@
           <a:lstStyle/>
           <a:p>
             <a:pPr algn="ctr"/>
-            <a:endParaRPr/>
           </a:p>
         </p:txBody>
       </p:sp>
@@ -9949,7 +10062,7 @@
           <a:noFill/>
         </p:spPr>
         <p:txBody>
-          <a:bodyPr wrap="square" lIns="45720" tIns="18288" rIns="45720" bIns="18288" anchor="ctr">
+          <a:bodyPr wrap="square" anchor="ctr" lIns="45720" rIns="45720" tIns="18288" bIns="18288">
             <a:spAutoFit/>
           </a:bodyPr>
           <a:lstStyle/>
@@ -10015,7 +10128,6 @@
           <a:lstStyle/>
           <a:p>
             <a:pPr algn="ctr"/>
-            <a:endParaRPr/>
           </a:p>
         </p:txBody>
       </p:sp>
@@ -10036,7 +10148,7 @@
           <a:noFill/>
         </p:spPr>
         <p:txBody>
-          <a:bodyPr wrap="square" lIns="45720" tIns="18288" rIns="45720" bIns="18288" anchor="ctr">
+          <a:bodyPr wrap="square" anchor="ctr" lIns="45720" rIns="45720" tIns="18288" bIns="18288">
             <a:spAutoFit/>
           </a:bodyPr>
           <a:lstStyle/>
@@ -10102,7 +10214,6 @@
           <a:lstStyle/>
           <a:p>
             <a:pPr algn="ctr"/>
-            <a:endParaRPr/>
           </a:p>
         </p:txBody>
       </p:sp>
@@ -10123,7 +10234,7 @@
           <a:noFill/>
         </p:spPr>
         <p:txBody>
-          <a:bodyPr wrap="square" lIns="45720" tIns="18288" rIns="45720" bIns="18288" anchor="ctr">
+          <a:bodyPr wrap="square" anchor="ctr" lIns="45720" rIns="45720" tIns="18288" bIns="18288">
             <a:spAutoFit/>
           </a:bodyPr>
           <a:lstStyle/>
@@ -10189,7 +10300,6 @@
           <a:lstStyle/>
           <a:p>
             <a:pPr algn="ctr"/>
-            <a:endParaRPr/>
           </a:p>
         </p:txBody>
       </p:sp>
@@ -10210,7 +10320,7 @@
           <a:noFill/>
         </p:spPr>
         <p:txBody>
-          <a:bodyPr wrap="square" lIns="45720" tIns="18288" rIns="45720" bIns="18288" anchor="ctr">
+          <a:bodyPr wrap="square" anchor="ctr" lIns="45720" rIns="45720" tIns="18288" bIns="18288">
             <a:spAutoFit/>
           </a:bodyPr>
           <a:lstStyle/>
@@ -10252,7 +10362,7 @@
           <a:noFill/>
         </p:spPr>
         <p:txBody>
-          <a:bodyPr wrap="square" lIns="45720" tIns="18288" rIns="45720" bIns="18288" anchor="ctr">
+          <a:bodyPr wrap="square" anchor="ctr" lIns="45720" rIns="45720" tIns="18288" bIns="18288">
             <a:spAutoFit/>
           </a:bodyPr>
           <a:lstStyle/>
@@ -10313,7 +10423,7 @@
           <a:noFill/>
         </p:spPr>
         <p:txBody>
-          <a:bodyPr wrap="square" lIns="45720" tIns="18288" rIns="45720" bIns="18288" anchor="t">
+          <a:bodyPr wrap="square" anchor="t" lIns="45720" rIns="45720" tIns="18288" bIns="18288">
             <a:spAutoFit/>
           </a:bodyPr>
           <a:lstStyle/>
@@ -10355,7 +10465,7 @@
           <a:noFill/>
         </p:spPr>
         <p:txBody>
-          <a:bodyPr wrap="square" lIns="45720" tIns="18288" rIns="45720" bIns="18288" anchor="t">
+          <a:bodyPr wrap="square" anchor="t" lIns="45720" rIns="45720" tIns="18288" bIns="18288">
             <a:spAutoFit/>
           </a:bodyPr>
           <a:lstStyle/>
@@ -10397,7 +10507,7 @@
           <a:noFill/>
         </p:spPr>
         <p:txBody>
-          <a:bodyPr wrap="square" lIns="45720" tIns="18288" rIns="45720" bIns="18288" anchor="t">
+          <a:bodyPr wrap="square" anchor="t" lIns="45720" rIns="45720" tIns="18288" bIns="18288">
             <a:spAutoFit/>
           </a:bodyPr>
           <a:lstStyle/>
@@ -10439,7 +10549,7 @@
           <a:noFill/>
         </p:spPr>
         <p:txBody>
-          <a:bodyPr wrap="square" lIns="45720" tIns="18288" rIns="45720" bIns="18288" anchor="t">
+          <a:bodyPr wrap="square" anchor="t" lIns="45720" rIns="45720" tIns="18288" bIns="18288">
             <a:spAutoFit/>
           </a:bodyPr>
           <a:lstStyle/>
@@ -10481,7 +10591,7 @@
           <a:noFill/>
         </p:spPr>
         <p:txBody>
-          <a:bodyPr wrap="square" lIns="45720" tIns="18288" rIns="45720" bIns="18288" anchor="t">
+          <a:bodyPr wrap="square" anchor="t" lIns="45720" rIns="45720" tIns="18288" bIns="18288">
             <a:spAutoFit/>
           </a:bodyPr>
           <a:lstStyle/>
@@ -10547,7 +10657,6 @@
           <a:lstStyle/>
           <a:p>
             <a:pPr algn="ctr"/>
-            <a:endParaRPr/>
           </a:p>
         </p:txBody>
       </p:sp>
@@ -10568,7 +10677,7 @@
           <a:noFill/>
         </p:spPr>
         <p:txBody>
-          <a:bodyPr wrap="square" lIns="45720" tIns="18288" rIns="45720" bIns="18288" anchor="t">
+          <a:bodyPr wrap="square" anchor="t" lIns="45720" rIns="45720" tIns="18288" bIns="18288">
             <a:spAutoFit/>
           </a:bodyPr>
           <a:lstStyle/>
@@ -10636,7 +10745,6 @@
           <a:lstStyle/>
           <a:p>
             <a:pPr algn="ctr"/>
-            <a:endParaRPr/>
           </a:p>
         </p:txBody>
       </p:sp>
@@ -10681,7 +10789,6 @@
           <a:lstStyle/>
           <a:p>
             <a:pPr algn="ctr"/>
-            <a:endParaRPr/>
           </a:p>
         </p:txBody>
       </p:sp>
@@ -10726,7 +10833,6 @@
           <a:lstStyle/>
           <a:p>
             <a:pPr algn="ctr"/>
-            <a:endParaRPr/>
           </a:p>
         </p:txBody>
       </p:sp>
@@ -10747,7 +10853,7 @@
           <a:noFill/>
         </p:spPr>
         <p:txBody>
-          <a:bodyPr wrap="square" lIns="45720" tIns="18288" rIns="45720" bIns="18288" anchor="t">
+          <a:bodyPr wrap="square" anchor="t" lIns="45720" rIns="45720" tIns="18288" bIns="18288">
             <a:spAutoFit/>
           </a:bodyPr>
           <a:lstStyle/>
@@ -10789,7 +10895,7 @@
           <a:noFill/>
         </p:spPr>
         <p:txBody>
-          <a:bodyPr wrap="square" lIns="45720" tIns="18288" rIns="45720" bIns="18288" anchor="t">
+          <a:bodyPr wrap="square" anchor="t" lIns="45720" rIns="45720" tIns="18288" bIns="18288">
             <a:spAutoFit/>
           </a:bodyPr>
           <a:lstStyle/>
@@ -10855,7 +10961,6 @@
           <a:lstStyle/>
           <a:p>
             <a:pPr algn="ctr"/>
-            <a:endParaRPr/>
           </a:p>
         </p:txBody>
       </p:sp>
@@ -10876,7 +10981,7 @@
           <a:noFill/>
         </p:spPr>
         <p:txBody>
-          <a:bodyPr wrap="square" lIns="45720" tIns="18288" rIns="45720" bIns="18288" anchor="t">
+          <a:bodyPr wrap="square" anchor="t" lIns="45720" rIns="45720" tIns="18288" bIns="18288">
             <a:spAutoFit/>
           </a:bodyPr>
           <a:lstStyle/>
@@ -10944,7 +11049,6 @@
           <a:lstStyle/>
           <a:p>
             <a:pPr algn="ctr"/>
-            <a:endParaRPr/>
           </a:p>
         </p:txBody>
       </p:sp>
@@ -10991,7 +11095,6 @@
           <a:lstStyle/>
           <a:p>
             <a:pPr algn="ctr"/>
-            <a:endParaRPr/>
           </a:p>
         </p:txBody>
       </p:sp>
@@ -11036,7 +11139,6 @@
           <a:lstStyle/>
           <a:p>
             <a:pPr algn="ctr"/>
-            <a:endParaRPr/>
           </a:p>
         </p:txBody>
       </p:sp>
@@ -11057,7 +11159,7 @@
           <a:noFill/>
         </p:spPr>
         <p:txBody>
-          <a:bodyPr wrap="square" lIns="45720" tIns="18288" rIns="45720" bIns="18288" anchor="t">
+          <a:bodyPr wrap="square" anchor="t" lIns="45720" rIns="45720" tIns="18288" bIns="18288">
             <a:spAutoFit/>
           </a:bodyPr>
           <a:lstStyle/>
@@ -11099,7 +11201,7 @@
           <a:noFill/>
         </p:spPr>
         <p:txBody>
-          <a:bodyPr wrap="square" lIns="45720" tIns="18288" rIns="45720" bIns="18288" anchor="t">
+          <a:bodyPr wrap="square" anchor="t" lIns="45720" rIns="45720" tIns="18288" bIns="18288">
             <a:spAutoFit/>
           </a:bodyPr>
           <a:lstStyle/>
@@ -11165,7 +11267,6 @@
           <a:lstStyle/>
           <a:p>
             <a:pPr algn="ctr"/>
-            <a:endParaRPr/>
           </a:p>
         </p:txBody>
       </p:sp>
@@ -11186,7 +11287,7 @@
           <a:noFill/>
         </p:spPr>
         <p:txBody>
-          <a:bodyPr wrap="square" lIns="45720" tIns="18288" rIns="45720" bIns="18288" anchor="t">
+          <a:bodyPr wrap="square" anchor="t" lIns="45720" rIns="45720" tIns="18288" bIns="18288">
             <a:spAutoFit/>
           </a:bodyPr>
           <a:lstStyle/>
@@ -11254,7 +11355,6 @@
           <a:lstStyle/>
           <a:p>
             <a:pPr algn="ctr"/>
-            <a:endParaRPr/>
           </a:p>
         </p:txBody>
       </p:sp>
@@ -11301,7 +11401,6 @@
           <a:lstStyle/>
           <a:p>
             <a:pPr algn="ctr"/>
-            <a:endParaRPr/>
           </a:p>
         </p:txBody>
       </p:sp>
@@ -11346,7 +11445,6 @@
           <a:lstStyle/>
           <a:p>
             <a:pPr algn="ctr"/>
-            <a:endParaRPr/>
           </a:p>
         </p:txBody>
       </p:sp>
@@ -11367,7 +11465,7 @@
           <a:noFill/>
         </p:spPr>
         <p:txBody>
-          <a:bodyPr wrap="square" lIns="45720" tIns="18288" rIns="45720" bIns="18288" anchor="t">
+          <a:bodyPr wrap="square" anchor="t" lIns="45720" rIns="45720" tIns="18288" bIns="18288">
             <a:spAutoFit/>
           </a:bodyPr>
           <a:lstStyle/>
@@ -11409,7 +11507,7 @@
           <a:noFill/>
         </p:spPr>
         <p:txBody>
-          <a:bodyPr wrap="square" lIns="45720" tIns="18288" rIns="45720" bIns="18288" anchor="t">
+          <a:bodyPr wrap="square" anchor="t" lIns="45720" rIns="45720" tIns="18288" bIns="18288">
             <a:spAutoFit/>
           </a:bodyPr>
           <a:lstStyle/>
@@ -11475,7 +11573,6 @@
           <a:lstStyle/>
           <a:p>
             <a:pPr algn="ctr"/>
-            <a:endParaRPr/>
           </a:p>
         </p:txBody>
       </p:sp>
@@ -11496,7 +11593,7 @@
           <a:noFill/>
         </p:spPr>
         <p:txBody>
-          <a:bodyPr wrap="square" lIns="45720" tIns="18288" rIns="45720" bIns="18288" anchor="t">
+          <a:bodyPr wrap="square" anchor="t" lIns="45720" rIns="45720" tIns="18288" bIns="18288">
             <a:spAutoFit/>
           </a:bodyPr>
           <a:lstStyle/>
@@ -11564,7 +11661,6 @@
           <a:lstStyle/>
           <a:p>
             <a:pPr algn="ctr"/>
-            <a:endParaRPr/>
           </a:p>
         </p:txBody>
       </p:sp>
@@ -11611,7 +11707,6 @@
           <a:lstStyle/>
           <a:p>
             <a:pPr algn="ctr"/>
-            <a:endParaRPr/>
           </a:p>
         </p:txBody>
       </p:sp>
@@ -11658,7 +11753,6 @@
           <a:lstStyle/>
           <a:p>
             <a:pPr algn="ctr"/>
-            <a:endParaRPr/>
           </a:p>
         </p:txBody>
       </p:sp>
@@ -11679,7 +11773,7 @@
           <a:noFill/>
         </p:spPr>
         <p:txBody>
-          <a:bodyPr wrap="square" lIns="45720" tIns="18288" rIns="45720" bIns="18288" anchor="t">
+          <a:bodyPr wrap="square" anchor="t" lIns="45720" rIns="45720" tIns="18288" bIns="18288">
             <a:spAutoFit/>
           </a:bodyPr>
           <a:lstStyle/>
@@ -11721,7 +11815,7 @@
           <a:noFill/>
         </p:spPr>
         <p:txBody>
-          <a:bodyPr wrap="square" lIns="45720" tIns="18288" rIns="45720" bIns="18288" anchor="t">
+          <a:bodyPr wrap="square" anchor="t" lIns="45720" rIns="45720" tIns="18288" bIns="18288">
             <a:spAutoFit/>
           </a:bodyPr>
           <a:lstStyle/>
@@ -11787,7 +11881,6 @@
           <a:lstStyle/>
           <a:p>
             <a:pPr algn="ctr"/>
-            <a:endParaRPr/>
           </a:p>
         </p:txBody>
       </p:sp>
@@ -11808,7 +11901,7 @@
           <a:noFill/>
         </p:spPr>
         <p:txBody>
-          <a:bodyPr wrap="square" lIns="45720" tIns="18288" rIns="45720" bIns="18288" anchor="t">
+          <a:bodyPr wrap="square" anchor="t" lIns="45720" rIns="45720" tIns="18288" bIns="18288">
             <a:spAutoFit/>
           </a:bodyPr>
           <a:lstStyle/>
@@ -11876,7 +11969,6 @@
           <a:lstStyle/>
           <a:p>
             <a:pPr algn="ctr"/>
-            <a:endParaRPr/>
           </a:p>
         </p:txBody>
       </p:sp>
@@ -11923,7 +12015,6 @@
           <a:lstStyle/>
           <a:p>
             <a:pPr algn="ctr"/>
-            <a:endParaRPr/>
           </a:p>
         </p:txBody>
       </p:sp>
@@ -11970,7 +12061,6 @@
           <a:lstStyle/>
           <a:p>
             <a:pPr algn="ctr"/>
-            <a:endParaRPr/>
           </a:p>
         </p:txBody>
       </p:sp>
@@ -11991,7 +12081,7 @@
           <a:noFill/>
         </p:spPr>
         <p:txBody>
-          <a:bodyPr wrap="square" lIns="45720" tIns="18288" rIns="45720" bIns="18288" anchor="t">
+          <a:bodyPr wrap="square" anchor="t" lIns="45720" rIns="45720" tIns="18288" bIns="18288">
             <a:spAutoFit/>
           </a:bodyPr>
           <a:lstStyle/>
@@ -12033,7 +12123,7 @@
           <a:noFill/>
         </p:spPr>
         <p:txBody>
-          <a:bodyPr wrap="square" lIns="45720" tIns="18288" rIns="45720" bIns="18288" anchor="t">
+          <a:bodyPr wrap="square" anchor="t" lIns="45720" rIns="45720" tIns="18288" bIns="18288">
             <a:spAutoFit/>
           </a:bodyPr>
           <a:lstStyle/>
@@ -12099,7 +12189,6 @@
           <a:lstStyle/>
           <a:p>
             <a:pPr algn="ctr"/>
-            <a:endParaRPr/>
           </a:p>
         </p:txBody>
       </p:sp>
@@ -12120,7 +12209,7 @@
           <a:noFill/>
         </p:spPr>
         <p:txBody>
-          <a:bodyPr wrap="square" lIns="45720" tIns="18288" rIns="45720" bIns="18288" anchor="t">
+          <a:bodyPr wrap="square" anchor="t" lIns="45720" rIns="45720" tIns="18288" bIns="18288">
             <a:spAutoFit/>
           </a:bodyPr>
           <a:lstStyle/>
@@ -12188,7 +12277,6 @@
           <a:lstStyle/>
           <a:p>
             <a:pPr algn="ctr"/>
-            <a:endParaRPr/>
           </a:p>
         </p:txBody>
       </p:sp>
@@ -12235,7 +12323,6 @@
           <a:lstStyle/>
           <a:p>
             <a:pPr algn="ctr"/>
-            <a:endParaRPr/>
           </a:p>
         </p:txBody>
       </p:sp>
@@ -12280,7 +12367,6 @@
           <a:lstStyle/>
           <a:p>
             <a:pPr algn="ctr"/>
-            <a:endParaRPr/>
           </a:p>
         </p:txBody>
       </p:sp>
@@ -12301,7 +12387,7 @@
           <a:noFill/>
         </p:spPr>
         <p:txBody>
-          <a:bodyPr wrap="square" lIns="45720" tIns="18288" rIns="45720" bIns="18288" anchor="t">
+          <a:bodyPr wrap="square" anchor="t" lIns="45720" rIns="45720" tIns="18288" bIns="18288">
             <a:spAutoFit/>
           </a:bodyPr>
           <a:lstStyle/>
@@ -12343,7 +12429,7 @@
           <a:noFill/>
         </p:spPr>
         <p:txBody>
-          <a:bodyPr wrap="square" lIns="45720" tIns="18288" rIns="45720" bIns="18288" anchor="t">
+          <a:bodyPr wrap="square" anchor="t" lIns="45720" rIns="45720" tIns="18288" bIns="18288">
             <a:spAutoFit/>
           </a:bodyPr>
           <a:lstStyle/>
@@ -12409,7 +12495,6 @@
           <a:lstStyle/>
           <a:p>
             <a:pPr algn="ctr"/>
-            <a:endParaRPr/>
           </a:p>
         </p:txBody>
       </p:sp>
@@ -12430,7 +12515,7 @@
           <a:noFill/>
         </p:spPr>
         <p:txBody>
-          <a:bodyPr wrap="square" lIns="45720" tIns="18288" rIns="45720" bIns="18288" anchor="t">
+          <a:bodyPr wrap="square" anchor="t" lIns="45720" rIns="45720" tIns="18288" bIns="18288">
             <a:spAutoFit/>
           </a:bodyPr>
           <a:lstStyle/>
@@ -12464,7 +12549,7 @@
 </file>
 
 <file path=ppt/slides/slide6.xml><?xml version="1.0" encoding="utf-8"?>
-<p:sld xmlns:a="http://schemas.openxmlformats.org/drawingml/2006/main" xmlns:r="http://schemas.openxmlformats.org/officeDocument/2006/relationships" xmlns:p="http://schemas.openxmlformats.org/presentationml/2006/main">
+<p:sld xmlns:a="http://schemas.openxmlformats.org/drawingml/2006/main" xmlns:p="http://schemas.openxmlformats.org/presentationml/2006/main" xmlns:r="http://schemas.openxmlformats.org/officeDocument/2006/relationships">
   <p:cSld>
     <p:bg>
       <p:bgPr>
@@ -12480,14 +12565,7 @@
         <p:cNvGrpSpPr/>
         <p:nvPr/>
       </p:nvGrpSpPr>
-      <p:grpSpPr>
-        <a:xfrm>
-          <a:off x="0" y="0"/>
-          <a:ext cx="0" cy="0"/>
-          <a:chOff x="0" y="0"/>
-          <a:chExt cx="0" cy="0"/>
-        </a:xfrm>
-      </p:grpSpPr>
+      <p:grpSpPr/>
       <p:sp>
         <p:nvSpPr>
           <p:cNvPr id="2" name="Rectangle 1"/>
@@ -12529,7 +12607,6 @@
           <a:lstStyle/>
           <a:p>
             <a:pPr algn="ctr"/>
-            <a:endParaRPr/>
           </a:p>
         </p:txBody>
       </p:sp>
@@ -12550,7 +12627,7 @@
           <a:noFill/>
         </p:spPr>
         <p:txBody>
-          <a:bodyPr wrap="square" lIns="45720" tIns="18288" rIns="45720" bIns="18288" anchor="t">
+          <a:bodyPr wrap="square" anchor="t" lIns="45720" rIns="45720" tIns="18288" bIns="18288">
             <a:spAutoFit/>
           </a:bodyPr>
           <a:lstStyle/>
@@ -12592,7 +12669,7 @@
           <a:noFill/>
         </p:spPr>
         <p:txBody>
-          <a:bodyPr wrap="square" lIns="45720" tIns="18288" rIns="45720" bIns="18288" anchor="t">
+          <a:bodyPr wrap="square" anchor="t" lIns="45720" rIns="45720" tIns="18288" bIns="18288">
             <a:spAutoFit/>
           </a:bodyPr>
           <a:lstStyle/>
@@ -12658,7 +12735,6 @@
           <a:lstStyle/>
           <a:p>
             <a:pPr algn="ctr"/>
-            <a:endParaRPr/>
           </a:p>
         </p:txBody>
       </p:sp>
@@ -12703,7 +12779,6 @@
           <a:lstStyle/>
           <a:p>
             <a:pPr algn="ctr"/>
-            <a:endParaRPr/>
           </a:p>
         </p:txBody>
       </p:sp>
@@ -12724,7 +12799,7 @@
           <a:noFill/>
         </p:spPr>
         <p:txBody>
-          <a:bodyPr wrap="square" lIns="45720" tIns="18288" rIns="45720" bIns="18288" anchor="t">
+          <a:bodyPr wrap="square" anchor="t" lIns="45720" rIns="45720" tIns="18288" bIns="18288">
             <a:spAutoFit/>
           </a:bodyPr>
           <a:lstStyle/>
@@ -12766,7 +12841,7 @@
           <a:noFill/>
         </p:spPr>
         <p:txBody>
-          <a:bodyPr wrap="square" lIns="45720" tIns="18288" rIns="45720" bIns="18288" anchor="t">
+          <a:bodyPr wrap="square" anchor="t" lIns="45720" rIns="45720" tIns="18288" bIns="18288">
             <a:spAutoFit/>
           </a:bodyPr>
           <a:lstStyle/>
@@ -12832,7 +12907,6 @@
           <a:lstStyle/>
           <a:p>
             <a:pPr algn="ctr"/>
-            <a:endParaRPr/>
           </a:p>
         </p:txBody>
       </p:sp>
@@ -12853,7 +12927,7 @@
           <a:noFill/>
         </p:spPr>
         <p:txBody>
-          <a:bodyPr wrap="square" lIns="45720" tIns="18288" rIns="45720" bIns="18288" anchor="t">
+          <a:bodyPr wrap="square" anchor="t" lIns="45720" rIns="45720" tIns="18288" bIns="18288">
             <a:spAutoFit/>
           </a:bodyPr>
           <a:lstStyle/>
@@ -12895,7 +12969,7 @@
           <a:noFill/>
         </p:spPr>
         <p:txBody>
-          <a:bodyPr wrap="square" lIns="45720" tIns="18288" rIns="45720" bIns="18288" anchor="t">
+          <a:bodyPr wrap="square" anchor="t" lIns="45720" rIns="45720" tIns="18288" bIns="18288">
             <a:spAutoFit/>
           </a:bodyPr>
           <a:lstStyle/>
@@ -12961,7 +13035,6 @@
           <a:lstStyle/>
           <a:p>
             <a:pPr algn="ctr"/>
-            <a:endParaRPr/>
           </a:p>
         </p:txBody>
       </p:sp>
@@ -12982,7 +13055,7 @@
           <a:noFill/>
         </p:spPr>
         <p:txBody>
-          <a:bodyPr wrap="square" lIns="45720" tIns="18288" rIns="45720" bIns="18288" anchor="t">
+          <a:bodyPr wrap="square" anchor="t" lIns="45720" rIns="45720" tIns="18288" bIns="18288">
             <a:spAutoFit/>
           </a:bodyPr>
           <a:lstStyle/>
@@ -13002,7 +13075,7 @@
                 </a:solidFill>
                 <a:latin typeface="Segoe UI Semibold"/>
               </a:rPr>
-              <a:t>57</a:t>
+              <a:t>72</a:t>
             </a:r>
           </a:p>
         </p:txBody>
@@ -13024,7 +13097,7 @@
           <a:noFill/>
         </p:spPr>
         <p:txBody>
-          <a:bodyPr wrap="square" lIns="45720" tIns="18288" rIns="45720" bIns="18288" anchor="t">
+          <a:bodyPr wrap="square" anchor="t" lIns="45720" rIns="45720" tIns="18288" bIns="18288">
             <a:spAutoFit/>
           </a:bodyPr>
           <a:lstStyle/>
@@ -13090,7 +13163,6 @@
           <a:lstStyle/>
           <a:p>
             <a:pPr algn="ctr"/>
-            <a:endParaRPr/>
           </a:p>
         </p:txBody>
       </p:sp>
@@ -13111,7 +13183,7 @@
           <a:noFill/>
         </p:spPr>
         <p:txBody>
-          <a:bodyPr wrap="square" lIns="45720" tIns="18288" rIns="45720" bIns="18288" anchor="t">
+          <a:bodyPr wrap="square" anchor="t" lIns="45720" rIns="45720" tIns="18288" bIns="18288">
             <a:spAutoFit/>
           </a:bodyPr>
           <a:lstStyle/>
@@ -13153,7 +13225,7 @@
           <a:noFill/>
         </p:spPr>
         <p:txBody>
-          <a:bodyPr wrap="square" lIns="45720" tIns="18288" rIns="45720" bIns="18288" anchor="t">
+          <a:bodyPr wrap="square" anchor="t" lIns="45720" rIns="45720" tIns="18288" bIns="18288">
             <a:spAutoFit/>
           </a:bodyPr>
           <a:lstStyle/>
@@ -13219,7 +13291,6 @@
           <a:lstStyle/>
           <a:p>
             <a:pPr algn="ctr"/>
-            <a:endParaRPr/>
           </a:p>
         </p:txBody>
       </p:sp>
@@ -13240,7 +13311,7 @@
           <a:noFill/>
         </p:spPr>
         <p:txBody>
-          <a:bodyPr wrap="square" lIns="45720" tIns="18288" rIns="45720" bIns="18288" anchor="t">
+          <a:bodyPr wrap="square" anchor="t" lIns="45720" rIns="45720" tIns="18288" bIns="18288">
             <a:spAutoFit/>
           </a:bodyPr>
           <a:lstStyle/>
@@ -13260,7 +13331,7 @@
                 </a:solidFill>
                 <a:latin typeface="Segoe UI Semibold"/>
               </a:rPr>
-              <a:t>26</a:t>
+              <a:t>89</a:t>
             </a:r>
           </a:p>
         </p:txBody>
@@ -13282,7 +13353,7 @@
           <a:noFill/>
         </p:spPr>
         <p:txBody>
-          <a:bodyPr wrap="square" lIns="45720" tIns="18288" rIns="45720" bIns="18288" anchor="t">
+          <a:bodyPr wrap="square" anchor="t" lIns="45720" rIns="45720" tIns="18288" bIns="18288">
             <a:spAutoFit/>
           </a:bodyPr>
           <a:lstStyle/>
@@ -13324,7 +13395,7 @@
           <a:noFill/>
         </p:spPr>
         <p:txBody>
-          <a:bodyPr wrap="square" lIns="45720" tIns="18288" rIns="45720" bIns="18288" anchor="t">
+          <a:bodyPr wrap="square" anchor="t" lIns="45720" rIns="45720" tIns="18288" bIns="18288">
             <a:spAutoFit/>
           </a:bodyPr>
           <a:lstStyle/>
@@ -13358,7 +13429,7 @@
         <p:spPr>
           <a:xfrm>
             <a:off x="640080" y="4251960"/>
-            <a:ext cx="1162086" cy="502920"/>
+            <a:ext cx="5070925" cy="502920"/>
           </a:xfrm>
           <a:prstGeom prst="rect">
             <a:avLst/>
@@ -13390,7 +13461,6 @@
           <a:lstStyle/>
           <a:p>
             <a:pPr algn="ctr"/>
-            <a:endParaRPr/>
           </a:p>
         </p:txBody>
       </p:sp>
@@ -13403,15 +13473,15 @@
         <p:spPr>
           <a:xfrm>
             <a:off x="640080" y="4251960"/>
-            <a:ext cx="1162086" cy="502920"/>
-          </a:xfrm>
-          <a:prstGeom prst="rect">
-            <a:avLst/>
-          </a:prstGeom>
-          <a:noFill/>
-        </p:spPr>
-        <p:txBody>
-          <a:bodyPr wrap="square" lIns="45720" tIns="18288" rIns="45720" bIns="18288" anchor="ctr">
+            <a:ext cx="5070925" cy="502920"/>
+          </a:xfrm>
+          <a:prstGeom prst="rect">
+            <a:avLst/>
+          </a:prstGeom>
+          <a:noFill/>
+        </p:spPr>
+        <p:txBody>
+          <a:bodyPr wrap="square" anchor="ctr" lIns="45720" rIns="45720" tIns="18288" bIns="18288">
             <a:spAutoFit/>
           </a:bodyPr>
           <a:lstStyle/>
@@ -13431,7 +13501,7 @@
                 </a:solidFill>
                 <a:latin typeface="Segoe UI"/>
               </a:rPr>
-              <a:t>11</a:t>
+              <a:t>48</a:t>
             </a:r>
           </a:p>
         </p:txBody>
@@ -13444,7 +13514,7 @@
         </p:nvSpPr>
         <p:spPr>
           <a:xfrm>
-            <a:off x="1802166" y="4251960"/>
+            <a:off x="5711005" y="4251960"/>
             <a:ext cx="950798" cy="502920"/>
           </a:xfrm>
           <a:prstGeom prst="rect">
@@ -13477,7 +13547,6 @@
           <a:lstStyle/>
           <a:p>
             <a:pPr algn="ctr"/>
-            <a:endParaRPr/>
           </a:p>
         </p:txBody>
       </p:sp>
@@ -13489,7 +13558,7 @@
         </p:nvSpPr>
         <p:spPr>
           <a:xfrm>
-            <a:off x="1802166" y="4251960"/>
+            <a:off x="5711005" y="4251960"/>
             <a:ext cx="950798" cy="502920"/>
           </a:xfrm>
           <a:prstGeom prst="rect">
@@ -13498,7 +13567,7 @@
           <a:noFill/>
         </p:spPr>
         <p:txBody>
-          <a:bodyPr wrap="square" lIns="45720" tIns="18288" rIns="45720" bIns="18288" anchor="ctr">
+          <a:bodyPr wrap="square" anchor="ctr" lIns="45720" rIns="45720" tIns="18288" bIns="18288">
             <a:spAutoFit/>
           </a:bodyPr>
           <a:lstStyle/>
@@ -13531,8 +13600,8 @@
         </p:nvSpPr>
         <p:spPr>
           <a:xfrm>
-            <a:off x="2752965" y="4251960"/>
-            <a:ext cx="3908838" cy="502920"/>
+            <a:off x="6661803" y="4251960"/>
+            <a:ext cx="1584664" cy="502920"/>
           </a:xfrm>
           <a:prstGeom prst="rect">
             <a:avLst/>
@@ -13564,7 +13633,6 @@
           <a:lstStyle/>
           <a:p>
             <a:pPr algn="ctr"/>
-            <a:endParaRPr/>
           </a:p>
         </p:txBody>
       </p:sp>
@@ -13576,16 +13644,16 @@
         </p:nvSpPr>
         <p:spPr>
           <a:xfrm>
-            <a:off x="2752965" y="4251960"/>
-            <a:ext cx="3908838" cy="502920"/>
-          </a:xfrm>
-          <a:prstGeom prst="rect">
-            <a:avLst/>
-          </a:prstGeom>
-          <a:noFill/>
-        </p:spPr>
-        <p:txBody>
-          <a:bodyPr wrap="square" lIns="45720" tIns="18288" rIns="45720" bIns="18288" anchor="ctr">
+            <a:off x="6661803" y="4251960"/>
+            <a:ext cx="1584664" cy="502920"/>
+          </a:xfrm>
+          <a:prstGeom prst="rect">
+            <a:avLst/>
+          </a:prstGeom>
+          <a:noFill/>
+        </p:spPr>
+        <p:txBody>
+          <a:bodyPr wrap="square" anchor="ctr" lIns="45720" rIns="45720" tIns="18288" bIns="18288">
             <a:spAutoFit/>
           </a:bodyPr>
           <a:lstStyle/>
@@ -13605,7 +13673,7 @@
                 </a:solidFill>
                 <a:latin typeface="Segoe UI"/>
               </a:rPr>
-              <a:t>37</a:t>
+              <a:t>15</a:t>
             </a:r>
           </a:p>
         </p:txBody>
@@ -13618,8 +13686,8 @@
         </p:nvSpPr>
         <p:spPr>
           <a:xfrm>
-            <a:off x="6661803" y="4251960"/>
-            <a:ext cx="4859636" cy="502920"/>
+            <a:off x="8246467" y="4251960"/>
+            <a:ext cx="3274972" cy="502920"/>
           </a:xfrm>
           <a:prstGeom prst="rect">
             <a:avLst/>
@@ -13651,7 +13719,6 @@
           <a:lstStyle/>
           <a:p>
             <a:pPr algn="ctr"/>
-            <a:endParaRPr/>
           </a:p>
         </p:txBody>
       </p:sp>
@@ -13663,16 +13730,16 @@
         </p:nvSpPr>
         <p:spPr>
           <a:xfrm>
-            <a:off x="6661803" y="4251960"/>
-            <a:ext cx="4859636" cy="502920"/>
-          </a:xfrm>
-          <a:prstGeom prst="rect">
-            <a:avLst/>
-          </a:prstGeom>
-          <a:noFill/>
-        </p:spPr>
-        <p:txBody>
-          <a:bodyPr wrap="square" lIns="45720" tIns="18288" rIns="45720" bIns="18288" anchor="ctr">
+            <a:off x="8246467" y="4251960"/>
+            <a:ext cx="3274972" cy="502920"/>
+          </a:xfrm>
+          <a:prstGeom prst="rect">
+            <a:avLst/>
+          </a:prstGeom>
+          <a:noFill/>
+        </p:spPr>
+        <p:txBody>
+          <a:bodyPr wrap="square" anchor="ctr" lIns="45720" rIns="45720" tIns="18288" bIns="18288">
             <a:spAutoFit/>
           </a:bodyPr>
           <a:lstStyle/>
@@ -13692,7 +13759,7 @@
                 </a:solidFill>
                 <a:latin typeface="Segoe UI"/>
               </a:rPr>
-              <a:t>46</a:t>
+              <a:t>31</a:t>
             </a:r>
           </a:p>
         </p:txBody>
@@ -13738,7 +13805,6 @@
           <a:lstStyle/>
           <a:p>
             <a:pPr algn="ctr"/>
-            <a:endParaRPr/>
           </a:p>
         </p:txBody>
       </p:sp>
@@ -13759,7 +13825,7 @@
           <a:noFill/>
         </p:spPr>
         <p:txBody>
-          <a:bodyPr wrap="square" lIns="45720" tIns="18288" rIns="45720" bIns="18288" anchor="t">
+          <a:bodyPr wrap="square" anchor="t" lIns="45720" rIns="45720" tIns="18288" bIns="18288">
             <a:spAutoFit/>
           </a:bodyPr>
           <a:lstStyle/>
@@ -13825,7 +13891,6 @@
           <a:lstStyle/>
           <a:p>
             <a:pPr algn="ctr"/>
-            <a:endParaRPr/>
           </a:p>
         </p:txBody>
       </p:sp>
@@ -13846,7 +13911,7 @@
           <a:noFill/>
         </p:spPr>
         <p:txBody>
-          <a:bodyPr wrap="square" lIns="45720" tIns="18288" rIns="45720" bIns="18288" anchor="t">
+          <a:bodyPr wrap="square" anchor="t" lIns="45720" rIns="45720" tIns="18288" bIns="18288">
             <a:spAutoFit/>
           </a:bodyPr>
           <a:lstStyle/>
@@ -13912,7 +13977,6 @@
           <a:lstStyle/>
           <a:p>
             <a:pPr algn="ctr"/>
-            <a:endParaRPr/>
           </a:p>
         </p:txBody>
       </p:sp>
@@ -13933,7 +13997,7 @@
           <a:noFill/>
         </p:spPr>
         <p:txBody>
-          <a:bodyPr wrap="square" lIns="45720" tIns="18288" rIns="45720" bIns="18288" anchor="t">
+          <a:bodyPr wrap="square" anchor="t" lIns="45720" rIns="45720" tIns="18288" bIns="18288">
             <a:spAutoFit/>
           </a:bodyPr>
           <a:lstStyle/>
@@ -13999,7 +14063,6 @@
           <a:lstStyle/>
           <a:p>
             <a:pPr algn="ctr"/>
-            <a:endParaRPr/>
           </a:p>
         </p:txBody>
       </p:sp>
@@ -14020,7 +14083,7 @@
           <a:noFill/>
         </p:spPr>
         <p:txBody>
-          <a:bodyPr wrap="square" lIns="45720" tIns="18288" rIns="45720" bIns="18288" anchor="t">
+          <a:bodyPr wrap="square" anchor="t" lIns="45720" rIns="45720" tIns="18288" bIns="18288">
             <a:spAutoFit/>
           </a:bodyPr>
           <a:lstStyle/>
@@ -14062,7 +14125,7 @@
           <a:noFill/>
         </p:spPr>
         <p:txBody>
-          <a:bodyPr wrap="square" lIns="45720" tIns="18288" rIns="45720" bIns="18288" anchor="t">
+          <a:bodyPr wrap="square" anchor="t" lIns="45720" rIns="45720" tIns="18288" bIns="18288">
             <a:spAutoFit/>
           </a:bodyPr>
           <a:lstStyle/>
@@ -14082,7 +14145,7 @@
                 </a:solidFill>
                 <a:latin typeface="Segoe UI"/>
               </a:rPr>
-              <a:t>Más de 1.400 pruebas automáticas  ·  97 % de cobertura del código  ·  las siete verificaciones en verde</a:t>
+              <a:t>1.920 pruebas automáticas  ·  97 % de cobertura del código  ·  las siete verificaciones en verde</a:t>
             </a:r>
           </a:p>
         </p:txBody>
@@ -14096,7 +14159,7 @@
 </file>
 
 <file path=ppt/slides/slide7.xml><?xml version="1.0" encoding="utf-8"?>
-<p:sld xmlns:a="http://schemas.openxmlformats.org/drawingml/2006/main" xmlns:r="http://schemas.openxmlformats.org/officeDocument/2006/relationships" xmlns:p="http://schemas.openxmlformats.org/presentationml/2006/main">
+<p:sld xmlns:a="http://schemas.openxmlformats.org/drawingml/2006/main" xmlns:p="http://schemas.openxmlformats.org/presentationml/2006/main" xmlns:r="http://schemas.openxmlformats.org/officeDocument/2006/relationships">
   <p:cSld>
     <p:bg>
       <p:bgPr>
@@ -14112,14 +14175,7 @@
         <p:cNvGrpSpPr/>
         <p:nvPr/>
       </p:nvGrpSpPr>
-      <p:grpSpPr>
-        <a:xfrm>
-          <a:off x="0" y="0"/>
-          <a:ext cx="0" cy="0"/>
-          <a:chOff x="0" y="0"/>
-          <a:chExt cx="0" cy="0"/>
-        </a:xfrm>
-      </p:grpSpPr>
+      <p:grpSpPr/>
       <p:sp>
         <p:nvSpPr>
           <p:cNvPr id="2" name="Rectangle 1"/>
@@ -14161,7 +14217,6 @@
           <a:lstStyle/>
           <a:p>
             <a:pPr algn="ctr"/>
-            <a:endParaRPr/>
           </a:p>
         </p:txBody>
       </p:sp>
@@ -14182,7 +14237,7 @@
           <a:noFill/>
         </p:spPr>
         <p:txBody>
-          <a:bodyPr wrap="square" lIns="45720" tIns="18288" rIns="45720" bIns="18288" anchor="t">
+          <a:bodyPr wrap="square" anchor="t" lIns="45720" rIns="45720" tIns="18288" bIns="18288">
             <a:spAutoFit/>
           </a:bodyPr>
           <a:lstStyle/>
@@ -14224,7 +14279,7 @@
           <a:noFill/>
         </p:spPr>
         <p:txBody>
-          <a:bodyPr wrap="square" lIns="45720" tIns="18288" rIns="45720" bIns="18288" anchor="t">
+          <a:bodyPr wrap="square" anchor="t" lIns="45720" rIns="45720" tIns="18288" bIns="18288">
             <a:spAutoFit/>
           </a:bodyPr>
           <a:lstStyle/>
@@ -14290,7 +14345,6 @@
           <a:lstStyle/>
           <a:p>
             <a:pPr algn="ctr"/>
-            <a:endParaRPr/>
           </a:p>
         </p:txBody>
       </p:sp>
@@ -14335,7 +14389,6 @@
           <a:lstStyle/>
           <a:p>
             <a:pPr algn="ctr"/>
-            <a:endParaRPr/>
           </a:p>
         </p:txBody>
       </p:sp>
@@ -14356,7 +14409,7 @@
           <a:noFill/>
         </p:spPr>
         <p:txBody>
-          <a:bodyPr wrap="square" lIns="45720" tIns="18288" rIns="45720" bIns="18288" anchor="t">
+          <a:bodyPr wrap="square" anchor="t" lIns="45720" rIns="45720" tIns="18288" bIns="18288">
             <a:spAutoFit/>
           </a:bodyPr>
           <a:lstStyle/>
@@ -14398,7 +14451,7 @@
           <a:noFill/>
         </p:spPr>
         <p:txBody>
-          <a:bodyPr wrap="square" lIns="45720" tIns="18288" rIns="45720" bIns="18288" anchor="t">
+          <a:bodyPr wrap="square" anchor="t" lIns="45720" rIns="45720" tIns="18288" bIns="18288">
             <a:spAutoFit/>
           </a:bodyPr>
           <a:lstStyle/>
@@ -14431,7 +14484,7 @@
         </p:nvSpPr>
         <p:spPr>
           <a:xfrm>
-            <a:off x="640080" y="2029968"/>
+            <a:off x="640080" y="1938528"/>
             <a:ext cx="109728" cy="109728"/>
           </a:xfrm>
           <a:prstGeom prst="rect">
@@ -14464,7 +14517,6 @@
           <a:lstStyle/>
           <a:p>
             <a:pPr algn="ctr"/>
-            <a:endParaRPr/>
           </a:p>
         </p:txBody>
       </p:sp>
@@ -14476,7 +14528,7 @@
         </p:nvSpPr>
         <p:spPr>
           <a:xfrm>
-            <a:off x="914400" y="1920240"/>
+            <a:off x="914400" y="1828800"/>
             <a:ext cx="5029200" cy="365760"/>
           </a:xfrm>
           <a:prstGeom prst="rect">
@@ -14485,7 +14537,7 @@
           <a:noFill/>
         </p:spPr>
         <p:txBody>
-          <a:bodyPr wrap="square" lIns="45720" tIns="18288" rIns="45720" bIns="18288" anchor="t">
+          <a:bodyPr wrap="square" anchor="t" lIns="45720" rIns="45720" tIns="18288" bIns="18288">
             <a:spAutoFit/>
           </a:bodyPr>
           <a:lstStyle/>
@@ -14518,16 +14570,16 @@
         </p:nvSpPr>
         <p:spPr>
           <a:xfrm>
-            <a:off x="914400" y="2286000"/>
-            <a:ext cx="5029200" cy="731519"/>
-          </a:xfrm>
-          <a:prstGeom prst="rect">
-            <a:avLst/>
-          </a:prstGeom>
-          <a:noFill/>
-        </p:spPr>
-        <p:txBody>
-          <a:bodyPr wrap="square" lIns="45720" tIns="18288" rIns="45720" bIns="18288" anchor="t">
+            <a:off x="914400" y="2194560"/>
+            <a:ext cx="5029200" cy="594360"/>
+          </a:xfrm>
+          <a:prstGeom prst="rect">
+            <a:avLst/>
+          </a:prstGeom>
+          <a:noFill/>
+        </p:spPr>
+        <p:txBody>
+          <a:bodyPr wrap="square" anchor="t" lIns="45720" rIns="45720" tIns="18288" bIns="18288">
             <a:spAutoFit/>
           </a:bodyPr>
           <a:lstStyle/>
@@ -14560,7 +14612,7 @@
         </p:nvSpPr>
         <p:spPr>
           <a:xfrm>
-            <a:off x="6217920" y="2029968"/>
+            <a:off x="6217920" y="1938528"/>
             <a:ext cx="109728" cy="109728"/>
           </a:xfrm>
           <a:prstGeom prst="rect">
@@ -14593,7 +14645,6 @@
           <a:lstStyle/>
           <a:p>
             <a:pPr algn="ctr"/>
-            <a:endParaRPr/>
           </a:p>
         </p:txBody>
       </p:sp>
@@ -14605,7 +14656,7 @@
         </p:nvSpPr>
         <p:spPr>
           <a:xfrm>
-            <a:off x="6492240" y="1920240"/>
+            <a:off x="6492240" y="1828800"/>
             <a:ext cx="5029200" cy="365760"/>
           </a:xfrm>
           <a:prstGeom prst="rect">
@@ -14614,7 +14665,7 @@
           <a:noFill/>
         </p:spPr>
         <p:txBody>
-          <a:bodyPr wrap="square" lIns="45720" tIns="18288" rIns="45720" bIns="18288" anchor="t">
+          <a:bodyPr wrap="square" anchor="t" lIns="45720" rIns="45720" tIns="18288" bIns="18288">
             <a:spAutoFit/>
           </a:bodyPr>
           <a:lstStyle/>
@@ -14647,16 +14698,16 @@
         </p:nvSpPr>
         <p:spPr>
           <a:xfrm>
-            <a:off x="6492240" y="2286000"/>
-            <a:ext cx="5029200" cy="731519"/>
-          </a:xfrm>
-          <a:prstGeom prst="rect">
-            <a:avLst/>
-          </a:prstGeom>
-          <a:noFill/>
-        </p:spPr>
-        <p:txBody>
-          <a:bodyPr wrap="square" lIns="45720" tIns="18288" rIns="45720" bIns="18288" anchor="t">
+            <a:off x="6492240" y="2194560"/>
+            <a:ext cx="5029200" cy="594360"/>
+          </a:xfrm>
+          <a:prstGeom prst="rect">
+            <a:avLst/>
+          </a:prstGeom>
+          <a:noFill/>
+        </p:spPr>
+        <p:txBody>
+          <a:bodyPr wrap="square" anchor="t" lIns="45720" rIns="45720" tIns="18288" bIns="18288">
             <a:spAutoFit/>
           </a:bodyPr>
           <a:lstStyle/>
@@ -14689,7 +14740,7 @@
         </p:nvSpPr>
         <p:spPr>
           <a:xfrm>
-            <a:off x="640080" y="3355848"/>
+            <a:off x="640080" y="3035808"/>
             <a:ext cx="109728" cy="109728"/>
           </a:xfrm>
           <a:prstGeom prst="rect">
@@ -14722,7 +14773,6 @@
           <a:lstStyle/>
           <a:p>
             <a:pPr algn="ctr"/>
-            <a:endParaRPr/>
           </a:p>
         </p:txBody>
       </p:sp>
@@ -14734,7 +14784,7 @@
         </p:nvSpPr>
         <p:spPr>
           <a:xfrm>
-            <a:off x="914400" y="3246120"/>
+            <a:off x="914400" y="2926080"/>
             <a:ext cx="5029200" cy="365760"/>
           </a:xfrm>
           <a:prstGeom prst="rect">
@@ -14743,7 +14793,7 @@
           <a:noFill/>
         </p:spPr>
         <p:txBody>
-          <a:bodyPr wrap="square" lIns="45720" tIns="18288" rIns="45720" bIns="18288" anchor="t">
+          <a:bodyPr wrap="square" anchor="t" lIns="45720" rIns="45720" tIns="18288" bIns="18288">
             <a:spAutoFit/>
           </a:bodyPr>
           <a:lstStyle/>
@@ -14776,16 +14826,16 @@
         </p:nvSpPr>
         <p:spPr>
           <a:xfrm>
-            <a:off x="914400" y="3611879"/>
-            <a:ext cx="5029200" cy="731519"/>
-          </a:xfrm>
-          <a:prstGeom prst="rect">
-            <a:avLst/>
-          </a:prstGeom>
-          <a:noFill/>
-        </p:spPr>
-        <p:txBody>
-          <a:bodyPr wrap="square" lIns="45720" tIns="18288" rIns="45720" bIns="18288" anchor="t">
+            <a:off x="914400" y="3291840"/>
+            <a:ext cx="5029200" cy="594360"/>
+          </a:xfrm>
+          <a:prstGeom prst="rect">
+            <a:avLst/>
+          </a:prstGeom>
+          <a:noFill/>
+        </p:spPr>
+        <p:txBody>
+          <a:bodyPr wrap="square" anchor="t" lIns="45720" rIns="45720" tIns="18288" bIns="18288">
             <a:spAutoFit/>
           </a:bodyPr>
           <a:lstStyle/>
@@ -14805,7 +14855,7 @@
                 </a:solidFill>
                 <a:latin typeface="Segoe UI"/>
               </a:rPr>
-              <a:t>Cada operación queda registrada y el registro no se puede alterar.</a:t>
+              <a:t>El registro no se puede alterar: lo impide la base de datos, no una pantalla.</a:t>
             </a:r>
           </a:p>
         </p:txBody>
@@ -14818,7 +14868,7 @@
         </p:nvSpPr>
         <p:spPr>
           <a:xfrm>
-            <a:off x="6217920" y="3355848"/>
+            <a:off x="6217920" y="3035808"/>
             <a:ext cx="109728" cy="109728"/>
           </a:xfrm>
           <a:prstGeom prst="rect">
@@ -14851,7 +14901,6 @@
           <a:lstStyle/>
           <a:p>
             <a:pPr algn="ctr"/>
-            <a:endParaRPr/>
           </a:p>
         </p:txBody>
       </p:sp>
@@ -14863,7 +14912,7 @@
         </p:nvSpPr>
         <p:spPr>
           <a:xfrm>
-            <a:off x="6492240" y="3246120"/>
+            <a:off x="6492240" y="2926080"/>
             <a:ext cx="5029200" cy="365760"/>
           </a:xfrm>
           <a:prstGeom prst="rect">
@@ -14872,7 +14921,7 @@
           <a:noFill/>
         </p:spPr>
         <p:txBody>
-          <a:bodyPr wrap="square" lIns="45720" tIns="18288" rIns="45720" bIns="18288" anchor="t">
+          <a:bodyPr wrap="square" anchor="t" lIns="45720" rIns="45720" tIns="18288" bIns="18288">
             <a:spAutoFit/>
           </a:bodyPr>
           <a:lstStyle/>
@@ -14905,16 +14954,16 @@
         </p:nvSpPr>
         <p:spPr>
           <a:xfrm>
-            <a:off x="6492240" y="3611879"/>
-            <a:ext cx="5029200" cy="731519"/>
-          </a:xfrm>
-          <a:prstGeom prst="rect">
-            <a:avLst/>
-          </a:prstGeom>
-          <a:noFill/>
-        </p:spPr>
-        <p:txBody>
-          <a:bodyPr wrap="square" lIns="45720" tIns="18288" rIns="45720" bIns="18288" anchor="t">
+            <a:off x="6492240" y="3291840"/>
+            <a:ext cx="5029200" cy="594360"/>
+          </a:xfrm>
+          <a:prstGeom prst="rect">
+            <a:avLst/>
+          </a:prstGeom>
+          <a:noFill/>
+        </p:spPr>
+        <p:txBody>
+          <a:bodyPr wrap="square" anchor="t" lIns="45720" rIns="45720" tIns="18288" bIns="18288">
             <a:spAutoFit/>
           </a:bodyPr>
           <a:lstStyle/>
@@ -14934,7 +14983,7 @@
                 </a:solidFill>
                 <a:latin typeface="Segoe UI"/>
               </a:rPr>
-              <a:t>El acceso se valida en el servidor, no sólo en la pantalla.</a:t>
+              <a:t>El acceso se valida en el servidor, con pruebas que entran con el rol equivocado.</a:t>
             </a:r>
           </a:p>
         </p:txBody>
@@ -14947,7 +14996,7 @@
         </p:nvSpPr>
         <p:spPr>
           <a:xfrm>
-            <a:off x="640080" y="4681728"/>
+            <a:off x="640080" y="4133088"/>
             <a:ext cx="109728" cy="109728"/>
           </a:xfrm>
           <a:prstGeom prst="rect">
@@ -14980,7 +15029,6 @@
           <a:lstStyle/>
           <a:p>
             <a:pPr algn="ctr"/>
-            <a:endParaRPr/>
           </a:p>
         </p:txBody>
       </p:sp>
@@ -14992,7 +15040,7 @@
         </p:nvSpPr>
         <p:spPr>
           <a:xfrm>
-            <a:off x="914400" y="4572000"/>
+            <a:off x="914400" y="4023360"/>
             <a:ext cx="5029200" cy="365760"/>
           </a:xfrm>
           <a:prstGeom prst="rect">
@@ -15001,7 +15049,7 @@
           <a:noFill/>
         </p:spPr>
         <p:txBody>
-          <a:bodyPr wrap="square" lIns="45720" tIns="18288" rIns="45720" bIns="18288" anchor="t">
+          <a:bodyPr wrap="square" anchor="t" lIns="45720" rIns="45720" tIns="18288" bIns="18288">
             <a:spAutoFit/>
           </a:bodyPr>
           <a:lstStyle/>
@@ -15034,16 +15082,16 @@
         </p:nvSpPr>
         <p:spPr>
           <a:xfrm>
-            <a:off x="914400" y="4937760"/>
-            <a:ext cx="5029200" cy="731519"/>
-          </a:xfrm>
-          <a:prstGeom prst="rect">
-            <a:avLst/>
-          </a:prstGeom>
-          <a:noFill/>
-        </p:spPr>
-        <p:txBody>
-          <a:bodyPr wrap="square" lIns="45720" tIns="18288" rIns="45720" bIns="18288" anchor="t">
+            <a:off x="914400" y="4389120"/>
+            <a:ext cx="5029200" cy="594360"/>
+          </a:xfrm>
+          <a:prstGeom prst="rect">
+            <a:avLst/>
+          </a:prstGeom>
+          <a:noFill/>
+        </p:spPr>
+        <p:txBody>
+          <a:bodyPr wrap="square" anchor="t" lIns="45720" rIns="45720" tIns="18288" bIns="18288">
             <a:spAutoFit/>
           </a:bodyPr>
           <a:lstStyle/>
@@ -15063,7 +15111,7 @@
                 </a:solidFill>
                 <a:latin typeface="Segoe UI"/>
               </a:rPr>
-              <a:t>El cálculo de importados usa aritmética decimal, sin errores de redondeo.</a:t>
+              <a:t>Aritmética decimal y propagación hasta los carritos: el cliente ve el precio vigente.</a:t>
             </a:r>
           </a:p>
         </p:txBody>
@@ -15076,7 +15124,7 @@
         </p:nvSpPr>
         <p:spPr>
           <a:xfrm>
-            <a:off x="6217920" y="4681728"/>
+            <a:off x="6217920" y="4133088"/>
             <a:ext cx="109728" cy="109728"/>
           </a:xfrm>
           <a:prstGeom prst="rect">
@@ -15109,7 +15157,6 @@
           <a:lstStyle/>
           <a:p>
             <a:pPr algn="ctr"/>
-            <a:endParaRPr/>
           </a:p>
         </p:txBody>
       </p:sp>
@@ -15121,7 +15168,7 @@
         </p:nvSpPr>
         <p:spPr>
           <a:xfrm>
-            <a:off x="6492240" y="4572000"/>
+            <a:off x="6492240" y="4023360"/>
             <a:ext cx="5029200" cy="365760"/>
           </a:xfrm>
           <a:prstGeom prst="rect">
@@ -15130,7 +15177,7 @@
           <a:noFill/>
         </p:spPr>
         <p:txBody>
-          <a:bodyPr wrap="square" lIns="45720" tIns="18288" rIns="45720" bIns="18288" anchor="t">
+          <a:bodyPr wrap="square" anchor="t" lIns="45720" rIns="45720" tIns="18288" bIns="18288">
             <a:spAutoFit/>
           </a:bodyPr>
           <a:lstStyle/>
@@ -15150,7 +15197,7 @@
                 </a:solidFill>
                 <a:latin typeface="Segoe UI"/>
               </a:rPr>
-              <a:t>En línea</a:t>
+              <a:t>Resistencia</a:t>
             </a:r>
           </a:p>
         </p:txBody>
@@ -15163,16 +15210,16 @@
         </p:nvSpPr>
         <p:spPr>
           <a:xfrm>
-            <a:off x="6492240" y="4937760"/>
-            <a:ext cx="5029200" cy="731519"/>
-          </a:xfrm>
-          <a:prstGeom prst="rect">
-            <a:avLst/>
-          </a:prstGeom>
-          <a:noFill/>
-        </p:spPr>
-        <p:txBody>
-          <a:bodyPr wrap="square" lIns="45720" tIns="18288" rIns="45720" bIns="18288" anchor="t">
+            <a:off x="6492240" y="4389120"/>
+            <a:ext cx="5029200" cy="594360"/>
+          </a:xfrm>
+          <a:prstGeom prst="rect">
+            <a:avLst/>
+          </a:prstGeom>
+          <a:noFill/>
+        </p:spPr>
+        <p:txBody>
+          <a:bodyPr wrap="square" anchor="t" lIns="45720" rIns="45720" tIns="18288" bIns="18288">
             <a:spAutoFit/>
           </a:bodyPr>
           <a:lstStyle/>
@@ -15192,7 +15239,263 @@
                 </a:solidFill>
                 <a:latin typeface="Segoe UI"/>
               </a:rPr>
-              <a:t>El sistema está publicado con HTTPS para esta demostración.</a:t>
+              <a:t>50 usuarios a la vez, operaciones simultáneas y ataques: sin errores.</a:t>
+            </a:r>
+          </a:p>
+        </p:txBody>
+      </p:sp>
+      <p:sp>
+        <p:nvSpPr>
+          <p:cNvPr id="27" name="Rectangle 26"/>
+          <p:cNvSpPr/>
+          <p:nvPr/>
+        </p:nvSpPr>
+        <p:spPr>
+          <a:xfrm>
+            <a:off x="640080" y="5230368"/>
+            <a:ext cx="109728" cy="109728"/>
+          </a:xfrm>
+          <a:prstGeom prst="rect">
+            <a:avLst/>
+          </a:prstGeom>
+          <a:solidFill>
+            <a:srgbClr val="F26B1D"/>
+          </a:solidFill>
+          <a:ln>
+            <a:noFill/>
+          </a:ln>
+          <a:effectLst/>
+        </p:spPr>
+        <p:style>
+          <a:lnRef idx="1">
+            <a:schemeClr val="accent1"/>
+          </a:lnRef>
+          <a:fillRef idx="3">
+            <a:schemeClr val="accent1"/>
+          </a:fillRef>
+          <a:effectRef idx="2">
+            <a:schemeClr val="accent1"/>
+          </a:effectRef>
+          <a:fontRef idx="minor">
+            <a:schemeClr val="lt1"/>
+          </a:fontRef>
+        </p:style>
+        <p:txBody>
+          <a:bodyPr rtlCol="0" anchor="ctr"/>
+          <a:lstStyle/>
+          <a:p>
+            <a:pPr algn="ctr"/>
+          </a:p>
+        </p:txBody>
+      </p:sp>
+      <p:sp>
+        <p:nvSpPr>
+          <p:cNvPr id="28" name="TextBox 27"/>
+          <p:cNvSpPr txBox="1"/>
+          <p:nvPr/>
+        </p:nvSpPr>
+        <p:spPr>
+          <a:xfrm>
+            <a:off x="914400" y="5120640"/>
+            <a:ext cx="5029200" cy="365760"/>
+          </a:xfrm>
+          <a:prstGeom prst="rect">
+            <a:avLst/>
+          </a:prstGeom>
+          <a:noFill/>
+        </p:spPr>
+        <p:txBody>
+          <a:bodyPr wrap="square" anchor="t" lIns="45720" rIns="45720" tIns="18288" bIns="18288">
+            <a:spAutoFit/>
+          </a:bodyPr>
+          <a:lstStyle/>
+          <a:p>
+            <a:pPr algn="l">
+              <a:lnSpc>
+                <a:spcPct val="115000"/>
+              </a:lnSpc>
+              <a:spcAft>
+                <a:spcPts val="600"/>
+              </a:spcAft>
+            </a:pPr>
+            <a:r>
+              <a:rPr sz="1800" b="1">
+                <a:solidFill>
+                  <a:srgbClr val="111111"/>
+                </a:solidFill>
+                <a:latin typeface="Segoe UI"/>
+              </a:rPr>
+              <a:t>Tienda configurable</a:t>
+            </a:r>
+          </a:p>
+        </p:txBody>
+      </p:sp>
+      <p:sp>
+        <p:nvSpPr>
+          <p:cNvPr id="29" name="TextBox 28"/>
+          <p:cNvSpPr txBox="1"/>
+          <p:nvPr/>
+        </p:nvSpPr>
+        <p:spPr>
+          <a:xfrm>
+            <a:off x="914400" y="5486400"/>
+            <a:ext cx="5029200" cy="594360"/>
+          </a:xfrm>
+          <a:prstGeom prst="rect">
+            <a:avLst/>
+          </a:prstGeom>
+          <a:noFill/>
+        </p:spPr>
+        <p:txBody>
+          <a:bodyPr wrap="square" anchor="t" lIns="45720" rIns="45720" tIns="18288" bIns="18288">
+            <a:spAutoFit/>
+          </a:bodyPr>
+          <a:lstStyle/>
+          <a:p>
+            <a:pPr algn="l">
+              <a:lnSpc>
+                <a:spcPct val="115000"/>
+              </a:lnSpc>
+              <a:spcAft>
+                <a:spcPts val="600"/>
+              </a:spcAft>
+            </a:pPr>
+            <a:r>
+              <a:rPr sz="1400" b="0">
+                <a:solidFill>
+                  <a:srgbClr val="3A3A3A"/>
+                </a:solidFill>
+                <a:latin typeface="Segoe UI"/>
+              </a:rPr>
+              <a:t>Portada, filas, imágenes y textos los arma el Administrador, sin programar.</a:t>
+            </a:r>
+          </a:p>
+        </p:txBody>
+      </p:sp>
+      <p:sp>
+        <p:nvSpPr>
+          <p:cNvPr id="30" name="Rectangle 29"/>
+          <p:cNvSpPr/>
+          <p:nvPr/>
+        </p:nvSpPr>
+        <p:spPr>
+          <a:xfrm>
+            <a:off x="6217920" y="5230368"/>
+            <a:ext cx="109728" cy="109728"/>
+          </a:xfrm>
+          <a:prstGeom prst="rect">
+            <a:avLst/>
+          </a:prstGeom>
+          <a:solidFill>
+            <a:srgbClr val="F26B1D"/>
+          </a:solidFill>
+          <a:ln>
+            <a:noFill/>
+          </a:ln>
+          <a:effectLst/>
+        </p:spPr>
+        <p:style>
+          <a:lnRef idx="1">
+            <a:schemeClr val="accent1"/>
+          </a:lnRef>
+          <a:fillRef idx="3">
+            <a:schemeClr val="accent1"/>
+          </a:fillRef>
+          <a:effectRef idx="2">
+            <a:schemeClr val="accent1"/>
+          </a:effectRef>
+          <a:fontRef idx="minor">
+            <a:schemeClr val="lt1"/>
+          </a:fontRef>
+        </p:style>
+        <p:txBody>
+          <a:bodyPr rtlCol="0" anchor="ctr"/>
+          <a:lstStyle/>
+          <a:p>
+            <a:pPr algn="ctr"/>
+          </a:p>
+        </p:txBody>
+      </p:sp>
+      <p:sp>
+        <p:nvSpPr>
+          <p:cNvPr id="31" name="TextBox 30"/>
+          <p:cNvSpPr txBox="1"/>
+          <p:nvPr/>
+        </p:nvSpPr>
+        <p:spPr>
+          <a:xfrm>
+            <a:off x="6492240" y="5120640"/>
+            <a:ext cx="5029200" cy="365760"/>
+          </a:xfrm>
+          <a:prstGeom prst="rect">
+            <a:avLst/>
+          </a:prstGeom>
+          <a:noFill/>
+        </p:spPr>
+        <p:txBody>
+          <a:bodyPr wrap="square" anchor="t" lIns="45720" rIns="45720" tIns="18288" bIns="18288">
+            <a:spAutoFit/>
+          </a:bodyPr>
+          <a:lstStyle/>
+          <a:p>
+            <a:pPr algn="l">
+              <a:lnSpc>
+                <a:spcPct val="115000"/>
+              </a:lnSpc>
+              <a:spcAft>
+                <a:spcPts val="600"/>
+              </a:spcAft>
+            </a:pPr>
+            <a:r>
+              <a:rPr sz="1800" b="1">
+                <a:solidFill>
+                  <a:srgbClr val="111111"/>
+                </a:solidFill>
+                <a:latin typeface="Segoe UI"/>
+              </a:rPr>
+              <a:t>En línea</a:t>
+            </a:r>
+          </a:p>
+        </p:txBody>
+      </p:sp>
+      <p:sp>
+        <p:nvSpPr>
+          <p:cNvPr id="32" name="TextBox 31"/>
+          <p:cNvSpPr txBox="1"/>
+          <p:nvPr/>
+        </p:nvSpPr>
+        <p:spPr>
+          <a:xfrm>
+            <a:off x="6492240" y="5486400"/>
+            <a:ext cx="5029200" cy="594360"/>
+          </a:xfrm>
+          <a:prstGeom prst="rect">
+            <a:avLst/>
+          </a:prstGeom>
+          <a:noFill/>
+        </p:spPr>
+        <p:txBody>
+          <a:bodyPr wrap="square" anchor="t" lIns="45720" rIns="45720" tIns="18288" bIns="18288">
+            <a:spAutoFit/>
+          </a:bodyPr>
+          <a:lstStyle/>
+          <a:p>
+            <a:pPr algn="l">
+              <a:lnSpc>
+                <a:spcPct val="115000"/>
+              </a:lnSpc>
+              <a:spcAft>
+                <a:spcPts val="600"/>
+              </a:spcAft>
+            </a:pPr>
+            <a:r>
+              <a:rPr sz="1400" b="0">
+                <a:solidFill>
+                  <a:srgbClr val="3A3A3A"/>
+                </a:solidFill>
+                <a:latin typeface="Segoe UI"/>
+              </a:rPr>
+              <a:t>Publicado con HTTPS para esta demostración, desde la PC del local.</a:t>
             </a:r>
           </a:p>
         </p:txBody>
@@ -15206,7 +15509,7 @@
 </file>
 
 <file path=ppt/slides/slide8.xml><?xml version="1.0" encoding="utf-8"?>
-<p:sld xmlns:a="http://schemas.openxmlformats.org/drawingml/2006/main" xmlns:r="http://schemas.openxmlformats.org/officeDocument/2006/relationships" xmlns:p="http://schemas.openxmlformats.org/presentationml/2006/main">
+<p:sld xmlns:a="http://schemas.openxmlformats.org/drawingml/2006/main" xmlns:p="http://schemas.openxmlformats.org/presentationml/2006/main" xmlns:r="http://schemas.openxmlformats.org/officeDocument/2006/relationships">
   <p:cSld>
     <p:bg>
       <p:bgPr>
@@ -15222,14 +15525,7 @@
         <p:cNvGrpSpPr/>
         <p:nvPr/>
       </p:nvGrpSpPr>
-      <p:grpSpPr>
-        <a:xfrm>
-          <a:off x="0" y="0"/>
-          <a:ext cx="0" cy="0"/>
-          <a:chOff x="0" y="0"/>
-          <a:chExt cx="0" cy="0"/>
-        </a:xfrm>
-      </p:grpSpPr>
+      <p:grpSpPr/>
       <p:sp>
         <p:nvSpPr>
           <p:cNvPr id="2" name="Rectangle 1"/>
@@ -15271,7 +15567,6 @@
           <a:lstStyle/>
           <a:p>
             <a:pPr algn="ctr"/>
-            <a:endParaRPr/>
           </a:p>
         </p:txBody>
       </p:sp>
@@ -15292,7 +15587,7 @@
           <a:noFill/>
         </p:spPr>
         <p:txBody>
-          <a:bodyPr wrap="square" lIns="45720" tIns="18288" rIns="45720" bIns="18288" anchor="t">
+          <a:bodyPr wrap="square" anchor="t" lIns="45720" rIns="45720" tIns="18288" bIns="18288">
             <a:spAutoFit/>
           </a:bodyPr>
           <a:lstStyle/>
@@ -15334,7 +15629,7 @@
           <a:noFill/>
         </p:spPr>
         <p:txBody>
-          <a:bodyPr wrap="square" lIns="45720" tIns="18288" rIns="45720" bIns="18288" anchor="t">
+          <a:bodyPr wrap="square" anchor="t" lIns="45720" rIns="45720" tIns="18288" bIns="18288">
             <a:spAutoFit/>
           </a:bodyPr>
           <a:lstStyle/>
@@ -15400,7 +15695,6 @@
           <a:lstStyle/>
           <a:p>
             <a:pPr algn="ctr"/>
-            <a:endParaRPr/>
           </a:p>
         </p:txBody>
       </p:sp>
@@ -15445,7 +15739,6 @@
           <a:lstStyle/>
           <a:p>
             <a:pPr algn="ctr"/>
-            <a:endParaRPr/>
           </a:p>
         </p:txBody>
       </p:sp>
@@ -15466,7 +15759,7 @@
           <a:noFill/>
         </p:spPr>
         <p:txBody>
-          <a:bodyPr wrap="square" lIns="45720" tIns="18288" rIns="45720" bIns="18288" anchor="t">
+          <a:bodyPr wrap="square" anchor="t" lIns="45720" rIns="45720" tIns="18288" bIns="18288">
             <a:spAutoFit/>
           </a:bodyPr>
           <a:lstStyle/>
@@ -15508,7 +15801,7 @@
           <a:noFill/>
         </p:spPr>
         <p:txBody>
-          <a:bodyPr wrap="square" lIns="45720" tIns="18288" rIns="45720" bIns="18288" anchor="t">
+          <a:bodyPr wrap="square" anchor="t" lIns="45720" rIns="45720" tIns="18288" bIns="18288">
             <a:spAutoFit/>
           </a:bodyPr>
           <a:lstStyle/>
@@ -15574,7 +15867,6 @@
           <a:lstStyle/>
           <a:p>
             <a:pPr algn="ctr"/>
-            <a:endParaRPr/>
           </a:p>
         </p:txBody>
       </p:sp>
@@ -15595,7 +15887,7 @@
           <a:noFill/>
         </p:spPr>
         <p:txBody>
-          <a:bodyPr wrap="square" lIns="45720" tIns="18288" rIns="45720" bIns="18288" anchor="ctr">
+          <a:bodyPr wrap="square" anchor="ctr" lIns="45720" rIns="45720" tIns="18288" bIns="18288">
             <a:spAutoFit/>
           </a:bodyPr>
           <a:lstStyle/>
@@ -15637,7 +15929,7 @@
           <a:noFill/>
         </p:spPr>
         <p:txBody>
-          <a:bodyPr wrap="square" lIns="45720" tIns="18288" rIns="45720" bIns="18288" anchor="t">
+          <a:bodyPr wrap="square" anchor="t" lIns="45720" rIns="45720" tIns="18288" bIns="18288">
             <a:spAutoFit/>
           </a:bodyPr>
           <a:lstStyle/>
@@ -15657,7 +15949,7 @@
                 </a:solidFill>
                 <a:latin typeface="Segoe UI"/>
               </a:rPr>
-              <a:t>Cadena comercial</a:t>
+              <a:t>Compra y pedidos</a:t>
             </a:r>
           </a:p>
         </p:txBody>
@@ -15679,7 +15971,7 @@
           <a:noFill/>
         </p:spPr>
         <p:txBody>
-          <a:bodyPr wrap="square" lIns="45720" tIns="18288" rIns="45720" bIns="18288" anchor="t">
+          <a:bodyPr wrap="square" anchor="t" lIns="45720" rIns="45720" tIns="18288" bIns="18288">
             <a:spAutoFit/>
           </a:bodyPr>
           <a:lstStyle/>
@@ -15699,7 +15991,7 @@
                 </a:solidFill>
                 <a:latin typeface="Segoe UI"/>
               </a:rPr>
-              <a:t>Tienda online, carrito, compra con pago y pedidos. El pedido es la base de lo que sigue.</a:t>
+              <a:t>Pago, pedidos y reservas de pre-venta. El pedido es la base de lo que sigue.</a:t>
             </a:r>
           </a:p>
         </p:txBody>
@@ -15745,7 +16037,6 @@
           <a:lstStyle/>
           <a:p>
             <a:pPr algn="ctr"/>
-            <a:endParaRPr/>
           </a:p>
         </p:txBody>
       </p:sp>
@@ -15766,7 +16057,7 @@
           <a:noFill/>
         </p:spPr>
         <p:txBody>
-          <a:bodyPr wrap="square" lIns="45720" tIns="18288" rIns="45720" bIns="18288" anchor="ctr">
+          <a:bodyPr wrap="square" anchor="ctr" lIns="45720" rIns="45720" tIns="18288" bIns="18288">
             <a:spAutoFit/>
           </a:bodyPr>
           <a:lstStyle/>
@@ -15808,7 +16099,7 @@
           <a:noFill/>
         </p:spPr>
         <p:txBody>
-          <a:bodyPr wrap="square" lIns="45720" tIns="18288" rIns="45720" bIns="18288" anchor="t">
+          <a:bodyPr wrap="square" anchor="t" lIns="45720" rIns="45720" tIns="18288" bIns="18288">
             <a:spAutoFit/>
           </a:bodyPr>
           <a:lstStyle/>
@@ -15850,7 +16141,7 @@
           <a:noFill/>
         </p:spPr>
         <p:txBody>
-          <a:bodyPr wrap="square" lIns="45720" tIns="18288" rIns="45720" bIns="18288" anchor="t">
+          <a:bodyPr wrap="square" anchor="t" lIns="45720" rIns="45720" tIns="18288" bIns="18288">
             <a:spAutoFit/>
           </a:bodyPr>
           <a:lstStyle/>
@@ -15916,7 +16207,6 @@
           <a:lstStyle/>
           <a:p>
             <a:pPr algn="ctr"/>
-            <a:endParaRPr/>
           </a:p>
         </p:txBody>
       </p:sp>
@@ -15937,7 +16227,7 @@
           <a:noFill/>
         </p:spPr>
         <p:txBody>
-          <a:bodyPr wrap="square" lIns="45720" tIns="18288" rIns="45720" bIns="18288" anchor="ctr">
+          <a:bodyPr wrap="square" anchor="ctr" lIns="45720" rIns="45720" tIns="18288" bIns="18288">
             <a:spAutoFit/>
           </a:bodyPr>
           <a:lstStyle/>
@@ -15979,7 +16269,7 @@
           <a:noFill/>
         </p:spPr>
         <p:txBody>
-          <a:bodyPr wrap="square" lIns="45720" tIns="18288" rIns="45720" bIns="18288" anchor="t">
+          <a:bodyPr wrap="square" anchor="t" lIns="45720" rIns="45720" tIns="18288" bIns="18288">
             <a:spAutoFit/>
           </a:bodyPr>
           <a:lstStyle/>
@@ -16021,7 +16311,7 @@
           <a:noFill/>
         </p:spPr>
         <p:txBody>
-          <a:bodyPr wrap="square" lIns="45720" tIns="18288" rIns="45720" bIns="18288" anchor="t">
+          <a:bodyPr wrap="square" anchor="t" lIns="45720" rIns="45720" tIns="18288" bIns="18288">
             <a:spAutoFit/>
           </a:bodyPr>
           <a:lstStyle/>
@@ -16041,7 +16331,7 @@
                 </a:solidFill>
                 <a:latin typeface="Segoe UI"/>
               </a:rPr>
-              <a:t>Vencimientos y avisos que el sistema ejecuta solo, cada cierto tiempo.</a:t>
+              <a:t>El temporizador ya corre las ofertas; faltan los vencimientos y avisos de cada módulo.</a:t>
             </a:r>
           </a:p>
         </p:txBody>
@@ -16087,7 +16377,6 @@
           <a:lstStyle/>
           <a:p>
             <a:pPr algn="ctr"/>
-            <a:endParaRPr/>
           </a:p>
         </p:txBody>
       </p:sp>
@@ -16108,7 +16397,7 @@
           <a:noFill/>
         </p:spPr>
         <p:txBody>
-          <a:bodyPr wrap="square" lIns="45720" tIns="18288" rIns="45720" bIns="18288" anchor="ctr">
+          <a:bodyPr wrap="square" anchor="ctr" lIns="45720" rIns="45720" tIns="18288" bIns="18288">
             <a:spAutoFit/>
           </a:bodyPr>
           <a:lstStyle/>
@@ -16150,7 +16439,7 @@
           <a:noFill/>
         </p:spPr>
         <p:txBody>
-          <a:bodyPr wrap="square" lIns="45720" tIns="18288" rIns="45720" bIns="18288" anchor="t">
+          <a:bodyPr wrap="square" anchor="t" lIns="45720" rIns="45720" tIns="18288" bIns="18288">
             <a:spAutoFit/>
           </a:bodyPr>
           <a:lstStyle/>
@@ -16170,7 +16459,7 @@
                 </a:solidFill>
                 <a:latin typeface="Segoe UI"/>
               </a:rPr>
-              <a:t>Completar catálogo y precios</a:t>
+              <a:t>Cuenta del cliente</a:t>
             </a:r>
           </a:p>
         </p:txBody>
@@ -16192,7 +16481,7 @@
           <a:noFill/>
         </p:spPr>
         <p:txBody>
-          <a:bodyPr wrap="square" lIns="45720" tIns="18288" rIns="45720" bIns="18288" anchor="t">
+          <a:bodyPr wrap="square" anchor="t" lIns="45720" rIns="45720" tIns="18288" bIns="18288">
             <a:spAutoFit/>
           </a:bodyPr>
           <a:lstStyle/>
@@ -16212,7 +16501,7 @@
                 </a:solidFill>
                 <a:latin typeface="Segoe UI"/>
               </a:rPr>
-              <a:t>Bajas con informe de impacto y propagación de precios a los productos.</a:t>
+              <a:t>Panel propio, datos personales y avisos de stock.</a:t>
             </a:r>
           </a:p>
         </p:txBody>
@@ -16226,7 +16515,7 @@
 </file>
 
 <file path=ppt/slides/slide9.xml><?xml version="1.0" encoding="utf-8"?>
-<p:sld xmlns:a="http://schemas.openxmlformats.org/drawingml/2006/main" xmlns:r="http://schemas.openxmlformats.org/officeDocument/2006/relationships" xmlns:p="http://schemas.openxmlformats.org/presentationml/2006/main">
+<p:sld xmlns:a="http://schemas.openxmlformats.org/drawingml/2006/main" xmlns:p="http://schemas.openxmlformats.org/presentationml/2006/main" xmlns:r="http://schemas.openxmlformats.org/officeDocument/2006/relationships">
   <p:cSld>
     <p:bg>
       <p:bgPr>
@@ -16242,14 +16531,7 @@
         <p:cNvGrpSpPr/>
         <p:nvPr/>
       </p:nvGrpSpPr>
-      <p:grpSpPr>
-        <a:xfrm>
-          <a:off x="0" y="0"/>
-          <a:ext cx="0" cy="0"/>
-          <a:chOff x="0" y="0"/>
-          <a:chExt cx="0" cy="0"/>
-        </a:xfrm>
-      </p:grpSpPr>
+      <p:grpSpPr/>
       <p:sp>
         <p:nvSpPr>
           <p:cNvPr id="2" name="Rectangle 1"/>
@@ -16291,7 +16573,6 @@
           <a:lstStyle/>
           <a:p>
             <a:pPr algn="ctr"/>
-            <a:endParaRPr/>
           </a:p>
         </p:txBody>
       </p:sp>
@@ -16312,7 +16593,7 @@
           <a:noFill/>
         </p:spPr>
         <p:txBody>
-          <a:bodyPr wrap="square" lIns="45720" tIns="18288" rIns="45720" bIns="18288" anchor="t">
+          <a:bodyPr wrap="square" anchor="t" lIns="45720" rIns="45720" tIns="18288" bIns="18288">
             <a:spAutoFit/>
           </a:bodyPr>
           <a:lstStyle/>
@@ -16354,7 +16635,7 @@
           <a:noFill/>
         </p:spPr>
         <p:txBody>
-          <a:bodyPr wrap="square" lIns="45720" tIns="18288" rIns="45720" bIns="18288" anchor="t">
+          <a:bodyPr wrap="square" anchor="t" lIns="45720" rIns="45720" tIns="18288" bIns="18288">
             <a:spAutoFit/>
           </a:bodyPr>
           <a:lstStyle/>
@@ -16420,7 +16701,6 @@
           <a:lstStyle/>
           <a:p>
             <a:pPr algn="ctr"/>
-            <a:endParaRPr/>
           </a:p>
         </p:txBody>
       </p:sp>
@@ -16465,7 +16745,6 @@
           <a:lstStyle/>
           <a:p>
             <a:pPr algn="ctr"/>
-            <a:endParaRPr/>
           </a:p>
         </p:txBody>
       </p:sp>
@@ -16486,7 +16765,7 @@
           <a:noFill/>
         </p:spPr>
         <p:txBody>
-          <a:bodyPr wrap="square" lIns="45720" tIns="18288" rIns="45720" bIns="18288" anchor="t">
+          <a:bodyPr wrap="square" anchor="t" lIns="45720" rIns="45720" tIns="18288" bIns="18288">
             <a:spAutoFit/>
           </a:bodyPr>
           <a:lstStyle/>
@@ -16528,7 +16807,7 @@
           <a:noFill/>
         </p:spPr>
         <p:txBody>
-          <a:bodyPr wrap="square" lIns="45720" tIns="18288" rIns="45720" bIns="18288" anchor="t">
+          <a:bodyPr wrap="square" anchor="t" lIns="45720" rIns="45720" tIns="18288" bIns="18288">
             <a:spAutoFit/>
           </a:bodyPr>
           <a:lstStyle/>
@@ -16570,7 +16849,7 @@
           <a:noFill/>
         </p:spPr>
         <p:txBody>
-          <a:bodyPr wrap="square" lIns="45720" tIns="18288" rIns="45720" bIns="18288" anchor="t">
+          <a:bodyPr wrap="square" anchor="t" lIns="45720" rIns="45720" tIns="18288" bIns="18288">
             <a:spAutoFit/>
           </a:bodyPr>
           <a:lstStyle/>
@@ -16636,7 +16915,6 @@
           <a:lstStyle/>
           <a:p>
             <a:pPr algn="ctr"/>
-            <a:endParaRPr/>
           </a:p>
         </p:txBody>
       </p:sp>
@@ -16681,7 +16959,6 @@
           <a:lstStyle/>
           <a:p>
             <a:pPr algn="ctr"/>
-            <a:endParaRPr/>
           </a:p>
         </p:txBody>
       </p:sp>
@@ -16702,7 +16979,7 @@
           <a:noFill/>
         </p:spPr>
         <p:txBody>
-          <a:bodyPr wrap="square" lIns="45720" tIns="18288" rIns="45720" bIns="18288" anchor="t">
+          <a:bodyPr wrap="square" anchor="t" lIns="45720" rIns="45720" tIns="18288" bIns="18288">
             <a:spAutoFit/>
           </a:bodyPr>
           <a:lstStyle/>
@@ -16722,7 +16999,7 @@
                 </a:solidFill>
                 <a:latin typeface="Segoe UI"/>
               </a:rPr>
-              <a:t>Inicio de sesión y panel</a:t>
+              <a:t>La tienda, sin iniciar sesión</a:t>
             </a:r>
           </a:p>
         </p:txBody>
@@ -16744,7 +17021,7 @@
           <a:noFill/>
         </p:spPr>
         <p:txBody>
-          <a:bodyPr wrap="square" lIns="45720" tIns="18288" rIns="45720" bIns="18288" anchor="t">
+          <a:bodyPr wrap="square" anchor="t" lIns="45720" rIns="45720" tIns="18288" bIns="18288">
             <a:spAutoFit/>
           </a:bodyPr>
           <a:lstStyle/>
@@ -16764,7 +17041,7 @@
                 </a:solidFill>
                 <a:latin typeface="Segoe UI"/>
               </a:rPr>
-              <a:t>Administrador. Cifras y actividad reciente.</a:t>
+              <a:t>Portada, filas, «Lo que se viene» y catálogo con filtros.</a:t>
             </a:r>
           </a:p>
         </p:txBody>
@@ -16786,7 +17063,7 @@
           <a:noFill/>
         </p:spPr>
         <p:txBody>
-          <a:bodyPr wrap="square" lIns="45720" tIns="18288" rIns="45720" bIns="18288" anchor="t">
+          <a:bodyPr wrap="square" anchor="t" lIns="45720" rIns="45720" tIns="18288" bIns="18288">
             <a:spAutoFit/>
           </a:bodyPr>
           <a:lstStyle/>
@@ -16806,7 +17083,7 @@
                 </a:solidFill>
                 <a:latin typeface="Segoe UI"/>
               </a:rPr>
-              <a:t>0:40</a:t>
+              <a:t>1:00</a:t>
             </a:r>
           </a:p>
         </p:txBody>
@@ -16852,7 +17129,6 @@
           <a:lstStyle/>
           <a:p>
             <a:pPr algn="ctr"/>
-            <a:endParaRPr/>
           </a:p>
         </p:txBody>
       </p:sp>
@@ -16897,7 +17173,6 @@
           <a:lstStyle/>
           <a:p>
             <a:pPr algn="ctr"/>
-            <a:endParaRPr/>
           </a:p>
         </p:txBody>
       </p:sp>
@@ -16918,7 +17193,7 @@
           <a:noFill/>
         </p:spPr>
         <p:txBody>
-          <a:bodyPr wrap="square" lIns="45720" tIns="18288" rIns="45720" bIns="18288" anchor="t">
+          <a:bodyPr wrap="square" anchor="t" lIns="45720" rIns="45720" tIns="18288" bIns="18288">
             <a:spAutoFit/>
           </a:bodyPr>
           <a:lstStyle/>
@@ -16938,7 +17213,7 @@
                 </a:solidFill>
                 <a:latin typeface="Segoe UI"/>
               </a:rPr>
-              <a:t>Inventario y ficha de producto</a:t>
+              <a:t>El carrito</a:t>
             </a:r>
           </a:p>
         </p:txBody>
@@ -16960,7 +17235,7 @@
           <a:noFill/>
         </p:spPr>
         <p:txBody>
-          <a:bodyPr wrap="square" lIns="45720" tIns="18288" rIns="45720" bIns="18288" anchor="t">
+          <a:bodyPr wrap="square" anchor="t" lIns="45720" rIns="45720" tIns="18288" bIns="18288">
             <a:spAutoFit/>
           </a:bodyPr>
           <a:lstStyle/>
@@ -16980,7 +17255,7 @@
                 </a:solidFill>
                 <a:latin typeface="Segoe UI"/>
               </a:rPr>
-              <a:t>Filtros, estado, stock y precio.</a:t>
+              <a:t>Agregar desde la tarjeta; precio y stock se recalculan solos.</a:t>
             </a:r>
           </a:p>
         </p:txBody>
@@ -17002,7 +17277,7 @@
           <a:noFill/>
         </p:spPr>
         <p:txBody>
-          <a:bodyPr wrap="square" lIns="45720" tIns="18288" rIns="45720" bIns="18288" anchor="t">
+          <a:bodyPr wrap="square" anchor="t" lIns="45720" rIns="45720" tIns="18288" bIns="18288">
             <a:spAutoFit/>
           </a:bodyPr>
           <a:lstStyle/>
@@ -17022,7 +17297,7 @@
                 </a:solidFill>
                 <a:latin typeface="Segoe UI"/>
               </a:rPr>
-              <a:t>1:30</a:t>
+              <a:t>1:45</a:t>
             </a:r>
           </a:p>
         </p:txBody>
@@ -17068,7 +17343,6 @@
           <a:lstStyle/>
           <a:p>
             <a:pPr algn="ctr"/>
-            <a:endParaRPr/>
           </a:p>
         </p:txBody>
       </p:sp>
@@ -17113,7 +17387,6 @@
           <a:lstStyle/>
           <a:p>
             <a:pPr algn="ctr"/>
-            <a:endParaRPr/>
           </a:p>
         </p:txBody>
       </p:sp>
@@ -17134,7 +17407,7 @@
           <a:noFill/>
         </p:spPr>
         <p:txBody>
-          <a:bodyPr wrap="square" lIns="45720" tIns="18288" rIns="45720" bIns="18288" anchor="t">
+          <a:bodyPr wrap="square" anchor="t" lIns="45720" rIns="45720" tIns="18288" bIns="18288">
             <a:spAutoFit/>
           </a:bodyPr>
           <a:lstStyle/>
@@ -17154,7 +17427,7 @@
                 </a:solidFill>
                 <a:latin typeface="Segoe UI"/>
               </a:rPr>
-              <a:t>Alta de un lote nacional</a:t>
+              <a:t>Precios y ofertas</a:t>
             </a:r>
           </a:p>
         </p:txBody>
@@ -17176,7 +17449,7 @@
           <a:noFill/>
         </p:spPr>
         <p:txBody>
-          <a:bodyPr wrap="square" lIns="45720" tIns="18288" rIns="45720" bIns="18288" anchor="t">
+          <a:bodyPr wrap="square" anchor="t" lIns="45720" rIns="45720" tIns="18288" bIns="18288">
             <a:spAutoFit/>
           </a:bodyPr>
           <a:lstStyle/>
@@ -17196,7 +17469,7 @@
                 </a:solidFill>
                 <a:latin typeface="Segoe UI"/>
               </a:rPr>
-              <a:t>El precio sale de la tabla de referencia.</a:t>
+              <a:t>El Administrador crea una oferta y el carrito la refleja.</a:t>
             </a:r>
           </a:p>
         </p:txBody>
@@ -17218,7 +17491,7 @@
           <a:noFill/>
         </p:spPr>
         <p:txBody>
-          <a:bodyPr wrap="square" lIns="45720" tIns="18288" rIns="45720" bIns="18288" anchor="t">
+          <a:bodyPr wrap="square" anchor="t" lIns="45720" rIns="45720" tIns="18288" bIns="18288">
             <a:spAutoFit/>
           </a:bodyPr>
           <a:lstStyle/>
@@ -17284,7 +17557,6 @@
           <a:lstStyle/>
           <a:p>
             <a:pPr algn="ctr"/>
-            <a:endParaRPr/>
           </a:p>
         </p:txBody>
       </p:sp>
@@ -17329,7 +17601,6 @@
           <a:lstStyle/>
           <a:p>
             <a:pPr algn="ctr"/>
-            <a:endParaRPr/>
           </a:p>
         </p:txBody>
       </p:sp>
@@ -17350,7 +17621,7 @@
           <a:noFill/>
         </p:spPr>
         <p:txBody>
-          <a:bodyPr wrap="square" lIns="45720" tIns="18288" rIns="45720" bIns="18288" anchor="t">
+          <a:bodyPr wrap="square" anchor="t" lIns="45720" rIns="45720" tIns="18288" bIns="18288">
             <a:spAutoFit/>
           </a:bodyPr>
           <a:lstStyle/>
@@ -17392,7 +17663,7 @@
           <a:noFill/>
         </p:spPr>
         <p:txBody>
-          <a:bodyPr wrap="square" lIns="45720" tIns="18288" rIns="45720" bIns="18288" anchor="t">
+          <a:bodyPr wrap="square" anchor="t" lIns="45720" rIns="45720" tIns="18288" bIns="18288">
             <a:spAutoFit/>
           </a:bodyPr>
           <a:lstStyle/>
@@ -17412,7 +17683,7 @@
                 </a:solidFill>
                 <a:latin typeface="Segoe UI"/>
               </a:rPr>
-              <a:t>Contenido extraído y borradores propuestos por el modelo.</a:t>
+              <a:t>El modelo propone borradores; una persona confirma.</a:t>
             </a:r>
           </a:p>
         </p:txBody>
@@ -17434,7 +17705,7 @@
           <a:noFill/>
         </p:spPr>
         <p:txBody>
-          <a:bodyPr wrap="square" lIns="45720" tIns="18288" rIns="45720" bIns="18288" anchor="t">
+          <a:bodyPr wrap="square" anchor="t" lIns="45720" rIns="45720" tIns="18288" bIns="18288">
             <a:spAutoFit/>
           </a:bodyPr>
           <a:lstStyle/>
@@ -17500,7 +17771,6 @@
           <a:lstStyle/>
           <a:p>
             <a:pPr algn="ctr"/>
-            <a:endParaRPr/>
           </a:p>
         </p:txBody>
       </p:sp>
@@ -17545,7 +17815,6 @@
           <a:lstStyle/>
           <a:p>
             <a:pPr algn="ctr"/>
-            <a:endParaRPr/>
           </a:p>
         </p:txBody>
       </p:sp>
@@ -17566,7 +17835,7 @@
           <a:noFill/>
         </p:spPr>
         <p:txBody>
-          <a:bodyPr wrap="square" lIns="45720" tIns="18288" rIns="45720" bIns="18288" anchor="t">
+          <a:bodyPr wrap="square" anchor="t" lIns="45720" rIns="45720" tIns="18288" bIns="18288">
             <a:spAutoFit/>
           </a:bodyPr>
           <a:lstStyle/>
@@ -17586,7 +17855,7 @@
                 </a:solidFill>
                 <a:latin typeface="Segoe UI"/>
               </a:rPr>
-              <a:t>Revisión de borradores</a:t>
+              <a:t>Contenido de la tienda</a:t>
             </a:r>
           </a:p>
         </p:txBody>
@@ -17608,7 +17877,7 @@
           <a:noFill/>
         </p:spPr>
         <p:txBody>
-          <a:bodyPr wrap="square" lIns="45720" tIns="18288" rIns="45720" bIns="18288" anchor="t">
+          <a:bodyPr wrap="square" anchor="t" lIns="45720" rIns="45720" tIns="18288" bIns="18288">
             <a:spAutoFit/>
           </a:bodyPr>
           <a:lstStyle/>
@@ -17628,7 +17897,7 @@
                 </a:solidFill>
                 <a:latin typeface="Segoe UI"/>
               </a:rPr>
-              <a:t>Una persona confirma: recién ahí es producto.</a:t>
+              <a:t>Filas de la portada e imagen del ingreso, sin programar.</a:t>
             </a:r>
           </a:p>
         </p:txBody>
@@ -17650,7 +17919,7 @@
           <a:noFill/>
         </p:spPr>
         <p:txBody>
-          <a:bodyPr wrap="square" lIns="45720" tIns="18288" rIns="45720" bIns="18288" anchor="t">
+          <a:bodyPr wrap="square" anchor="t" lIns="45720" rIns="45720" tIns="18288" bIns="18288">
             <a:spAutoFit/>
           </a:bodyPr>
           <a:lstStyle/>
@@ -17716,7 +17985,6 @@
           <a:lstStyle/>
           <a:p>
             <a:pPr algn="ctr"/>
-            <a:endParaRPr/>
           </a:p>
         </p:txBody>
       </p:sp>
@@ -17737,7 +18005,7 @@
           <a:noFill/>
         </p:spPr>
         <p:txBody>
-          <a:bodyPr wrap="square" lIns="45720" tIns="18288" rIns="45720" bIns="18288" anchor="t">
+          <a:bodyPr wrap="square" anchor="t" lIns="45720" rIns="45720" tIns="18288" bIns="18288">
             <a:spAutoFit/>
           </a:bodyPr>
           <a:lstStyle/>
@@ -17757,7 +18025,7 @@
                 </a:solidFill>
                 <a:latin typeface="Segoe UI"/>
               </a:rPr>
-              <a:t>Otros roles</a:t>
+              <a:t>Roles y pruebas</a:t>
             </a:r>
           </a:p>
         </p:txBody>
@@ -17779,7 +18047,7 @@
           <a:noFill/>
         </p:spPr>
         <p:txBody>
-          <a:bodyPr wrap="square" lIns="45720" tIns="18288" rIns="45720" bIns="18288" anchor="t">
+          <a:bodyPr wrap="square" anchor="t" lIns="45720" rIns="45720" tIns="18288" bIns="18288">
             <a:spAutoFit/>
           </a:bodyPr>
           <a:lstStyle/>
@@ -17799,7 +18067,7 @@
                 </a:solidFill>
                 <a:latin typeface="Segoe UI"/>
               </a:rPr>
-              <a:t>Cajero y Cliente ven sólo lo suyo.</a:t>
+              <a:t>El Cajero no entra a la configuración. Las pruebas en vivo.</a:t>
             </a:r>
           </a:p>
         </p:txBody>
@@ -18133,7 +18401,7 @@
 </file>
 
 <file path=ppt/theme/theme2.xml><?xml version="1.0" encoding="utf-8"?>
-<a:theme xmlns:a="http://schemas.openxmlformats.org/drawingml/2006/main" name="Tema de Office">
+<a:theme xmlns:a="http://schemas.openxmlformats.org/drawingml/2006/main" name="Office Theme">
   <a:themeElements>
     <a:clrScheme name="Office">
       <a:dk1>
@@ -18143,44 +18411,44 @@
         <a:sysClr val="window" lastClr="FFFFFF"/>
       </a:lt1>
       <a:dk2>
-        <a:srgbClr val="0E2841"/>
+        <a:srgbClr val="1F497D"/>
       </a:dk2>
       <a:lt2>
-        <a:srgbClr val="E8E8E8"/>
+        <a:srgbClr val="EEECE1"/>
       </a:lt2>
       <a:accent1>
-        <a:srgbClr val="156082"/>
+        <a:srgbClr val="4F81BD"/>
       </a:accent1>
       <a:accent2>
-        <a:srgbClr val="E97132"/>
+        <a:srgbClr val="C0504D"/>
       </a:accent2>
       <a:accent3>
-        <a:srgbClr val="196B24"/>
+        <a:srgbClr val="9BBB59"/>
       </a:accent3>
       <a:accent4>
-        <a:srgbClr val="0F9ED5"/>
+        <a:srgbClr val="8064A2"/>
       </a:accent4>
       <a:accent5>
-        <a:srgbClr val="A02B93"/>
+        <a:srgbClr val="4BACC6"/>
       </a:accent5>
       <a:accent6>
-        <a:srgbClr val="4EA72E"/>
+        <a:srgbClr val="F79646"/>
       </a:accent6>
       <a:hlink>
-        <a:srgbClr val="467886"/>
+        <a:srgbClr val="0000FF"/>
       </a:hlink>
       <a:folHlink>
-        <a:srgbClr val="96607D"/>
+        <a:srgbClr val="800080"/>
       </a:folHlink>
     </a:clrScheme>
     <a:fontScheme name="Office">
       <a:majorFont>
-        <a:latin typeface="Aptos Display" panose="02110004020202020204"/>
+        <a:latin typeface="Calibri"/>
         <a:ea typeface=""/>
         <a:cs typeface=""/>
-        <a:font script="Jpan" typeface="游ゴシック Light"/>
+        <a:font script="Jpan" typeface="ＭＳ Ｐゴシック"/>
         <a:font script="Hang" typeface="맑은 고딕"/>
-        <a:font script="Hans" typeface="等线 Light"/>
+        <a:font script="Hans" typeface="宋体"/>
         <a:font script="Hant" typeface="新細明體"/>
         <a:font script="Arab" typeface="Times New Roman"/>
         <a:font script="Hebr" typeface="Times New Roman"/>
@@ -18208,31 +18476,14 @@
         <a:font script="Viet" typeface="Times New Roman"/>
         <a:font script="Uigh" typeface="Microsoft Uighur"/>
         <a:font script="Geor" typeface="Sylfaen"/>
-        <a:font script="Armn" typeface="Arial"/>
-        <a:font script="Bugi" typeface="Leelawadee UI"/>
-        <a:font script="Bopo" typeface="Microsoft JhengHei"/>
-        <a:font script="Java" typeface="Javanese Text"/>
-        <a:font script="Lisu" typeface="Segoe UI"/>
-        <a:font script="Mymr" typeface="Myanmar Text"/>
-        <a:font script="Nkoo" typeface="Ebrima"/>
-        <a:font script="Olck" typeface="Nirmala UI"/>
-        <a:font script="Osma" typeface="Ebrima"/>
-        <a:font script="Phag" typeface="Phagspa"/>
-        <a:font script="Syrn" typeface="Estrangelo Edessa"/>
-        <a:font script="Syrj" typeface="Estrangelo Edessa"/>
-        <a:font script="Syre" typeface="Estrangelo Edessa"/>
-        <a:font script="Sora" typeface="Nirmala UI"/>
-        <a:font script="Tale" typeface="Microsoft Tai Le"/>
-        <a:font script="Talu" typeface="Microsoft New Tai Lue"/>
-        <a:font script="Tfng" typeface="Ebrima"/>
       </a:majorFont>
       <a:minorFont>
-        <a:latin typeface="Aptos" panose="02110004020202020204"/>
+        <a:latin typeface="Calibri"/>
         <a:ea typeface=""/>
         <a:cs typeface=""/>
-        <a:font script="Jpan" typeface="游ゴシック"/>
+        <a:font script="Jpan" typeface="ＭＳ Ｐゴシック"/>
         <a:font script="Hang" typeface="맑은 고딕"/>
-        <a:font script="Hans" typeface="等线"/>
+        <a:font script="Hans" typeface="宋体"/>
         <a:font script="Hant" typeface="新細明體"/>
         <a:font script="Arab" typeface="Arial"/>
         <a:font script="Hebr" typeface="Arial"/>
@@ -18260,23 +18511,6 @@
         <a:font script="Viet" typeface="Arial"/>
         <a:font script="Uigh" typeface="Microsoft Uighur"/>
         <a:font script="Geor" typeface="Sylfaen"/>
-        <a:font script="Armn" typeface="Arial"/>
-        <a:font script="Bugi" typeface="Leelawadee UI"/>
-        <a:font script="Bopo" typeface="Microsoft JhengHei"/>
-        <a:font script="Java" typeface="Javanese Text"/>
-        <a:font script="Lisu" typeface="Segoe UI"/>
-        <a:font script="Mymr" typeface="Myanmar Text"/>
-        <a:font script="Nkoo" typeface="Ebrima"/>
-        <a:font script="Olck" typeface="Nirmala UI"/>
-        <a:font script="Osma" typeface="Ebrima"/>
-        <a:font script="Phag" typeface="Phagspa"/>
-        <a:font script="Syrn" typeface="Estrangelo Edessa"/>
-        <a:font script="Syrj" typeface="Estrangelo Edessa"/>
-        <a:font script="Syre" typeface="Estrangelo Edessa"/>
-        <a:font script="Sora" typeface="Nirmala UI"/>
-        <a:font script="Tale" typeface="Microsoft Tai Le"/>
-        <a:font script="Talu" typeface="Microsoft New Tai Lue"/>
-        <a:font script="Tfng" typeface="Ebrima"/>
       </a:minorFont>
     </a:fontScheme>
     <a:fmtScheme name="Office">
@@ -18288,136 +18522,180 @@
           <a:gsLst>
             <a:gs pos="0">
               <a:schemeClr val="phClr">
-                <a:lumMod val="110000"/>
-                <a:satMod val="105000"/>
-                <a:tint val="67000"/>
+                <a:tint val="50000"/>
+                <a:satMod val="300000"/>
               </a:schemeClr>
             </a:gs>
-            <a:gs pos="50000">
+            <a:gs pos="35000">
               <a:schemeClr val="phClr">
-                <a:lumMod val="105000"/>
-                <a:satMod val="103000"/>
-                <a:tint val="73000"/>
+                <a:tint val="37000"/>
+                <a:satMod val="300000"/>
               </a:schemeClr>
             </a:gs>
             <a:gs pos="100000">
               <a:schemeClr val="phClr">
-                <a:lumMod val="105000"/>
-                <a:satMod val="109000"/>
-                <a:tint val="81000"/>
+                <a:tint val="15000"/>
+                <a:satMod val="350000"/>
               </a:schemeClr>
             </a:gs>
           </a:gsLst>
-          <a:lin ang="5400000" scaled="0"/>
+          <a:lin ang="16200000" scaled="1"/>
         </a:gradFill>
         <a:gradFill rotWithShape="1">
           <a:gsLst>
             <a:gs pos="0">
               <a:schemeClr val="phClr">
-                <a:satMod val="103000"/>
-                <a:lumMod val="102000"/>
-                <a:tint val="94000"/>
-              </a:schemeClr>
-            </a:gs>
-            <a:gs pos="50000">
-              <a:schemeClr val="phClr">
-                <a:satMod val="110000"/>
-                <a:lumMod val="100000"/>
+                <a:tint val="100000"/>
                 <a:shade val="100000"/>
+                <a:satMod val="130000"/>
               </a:schemeClr>
             </a:gs>
             <a:gs pos="100000">
               <a:schemeClr val="phClr">
-                <a:lumMod val="99000"/>
-                <a:satMod val="120000"/>
-                <a:shade val="78000"/>
+                <a:tint val="50000"/>
+                <a:shade val="100000"/>
+                <a:satMod val="350000"/>
               </a:schemeClr>
             </a:gs>
           </a:gsLst>
-          <a:lin ang="5400000" scaled="0"/>
+          <a:lin ang="16200000" scaled="0"/>
         </a:gradFill>
       </a:fillStyleLst>
       <a:lnStyleLst>
-        <a:ln w="12700" cap="flat" cmpd="sng" algn="ctr">
+        <a:ln w="9525" cap="flat" cmpd="sng" algn="ctr">
           <a:solidFill>
-            <a:schemeClr val="phClr"/>
+            <a:schemeClr val="phClr">
+              <a:shade val="95000"/>
+              <a:satMod val="105000"/>
+            </a:schemeClr>
           </a:solidFill>
           <a:prstDash val="solid"/>
-          <a:miter lim="800000"/>
-        </a:ln>
-        <a:ln w="19050" cap="flat" cmpd="sng" algn="ctr">
-          <a:solidFill>
-            <a:schemeClr val="phClr"/>
-          </a:solidFill>
-          <a:prstDash val="solid"/>
-          <a:miter lim="800000"/>
         </a:ln>
         <a:ln w="25400" cap="flat" cmpd="sng" algn="ctr">
           <a:solidFill>
             <a:schemeClr val="phClr"/>
           </a:solidFill>
           <a:prstDash val="solid"/>
-          <a:miter lim="800000"/>
+        </a:ln>
+        <a:ln w="38100" cap="flat" cmpd="sng" algn="ctr">
+          <a:solidFill>
+            <a:schemeClr val="phClr"/>
+          </a:solidFill>
+          <a:prstDash val="solid"/>
         </a:ln>
       </a:lnStyleLst>
       <a:effectStyleLst>
         <a:effectStyle>
-          <a:effectLst/>
-        </a:effectStyle>
-        <a:effectStyle>
-          <a:effectLst/>
+          <a:effectLst>
+            <a:outerShdw blurRad="40000" dist="20000" dir="5400000" rotWithShape="0">
+              <a:srgbClr val="000000">
+                <a:alpha val="38000"/>
+              </a:srgbClr>
+            </a:outerShdw>
+          </a:effectLst>
         </a:effectStyle>
         <a:effectStyle>
           <a:effectLst>
-            <a:outerShdw blurRad="57150" dist="19050" dir="5400000" algn="ctr" rotWithShape="0">
+            <a:outerShdw blurRad="40000" dist="23000" dir="5400000" rotWithShape="0">
               <a:srgbClr val="000000">
-                <a:alpha val="63000"/>
+                <a:alpha val="35000"/>
               </a:srgbClr>
             </a:outerShdw>
           </a:effectLst>
+        </a:effectStyle>
+        <a:effectStyle>
+          <a:effectLst>
+            <a:outerShdw blurRad="40000" dist="23000" dir="5400000" rotWithShape="0">
+              <a:srgbClr val="000000">
+                <a:alpha val="35000"/>
+              </a:srgbClr>
+            </a:outerShdw>
+          </a:effectLst>
+          <a:scene3d>
+            <a:camera prst="orthographicFront">
+              <a:rot lat="0" lon="0" rev="0"/>
+            </a:camera>
+            <a:lightRig rig="threePt" dir="t">
+              <a:rot lat="0" lon="0" rev="1200000"/>
+            </a:lightRig>
+          </a:scene3d>
+          <a:sp3d>
+            <a:bevelT w="63500" h="25400"/>
+          </a:sp3d>
         </a:effectStyle>
       </a:effectStyleLst>
       <a:bgFillStyleLst>
         <a:solidFill>
           <a:schemeClr val="phClr"/>
         </a:solidFill>
-        <a:solidFill>
-          <a:schemeClr val="phClr">
-            <a:tint val="95000"/>
-            <a:satMod val="170000"/>
-          </a:schemeClr>
-        </a:solidFill>
         <a:gradFill rotWithShape="1">
           <a:gsLst>
             <a:gs pos="0">
               <a:schemeClr val="phClr">
-                <a:tint val="93000"/>
-                <a:satMod val="150000"/>
-                <a:shade val="98000"/>
-                <a:lumMod val="102000"/>
+                <a:tint val="40000"/>
+                <a:satMod val="350000"/>
               </a:schemeClr>
             </a:gs>
-            <a:gs pos="50000">
+            <a:gs pos="40000">
               <a:schemeClr val="phClr">
-                <a:tint val="98000"/>
-                <a:satMod val="130000"/>
-                <a:shade val="90000"/>
-                <a:lumMod val="103000"/>
+                <a:tint val="45000"/>
+                <a:shade val="99000"/>
+                <a:satMod val="350000"/>
               </a:schemeClr>
             </a:gs>
             <a:gs pos="100000">
               <a:schemeClr val="phClr">
-                <a:shade val="63000"/>
-                <a:satMod val="120000"/>
+                <a:shade val="20000"/>
+                <a:satMod val="255000"/>
               </a:schemeClr>
             </a:gs>
           </a:gsLst>
-          <a:lin ang="5400000" scaled="0"/>
+          <a:path path="circle">
+            <a:fillToRect l="50000" t="-80000" r="50000" b="180000"/>
+          </a:path>
+        </a:gradFill>
+        <a:gradFill rotWithShape="1">
+          <a:gsLst>
+            <a:gs pos="0">
+              <a:schemeClr val="phClr">
+                <a:tint val="80000"/>
+                <a:satMod val="300000"/>
+              </a:schemeClr>
+            </a:gs>
+            <a:gs pos="100000">
+              <a:schemeClr val="phClr">
+                <a:shade val="30000"/>
+                <a:satMod val="200000"/>
+              </a:schemeClr>
+            </a:gs>
+          </a:gsLst>
+          <a:path path="circle">
+            <a:fillToRect l="50000" t="50000" r="50000" b="50000"/>
+          </a:path>
         </a:gradFill>
       </a:bgFillStyleLst>
     </a:fmtScheme>
   </a:themeElements>
   <a:objectDefaults>
+    <a:spDef>
+      <a:spPr/>
+      <a:bodyPr/>
+      <a:lstStyle/>
+      <a:style>
+        <a:lnRef idx="1">
+          <a:schemeClr val="accent1"/>
+        </a:lnRef>
+        <a:fillRef idx="3">
+          <a:schemeClr val="accent1"/>
+        </a:fillRef>
+        <a:effectRef idx="2">
+          <a:schemeClr val="accent1"/>
+        </a:effectRef>
+        <a:fontRef idx="minor">
+          <a:schemeClr val="lt1"/>
+        </a:fontRef>
+      </a:style>
+    </a:spDef>
     <a:lnDef>
       <a:spPr/>
       <a:bodyPr/>
@@ -18439,10 +18717,5 @@
     </a:lnDef>
   </a:objectDefaults>
   <a:extraClrSchemeLst/>
-  <a:extLst>
-    <a:ext uri="{05A4C25C-085E-4340-85A3-A5531E510DB2}">
-      <thm15:themeFamily xmlns:thm15="http://schemas.microsoft.com/office/thememl/2012/main" name="Office Theme" id="{2E142A2C-CD16-42D6-873A-C26D2A0506FA}" vid="{1BDDFF52-6CD6-40A5-AB3C-68EB2F1E4D0A}"/>
-    </a:ext>
-  </a:extLst>
 </a:theme>
 </file>